--- a/training/day-2/2_ReactJS_Day_Two_Subha_Prasad.pptx
+++ b/training/day-2/2_ReactJS_Day_Two_Subha_Prasad.pptx
@@ -2,42 +2,42 @@
 <file path=ppt/presentation.xml><?xml version="1.0" encoding="utf-8"?>
 <p:presentation xmlns:p="http://schemas.openxmlformats.org/presentationml/2006/main">
   <p:sldMasterIdLst>
-    <p:sldMasterId xmlns:r="http://schemas.openxmlformats.org/officeDocument/2006/relationships" id="2147483648" r:id="R1f8239c66e534ee9"/>
+    <p:sldMasterId xmlns:r="http://schemas.openxmlformats.org/officeDocument/2006/relationships" id="2147483648" r:id="R5f3fdf63152349a7"/>
   </p:sldMasterIdLst>
   <p:notesMasterIdLst>
-    <p:notesMasterId xmlns:r="http://schemas.openxmlformats.org/officeDocument/2006/relationships" r:id="R5a2c1aa862774136"/>
+    <p:notesMasterId xmlns:r="http://schemas.openxmlformats.org/officeDocument/2006/relationships" r:id="R2e1ee12cfeef4f12"/>
   </p:notesMasterIdLst>
   <p:sldIdLst>
-    <p:sldId xmlns:r="http://schemas.openxmlformats.org/officeDocument/2006/relationships" id="256" r:id="R3e9189f387804b61"/>
-    <p:sldId xmlns:r="http://schemas.openxmlformats.org/officeDocument/2006/relationships" id="257" r:id="Rf528b52455e94518"/>
-    <p:sldId xmlns:r="http://schemas.openxmlformats.org/officeDocument/2006/relationships" id="258" r:id="R8cfb8b3b2bf6465b"/>
-    <p:sldId xmlns:r="http://schemas.openxmlformats.org/officeDocument/2006/relationships" id="259" r:id="Ra38e14ca97ab4ab8"/>
-    <p:sldId xmlns:r="http://schemas.openxmlformats.org/officeDocument/2006/relationships" id="260" r:id="Rb982d1a952f9470d"/>
-    <p:sldId xmlns:r="http://schemas.openxmlformats.org/officeDocument/2006/relationships" id="261" r:id="Ra4838705c4544311"/>
-    <p:sldId xmlns:r="http://schemas.openxmlformats.org/officeDocument/2006/relationships" id="262" r:id="Ra743034b24504438"/>
-    <p:sldId xmlns:r="http://schemas.openxmlformats.org/officeDocument/2006/relationships" id="263" r:id="R924bc459e6934e92"/>
-    <p:sldId xmlns:r="http://schemas.openxmlformats.org/officeDocument/2006/relationships" id="264" r:id="R64dd00de40e64154"/>
-    <p:sldId xmlns:r="http://schemas.openxmlformats.org/officeDocument/2006/relationships" id="265" r:id="R974d39cfb09c4b53"/>
-    <p:sldId xmlns:r="http://schemas.openxmlformats.org/officeDocument/2006/relationships" id="266" r:id="R0e7b64e812cd435e"/>
-    <p:sldId xmlns:r="http://schemas.openxmlformats.org/officeDocument/2006/relationships" id="267" r:id="R514e2c81dec34075"/>
-    <p:sldId xmlns:r="http://schemas.openxmlformats.org/officeDocument/2006/relationships" id="268" r:id="R2c3b3d0358f344f3"/>
-    <p:sldId xmlns:r="http://schemas.openxmlformats.org/officeDocument/2006/relationships" id="269" r:id="R301b7d3dbab74603"/>
-    <p:sldId xmlns:r="http://schemas.openxmlformats.org/officeDocument/2006/relationships" id="270" r:id="Rdc1319be4e3e4e92"/>
-    <p:sldId xmlns:r="http://schemas.openxmlformats.org/officeDocument/2006/relationships" id="271" r:id="R38d25eaf0de74fb8"/>
-    <p:sldId xmlns:r="http://schemas.openxmlformats.org/officeDocument/2006/relationships" id="272" r:id="Rbc853bb22f194325"/>
-    <p:sldId xmlns:r="http://schemas.openxmlformats.org/officeDocument/2006/relationships" id="273" r:id="Rb17f31b3e9384cec"/>
-    <p:sldId xmlns:r="http://schemas.openxmlformats.org/officeDocument/2006/relationships" id="274" r:id="R27068094c1ad4a57"/>
-    <p:sldId xmlns:r="http://schemas.openxmlformats.org/officeDocument/2006/relationships" id="275" r:id="R5433610aa48a49e9"/>
-    <p:sldId xmlns:r="http://schemas.openxmlformats.org/officeDocument/2006/relationships" id="276" r:id="Rb24c812ad8434d82"/>
-    <p:sldId xmlns:r="http://schemas.openxmlformats.org/officeDocument/2006/relationships" id="277" r:id="R7ed67bf1c9ff414e"/>
-    <p:sldId xmlns:r="http://schemas.openxmlformats.org/officeDocument/2006/relationships" id="278" r:id="Ref18218e8ea2438f"/>
-    <p:sldId xmlns:r="http://schemas.openxmlformats.org/officeDocument/2006/relationships" id="279" r:id="R0f894d64a70d42f0"/>
-    <p:sldId xmlns:r="http://schemas.openxmlformats.org/officeDocument/2006/relationships" id="280" r:id="R5d940e287aa94823"/>
-    <p:sldId xmlns:r="http://schemas.openxmlformats.org/officeDocument/2006/relationships" id="281" r:id="Ra4ef6a2509d241fc"/>
-    <p:sldId xmlns:r="http://schemas.openxmlformats.org/officeDocument/2006/relationships" id="282" r:id="R003d83eb27f346c5"/>
-    <p:sldId xmlns:r="http://schemas.openxmlformats.org/officeDocument/2006/relationships" id="283" r:id="Rca4b29bd22db47ee"/>
-    <p:sldId xmlns:r="http://schemas.openxmlformats.org/officeDocument/2006/relationships" id="284" r:id="R0d035fa972004251"/>
-    <p:sldId xmlns:r="http://schemas.openxmlformats.org/officeDocument/2006/relationships" id="285" r:id="Rab6e9b30844846d8"/>
+    <p:sldId xmlns:r="http://schemas.openxmlformats.org/officeDocument/2006/relationships" id="256" r:id="Rd2e49fd75f544681"/>
+    <p:sldId xmlns:r="http://schemas.openxmlformats.org/officeDocument/2006/relationships" id="257" r:id="R4cf6a8dcd4f04e24"/>
+    <p:sldId xmlns:r="http://schemas.openxmlformats.org/officeDocument/2006/relationships" id="258" r:id="Rc8ebc08676c446b9"/>
+    <p:sldId xmlns:r="http://schemas.openxmlformats.org/officeDocument/2006/relationships" id="259" r:id="R7e828d0835a04151"/>
+    <p:sldId xmlns:r="http://schemas.openxmlformats.org/officeDocument/2006/relationships" id="260" r:id="R2b9ac4a823b24312"/>
+    <p:sldId xmlns:r="http://schemas.openxmlformats.org/officeDocument/2006/relationships" id="261" r:id="Re8bf93327ac74a33"/>
+    <p:sldId xmlns:r="http://schemas.openxmlformats.org/officeDocument/2006/relationships" id="262" r:id="R82a2765e09ff4928"/>
+    <p:sldId xmlns:r="http://schemas.openxmlformats.org/officeDocument/2006/relationships" id="263" r:id="R5a1700f4f9bd48c4"/>
+    <p:sldId xmlns:r="http://schemas.openxmlformats.org/officeDocument/2006/relationships" id="264" r:id="Re0e0a118609b4e57"/>
+    <p:sldId xmlns:r="http://schemas.openxmlformats.org/officeDocument/2006/relationships" id="265" r:id="Rda01dd8a07cf4dd7"/>
+    <p:sldId xmlns:r="http://schemas.openxmlformats.org/officeDocument/2006/relationships" id="266" r:id="Rab82d5c0427f42a4"/>
+    <p:sldId xmlns:r="http://schemas.openxmlformats.org/officeDocument/2006/relationships" id="267" r:id="Ra3d59ba499224631"/>
+    <p:sldId xmlns:r="http://schemas.openxmlformats.org/officeDocument/2006/relationships" id="268" r:id="Ra83a109e162c41c2"/>
+    <p:sldId xmlns:r="http://schemas.openxmlformats.org/officeDocument/2006/relationships" id="269" r:id="Ree13479af5504f26"/>
+    <p:sldId xmlns:r="http://schemas.openxmlformats.org/officeDocument/2006/relationships" id="270" r:id="Rfca5a0d345fa446f"/>
+    <p:sldId xmlns:r="http://schemas.openxmlformats.org/officeDocument/2006/relationships" id="271" r:id="R6cc3083aec7247f8"/>
+    <p:sldId xmlns:r="http://schemas.openxmlformats.org/officeDocument/2006/relationships" id="272" r:id="R3cdedc83474d4f88"/>
+    <p:sldId xmlns:r="http://schemas.openxmlformats.org/officeDocument/2006/relationships" id="273" r:id="Rdac4bf8c87754b00"/>
+    <p:sldId xmlns:r="http://schemas.openxmlformats.org/officeDocument/2006/relationships" id="274" r:id="R88ec6d50e4eb4846"/>
+    <p:sldId xmlns:r="http://schemas.openxmlformats.org/officeDocument/2006/relationships" id="275" r:id="R9af6577197194312"/>
+    <p:sldId xmlns:r="http://schemas.openxmlformats.org/officeDocument/2006/relationships" id="276" r:id="R9a8dc85e5c594dbb"/>
+    <p:sldId xmlns:r="http://schemas.openxmlformats.org/officeDocument/2006/relationships" id="277" r:id="Ra7fda949b6154497"/>
+    <p:sldId xmlns:r="http://schemas.openxmlformats.org/officeDocument/2006/relationships" id="278" r:id="R5ce3afe597a24158"/>
+    <p:sldId xmlns:r="http://schemas.openxmlformats.org/officeDocument/2006/relationships" id="279" r:id="R853880d8543f4122"/>
+    <p:sldId xmlns:r="http://schemas.openxmlformats.org/officeDocument/2006/relationships" id="280" r:id="R50c0a10ca0e944c8"/>
+    <p:sldId xmlns:r="http://schemas.openxmlformats.org/officeDocument/2006/relationships" id="281" r:id="Rcda296663afe46ba"/>
+    <p:sldId xmlns:r="http://schemas.openxmlformats.org/officeDocument/2006/relationships" id="282" r:id="Reb4517edb7454a6b"/>
+    <p:sldId xmlns:r="http://schemas.openxmlformats.org/officeDocument/2006/relationships" id="283" r:id="R8da98d75f8bc46d9"/>
+    <p:sldId xmlns:r="http://schemas.openxmlformats.org/officeDocument/2006/relationships" id="284" r:id="Rb353a477d5054ab0"/>
+    <p:sldId xmlns:r="http://schemas.openxmlformats.org/officeDocument/2006/relationships" id="285" r:id="Rc151d6d33c8a4ac3"/>
   </p:sldIdLst>
   <p:sldSz cx="12192000" cy="6858000"/>
   <p:notesSz cx="6858000" cy="9144000"/>
@@ -471,17 +471,42 @@
           <a:lstStyle xmlns:a="http://schemas.openxmlformats.org/drawingml/2006/main"/>
           <a:p xmlns:a="http://schemas.openxmlformats.org/drawingml/2006/main">
             <a:r>
-              <a:t>Allocated time: 1 minutes.</a:t>
-            </a:r>
-          </a:p>
-          <a:p xmlns:a="http://schemas.openxmlformats.org/drawingml/2006/main">
-            <a:r>
-              <a:t>Welcome learners. This session builds on Day 1. The project uses fictional asset data.</a:t>
-            </a:r>
-          </a:p>
-          <a:p xmlns:a="http://schemas.openxmlformats.org/drawingml/2006/main">
-            <a:r>
-              <a:t>Teaching cue: predict the result before executing the example. Code blocks are excerpts unless shown as complete components.</a:t>
+              <a:t>## Slide 1: ReactJS · Day Two</a:t>
+            </a:r>
+          </a:p>
+          <a:p xmlns:a="http://schemas.openxmlformats.org/drawingml/2006/main">
+            <a:r>
+              <a:t/>
+            </a:r>
+          </a:p>
+          <a:p xmlns:a="http://schemas.openxmlformats.org/drawingml/2006/main">
+            <a:r>
+              <a:t>Time: 1 minute.</a:t>
+            </a:r>
+          </a:p>
+          <a:p xmlns:a="http://schemas.openxmlformats.org/drawingml/2006/main">
+            <a:r>
+              <a:t/>
+            </a:r>
+          </a:p>
+          <a:p xmlns:a="http://schemas.openxmlformats.org/drawingml/2006/main">
+            <a:r>
+              <a:t>Welcome learners. This session builds on Day 1. The project uses fictional product data.</a:t>
+            </a:r>
+          </a:p>
+          <a:p xmlns:a="http://schemas.openxmlformats.org/drawingml/2006/main">
+            <a:r>
+              <a:t/>
+            </a:r>
+          </a:p>
+          <a:p xmlns:a="http://schemas.openxmlformats.org/drawingml/2006/main">
+            <a:r>
+              <a:t/>
+            </a:r>
+          </a:p>
+          <a:p xmlns:a="http://schemas.openxmlformats.org/drawingml/2006/main">
+            <a:r>
+              <a:t>Project example: Product Catalog. Products have a numeric INR price and a boolean inStock field.</a:t>
             </a:r>
           </a:p>
         </p:txBody>
@@ -551,17 +576,42 @@
           <a:lstStyle xmlns:a="http://schemas.openxmlformats.org/drawingml/2006/main"/>
           <a:p xmlns:a="http://schemas.openxmlformats.org/drawingml/2006/main">
             <a:r>
-              <a:t>Allocated time: 1 minutes.</a:t>
-            </a:r>
-          </a:p>
-          <a:p xmlns:a="http://schemas.openxmlformats.org/drawingml/2006/main">
-            <a:r>
-              <a:t>Ask learners why showLocation="false" would still be truthy. Source: https://react.dev/learn/passing-props-to-a-component</a:t>
-            </a:r>
-          </a:p>
-          <a:p xmlns:a="http://schemas.openxmlformats.org/drawingml/2006/main">
-            <a:r>
-              <a:t>Teaching cue: predict the result before executing the example. Code blocks are excerpts unless shown as complete components.</a:t>
+              <a:t>## Slide 10: Passing different value types</a:t>
+            </a:r>
+          </a:p>
+          <a:p xmlns:a="http://schemas.openxmlformats.org/drawingml/2006/main">
+            <a:r>
+              <a:t/>
+            </a:r>
+          </a:p>
+          <a:p xmlns:a="http://schemas.openxmlformats.org/drawingml/2006/main">
+            <a:r>
+              <a:t>Time: 1 minute.</a:t>
+            </a:r>
+          </a:p>
+          <a:p xmlns:a="http://schemas.openxmlformats.org/drawingml/2006/main">
+            <a:r>
+              <a:t/>
+            </a:r>
+          </a:p>
+          <a:p xmlns:a="http://schemas.openxmlformats.org/drawingml/2006/main">
+            <a:r>
+              <a:t>Ask learners why showCategory="false" would still be truthy. Source: https://react.dev/learn/passing-props-to-a-component</a:t>
+            </a:r>
+          </a:p>
+          <a:p xmlns:a="http://schemas.openxmlformats.org/drawingml/2006/main">
+            <a:r>
+              <a:t/>
+            </a:r>
+          </a:p>
+          <a:p xmlns:a="http://schemas.openxmlformats.org/drawingml/2006/main">
+            <a:r>
+              <a:t/>
+            </a:r>
+          </a:p>
+          <a:p xmlns:a="http://schemas.openxmlformats.org/drawingml/2006/main">
+            <a:r>
+              <a:t>Project example: Product Catalog. Products have a numeric INR price and a boolean inStock field.</a:t>
             </a:r>
           </a:p>
         </p:txBody>
@@ -631,7 +681,22 @@
           <a:lstStyle xmlns:a="http://schemas.openxmlformats.org/drawingml/2006/main"/>
           <a:p xmlns:a="http://schemas.openxmlformats.org/drawingml/2006/main">
             <a:r>
-              <a:t>Allocated time: 1 minutes.</a:t>
+              <a:t>## Slide 11: Default values</a:t>
+            </a:r>
+          </a:p>
+          <a:p xmlns:a="http://schemas.openxmlformats.org/drawingml/2006/main">
+            <a:r>
+              <a:t/>
+            </a:r>
+          </a:p>
+          <a:p xmlns:a="http://schemas.openxmlformats.org/drawingml/2006/main">
+            <a:r>
+              <a:t>Time: 1 minute.</a:t>
+            </a:r>
+          </a:p>
+          <a:p xmlns:a="http://schemas.openxmlformats.org/drawingml/2006/main">
+            <a:r>
+              <a:t/>
             </a:r>
           </a:p>
           <a:p xmlns:a="http://schemas.openxmlformats.org/drawingml/2006/main">
@@ -641,7 +706,17 @@
           </a:p>
           <a:p xmlns:a="http://schemas.openxmlformats.org/drawingml/2006/main">
             <a:r>
-              <a:t>Teaching cue: predict the result before executing the example. Code blocks are excerpts unless shown as complete components.</a:t>
+              <a:t/>
+            </a:r>
+          </a:p>
+          <a:p xmlns:a="http://schemas.openxmlformats.org/drawingml/2006/main">
+            <a:r>
+              <a:t/>
+            </a:r>
+          </a:p>
+          <a:p xmlns:a="http://schemas.openxmlformats.org/drawingml/2006/main">
+            <a:r>
+              <a:t>Project example: Product Catalog. Products have a numeric INR price and a boolean inStock field.</a:t>
             </a:r>
           </a:p>
         </p:txBody>
@@ -711,17 +786,42 @@
           <a:lstStyle xmlns:a="http://schemas.openxmlformats.org/drawingml/2006/main"/>
           <a:p xmlns:a="http://schemas.openxmlformats.org/drawingml/2006/main">
             <a:r>
-              <a:t>Allocated time: 2 minutes.</a:t>
-            </a:r>
-          </a:p>
-          <a:p xmlns:a="http://schemas.openxmlformats.org/drawingml/2006/main">
-            <a:r>
-              <a:t>Avoid modifying incoming asset.status. State updates arrive on Day 3. Source: https://react.dev/learn/passing-props-to-a-component</a:t>
-            </a:r>
-          </a:p>
-          <a:p xmlns:a="http://schemas.openxmlformats.org/drawingml/2006/main">
-            <a:r>
-              <a:t>Teaching cue: predict the result before executing the example. Code blocks are excerpts unless shown as complete components.</a:t>
+              <a:t>## Slide 12: Props are read-only inputs</a:t>
+            </a:r>
+          </a:p>
+          <a:p xmlns:a="http://schemas.openxmlformats.org/drawingml/2006/main">
+            <a:r>
+              <a:t/>
+            </a:r>
+          </a:p>
+          <a:p xmlns:a="http://schemas.openxmlformats.org/drawingml/2006/main">
+            <a:r>
+              <a:t>Time: 2 minutes.</a:t>
+            </a:r>
+          </a:p>
+          <a:p xmlns:a="http://schemas.openxmlformats.org/drawingml/2006/main">
+            <a:r>
+              <a:t/>
+            </a:r>
+          </a:p>
+          <a:p xmlns:a="http://schemas.openxmlformats.org/drawingml/2006/main">
+            <a:r>
+              <a:t>Avoid modifying incoming product.inStock. State updates arrive on Day 3. Source: https://react.dev/learn/passing-props-to-a-component</a:t>
+            </a:r>
+          </a:p>
+          <a:p xmlns:a="http://schemas.openxmlformats.org/drawingml/2006/main">
+            <a:r>
+              <a:t/>
+            </a:r>
+          </a:p>
+          <a:p xmlns:a="http://schemas.openxmlformats.org/drawingml/2006/main">
+            <a:r>
+              <a:t/>
+            </a:r>
+          </a:p>
+          <a:p xmlns:a="http://schemas.openxmlformats.org/drawingml/2006/main">
+            <a:r>
+              <a:t>Project example: Product Catalog. Products have a numeric INR price and a boolean inStock field.</a:t>
             </a:r>
           </a:p>
         </p:txBody>
@@ -791,7 +891,22 @@
           <a:lstStyle xmlns:a="http://schemas.openxmlformats.org/drawingml/2006/main"/>
           <a:p xmlns:a="http://schemas.openxmlformats.org/drawingml/2006/main">
             <a:r>
-              <a:t>Allocated time: 2 minutes.</a:t>
+              <a:t>## Slide 13: Nested content becomes children</a:t>
+            </a:r>
+          </a:p>
+          <a:p xmlns:a="http://schemas.openxmlformats.org/drawingml/2006/main">
+            <a:r>
+              <a:t/>
+            </a:r>
+          </a:p>
+          <a:p xmlns:a="http://schemas.openxmlformats.org/drawingml/2006/main">
+            <a:r>
+              <a:t>Time: 2 minutes.</a:t>
+            </a:r>
+          </a:p>
+          <a:p xmlns:a="http://schemas.openxmlformats.org/drawingml/2006/main">
+            <a:r>
+              <a:t/>
             </a:r>
           </a:p>
           <a:p xmlns:a="http://schemas.openxmlformats.org/drawingml/2006/main">
@@ -801,7 +916,17 @@
           </a:p>
           <a:p xmlns:a="http://schemas.openxmlformats.org/drawingml/2006/main">
             <a:r>
-              <a:t>Teaching cue: predict the result before executing the example. Code blocks are excerpts unless shown as complete components.</a:t>
+              <a:t/>
+            </a:r>
+          </a:p>
+          <a:p xmlns:a="http://schemas.openxmlformats.org/drawingml/2006/main">
+            <a:r>
+              <a:t/>
+            </a:r>
+          </a:p>
+          <a:p xmlns:a="http://schemas.openxmlformats.org/drawingml/2006/main">
+            <a:r>
+              <a:t>Project example: Product Catalog. Products have a numeric INR price and a boolean inStock field.</a:t>
             </a:r>
           </a:p>
         </p:txBody>
@@ -871,7 +996,22 @@
           <a:lstStyle xmlns:a="http://schemas.openxmlformats.org/drawingml/2006/main"/>
           <a:p xmlns:a="http://schemas.openxmlformats.org/drawingml/2006/main">
             <a:r>
-              <a:t>Allocated time: 1 minutes.</a:t>
+              <a:t>## Slide 14: The same wrapper, different content</a:t>
+            </a:r>
+          </a:p>
+          <a:p xmlns:a="http://schemas.openxmlformats.org/drawingml/2006/main">
+            <a:r>
+              <a:t/>
+            </a:r>
+          </a:p>
+          <a:p xmlns:a="http://schemas.openxmlformats.org/drawingml/2006/main">
+            <a:r>
+              <a:t>Time: 1 minute.</a:t>
+            </a:r>
+          </a:p>
+          <a:p xmlns:a="http://schemas.openxmlformats.org/drawingml/2006/main">
+            <a:r>
+              <a:t/>
             </a:r>
           </a:p>
           <a:p xmlns:a="http://schemas.openxmlformats.org/drawingml/2006/main">
@@ -881,7 +1021,17 @@
           </a:p>
           <a:p xmlns:a="http://schemas.openxmlformats.org/drawingml/2006/main">
             <a:r>
-              <a:t>Teaching cue: predict the result before executing the example. Code blocks are excerpts unless shown as complete components.</a:t>
+              <a:t/>
+            </a:r>
+          </a:p>
+          <a:p xmlns:a="http://schemas.openxmlformats.org/drawingml/2006/main">
+            <a:r>
+              <a:t/>
+            </a:r>
+          </a:p>
+          <a:p xmlns:a="http://schemas.openxmlformats.org/drawingml/2006/main">
+            <a:r>
+              <a:t>Project example: Product Catalog. Products have a numeric INR price and a boolean inStock field.</a:t>
             </a:r>
           </a:p>
         </p:txBody>
@@ -951,7 +1101,22 @@
           <a:lstStyle xmlns:a="http://schemas.openxmlformats.org/drawingml/2006/main"/>
           <a:p xmlns:a="http://schemas.openxmlformats.org/drawingml/2006/main">
             <a:r>
-              <a:t>Allocated time: 2 minutes.</a:t>
+              <a:t>## Slide 15: An early return chooses another UI</a:t>
+            </a:r>
+          </a:p>
+          <a:p xmlns:a="http://schemas.openxmlformats.org/drawingml/2006/main">
+            <a:r>
+              <a:t/>
+            </a:r>
+          </a:p>
+          <a:p xmlns:a="http://schemas.openxmlformats.org/drawingml/2006/main">
+            <a:r>
+              <a:t>Time: 2 minutes.</a:t>
+            </a:r>
+          </a:p>
+          <a:p xmlns:a="http://schemas.openxmlformats.org/drawingml/2006/main">
+            <a:r>
+              <a:t/>
             </a:r>
           </a:p>
           <a:p xmlns:a="http://schemas.openxmlformats.org/drawingml/2006/main">
@@ -961,7 +1126,17 @@
           </a:p>
           <a:p xmlns:a="http://schemas.openxmlformats.org/drawingml/2006/main">
             <a:r>
-              <a:t>Teaching cue: predict the result before executing the example. Code blocks are excerpts unless shown as complete components.</a:t>
+              <a:t/>
+            </a:r>
+          </a:p>
+          <a:p xmlns:a="http://schemas.openxmlformats.org/drawingml/2006/main">
+            <a:r>
+              <a:t/>
+            </a:r>
+          </a:p>
+          <a:p xmlns:a="http://schemas.openxmlformats.org/drawingml/2006/main">
+            <a:r>
+              <a:t>Project example: Product Catalog. Products have a numeric INR price and a boolean inStock field.</a:t>
             </a:r>
           </a:p>
         </p:txBody>
@@ -1031,17 +1206,42 @@
           <a:lstStyle xmlns:a="http://schemas.openxmlformats.org/drawingml/2006/main"/>
           <a:p xmlns:a="http://schemas.openxmlformats.org/drawingml/2006/main">
             <a:r>
-              <a:t>Allocated time: 1 minutes.</a:t>
-            </a:r>
-          </a:p>
-          <a:p xmlns:a="http://schemas.openxmlformats.org/drawingml/2006/main">
-            <a:r>
-              <a:t>Ask learners which branch Available selects. Source: https://react.dev/learn/conditional-rendering</a:t>
-            </a:r>
-          </a:p>
-          <a:p xmlns:a="http://schemas.openxmlformats.org/drawingml/2006/main">
-            <a:r>
-              <a:t>Teaching cue: predict the result before executing the example. Code blocks are excerpts unless shown as complete components.</a:t>
+              <a:t>## Slide 16: A ternary selects between two values</a:t>
+            </a:r>
+          </a:p>
+          <a:p xmlns:a="http://schemas.openxmlformats.org/drawingml/2006/main">
+            <a:r>
+              <a:t/>
+            </a:r>
+          </a:p>
+          <a:p xmlns:a="http://schemas.openxmlformats.org/drawingml/2006/main">
+            <a:r>
+              <a:t>Time: 1 minute.</a:t>
+            </a:r>
+          </a:p>
+          <a:p xmlns:a="http://schemas.openxmlformats.org/drawingml/2006/main">
+            <a:r>
+              <a:t/>
+            </a:r>
+          </a:p>
+          <a:p xmlns:a="http://schemas.openxmlformats.org/drawingml/2006/main">
+            <a:r>
+              <a:t>Ask learners which branch In stock selects. Source: https://react.dev/learn/conditional-rendering</a:t>
+            </a:r>
+          </a:p>
+          <a:p xmlns:a="http://schemas.openxmlformats.org/drawingml/2006/main">
+            <a:r>
+              <a:t/>
+            </a:r>
+          </a:p>
+          <a:p xmlns:a="http://schemas.openxmlformats.org/drawingml/2006/main">
+            <a:r>
+              <a:t/>
+            </a:r>
+          </a:p>
+          <a:p xmlns:a="http://schemas.openxmlformats.org/drawingml/2006/main">
+            <a:r>
+              <a:t>Project example: Product Catalog. Products have a numeric INR price and a boolean inStock field.</a:t>
             </a:r>
           </a:p>
         </p:txBody>
@@ -1111,17 +1311,42 @@
           <a:lstStyle xmlns:a="http://schemas.openxmlformats.org/drawingml/2006/main"/>
           <a:p xmlns:a="http://schemas.openxmlformats.org/drawingml/2006/main">
             <a:r>
-              <a:t>Allocated time: 1 minutes.</a:t>
-            </a:r>
-          </a:p>
-          <a:p xmlns:a="http://schemas.openxmlformats.org/drawingml/2006/main">
-            <a:r>
-              <a:t>Show the actual AssetCard and change showLocation in App later. Source: https://react.dev/learn/conditional-rendering</a:t>
-            </a:r>
-          </a:p>
-          <a:p xmlns:a="http://schemas.openxmlformats.org/drawingml/2006/main">
-            <a:r>
-              <a:t>Teaching cue: predict the result before executing the example. Code blocks are excerpts unless shown as complete components.</a:t>
+              <a:t>## Slide 17: &amp;&amp; includes optional content</a:t>
+            </a:r>
+          </a:p>
+          <a:p xmlns:a="http://schemas.openxmlformats.org/drawingml/2006/main">
+            <a:r>
+              <a:t/>
+            </a:r>
+          </a:p>
+          <a:p xmlns:a="http://schemas.openxmlformats.org/drawingml/2006/main">
+            <a:r>
+              <a:t>Time: 1 minute.</a:t>
+            </a:r>
+          </a:p>
+          <a:p xmlns:a="http://schemas.openxmlformats.org/drawingml/2006/main">
+            <a:r>
+              <a:t/>
+            </a:r>
+          </a:p>
+          <a:p xmlns:a="http://schemas.openxmlformats.org/drawingml/2006/main">
+            <a:r>
+              <a:t>Show the actual ProductCard and change showCategory in App later. Source: https://react.dev/learn/conditional-rendering</a:t>
+            </a:r>
+          </a:p>
+          <a:p xmlns:a="http://schemas.openxmlformats.org/drawingml/2006/main">
+            <a:r>
+              <a:t/>
+            </a:r>
+          </a:p>
+          <a:p xmlns:a="http://schemas.openxmlformats.org/drawingml/2006/main">
+            <a:r>
+              <a:t/>
+            </a:r>
+          </a:p>
+          <a:p xmlns:a="http://schemas.openxmlformats.org/drawingml/2006/main">
+            <a:r>
+              <a:t>Project example: Product Catalog. Products have a numeric INR price and a boolean inStock field.</a:t>
             </a:r>
           </a:p>
         </p:txBody>
@@ -1191,7 +1416,22 @@
           <a:lstStyle xmlns:a="http://schemas.openxmlformats.org/drawingml/2006/main"/>
           <a:p xmlns:a="http://schemas.openxmlformats.org/drawingml/2006/main">
             <a:r>
-              <a:t>Allocated time: 1 minutes.</a:t>
+              <a:t>## Slide 18: The zero rendering pitfall</a:t>
+            </a:r>
+          </a:p>
+          <a:p xmlns:a="http://schemas.openxmlformats.org/drawingml/2006/main">
+            <a:r>
+              <a:t/>
+            </a:r>
+          </a:p>
+          <a:p xmlns:a="http://schemas.openxmlformats.org/drawingml/2006/main">
+            <a:r>
+              <a:t>Time: 1 minute.</a:t>
+            </a:r>
+          </a:p>
+          <a:p xmlns:a="http://schemas.openxmlformats.org/drawingml/2006/main">
+            <a:r>
+              <a:t/>
             </a:r>
           </a:p>
           <a:p xmlns:a="http://schemas.openxmlformats.org/drawingml/2006/main">
@@ -1201,7 +1441,17 @@
           </a:p>
           <a:p xmlns:a="http://schemas.openxmlformats.org/drawingml/2006/main">
             <a:r>
-              <a:t>Teaching cue: predict the result before executing the example. Code blocks are excerpts unless shown as complete components.</a:t>
+              <a:t/>
+            </a:r>
+          </a:p>
+          <a:p xmlns:a="http://schemas.openxmlformats.org/drawingml/2006/main">
+            <a:r>
+              <a:t/>
+            </a:r>
+          </a:p>
+          <a:p xmlns:a="http://schemas.openxmlformats.org/drawingml/2006/main">
+            <a:r>
+              <a:t>Project example: Product Catalog. Products have a numeric INR price and a boolean inStock field.</a:t>
             </a:r>
           </a:p>
         </p:txBody>
@@ -1271,7 +1521,22 @@
           <a:lstStyle xmlns:a="http://schemas.openxmlformats.org/drawingml/2006/main"/>
           <a:p xmlns:a="http://schemas.openxmlformats.org/drawingml/2006/main">
             <a:r>
-              <a:t>Allocated time: 1 minutes.</a:t>
+              <a:t>## Slide 19: map returns one element per product</a:t>
+            </a:r>
+          </a:p>
+          <a:p xmlns:a="http://schemas.openxmlformats.org/drawingml/2006/main">
+            <a:r>
+              <a:t/>
+            </a:r>
+          </a:p>
+          <a:p xmlns:a="http://schemas.openxmlformats.org/drawingml/2006/main">
+            <a:r>
+              <a:t>Time: 1 minute.</a:t>
+            </a:r>
+          </a:p>
+          <a:p xmlns:a="http://schemas.openxmlformats.org/drawingml/2006/main">
+            <a:r>
+              <a:t/>
             </a:r>
           </a:p>
           <a:p xmlns:a="http://schemas.openxmlformats.org/drawingml/2006/main">
@@ -1281,7 +1546,17 @@
           </a:p>
           <a:p xmlns:a="http://schemas.openxmlformats.org/drawingml/2006/main">
             <a:r>
-              <a:t>Teaching cue: predict the result before executing the example. Code blocks are excerpts unless shown as complete components.</a:t>
+              <a:t/>
+            </a:r>
+          </a:p>
+          <a:p xmlns:a="http://schemas.openxmlformats.org/drawingml/2006/main">
+            <a:r>
+              <a:t/>
+            </a:r>
+          </a:p>
+          <a:p xmlns:a="http://schemas.openxmlformats.org/drawingml/2006/main">
+            <a:r>
+              <a:t>Project example: Product Catalog. Products have a numeric INR price and a boolean inStock field.</a:t>
             </a:r>
           </a:p>
         </p:txBody>
@@ -1351,17 +1626,42 @@
           <a:lstStyle xmlns:a="http://schemas.openxmlformats.org/drawingml/2006/main"/>
           <a:p xmlns:a="http://schemas.openxmlformats.org/drawingml/2006/main">
             <a:r>
-              <a:t>Allocated time: 1 minutes.</a:t>
-            </a:r>
-          </a:p>
-          <a:p xmlns:a="http://schemas.openxmlformats.org/drawingml/2006/main">
-            <a:r>
-              <a:t>Ask learners to recall the AssetCard from Day 1. The goal is to explain the data flow and change source configuration.</a:t>
-            </a:r>
-          </a:p>
-          <a:p xmlns:a="http://schemas.openxmlformats.org/drawingml/2006/main">
-            <a:r>
-              <a:t>Teaching cue: predict the result before executing the example. Code blocks are excerpts unless shown as complete components.</a:t>
+              <a:t>## Slide 2: Today’s learning outcomes</a:t>
+            </a:r>
+          </a:p>
+          <a:p xmlns:a="http://schemas.openxmlformats.org/drawingml/2006/main">
+            <a:r>
+              <a:t/>
+            </a:r>
+          </a:p>
+          <a:p xmlns:a="http://schemas.openxmlformats.org/drawingml/2006/main">
+            <a:r>
+              <a:t>Time: 1 minute.</a:t>
+            </a:r>
+          </a:p>
+          <a:p xmlns:a="http://schemas.openxmlformats.org/drawingml/2006/main">
+            <a:r>
+              <a:t/>
+            </a:r>
+          </a:p>
+          <a:p xmlns:a="http://schemas.openxmlformats.org/drawingml/2006/main">
+            <a:r>
+              <a:t>Ask learners to recall the ProductCard from Day 1. The goal is to explain the data flow and change source configuration.</a:t>
+            </a:r>
+          </a:p>
+          <a:p xmlns:a="http://schemas.openxmlformats.org/drawingml/2006/main">
+            <a:r>
+              <a:t/>
+            </a:r>
+          </a:p>
+          <a:p xmlns:a="http://schemas.openxmlformats.org/drawingml/2006/main">
+            <a:r>
+              <a:t/>
+            </a:r>
+          </a:p>
+          <a:p xmlns:a="http://schemas.openxmlformats.org/drawingml/2006/main">
+            <a:r>
+              <a:t>Project example: Product Catalog. Products have a numeric INR price and a boolean inStock field.</a:t>
             </a:r>
           </a:p>
         </p:txBody>
@@ -1431,7 +1731,22 @@
           <a:lstStyle xmlns:a="http://schemas.openxmlformats.org/drawingml/2006/main"/>
           <a:p xmlns:a="http://schemas.openxmlformats.org/drawingml/2006/main">
             <a:r>
-              <a:t>Allocated time: 1 minutes.</a:t>
+              <a:t>## Slide 20: Keys follow the item’s identity</a:t>
+            </a:r>
+          </a:p>
+          <a:p xmlns:a="http://schemas.openxmlformats.org/drawingml/2006/main">
+            <a:r>
+              <a:t/>
+            </a:r>
+          </a:p>
+          <a:p xmlns:a="http://schemas.openxmlformats.org/drawingml/2006/main">
+            <a:r>
+              <a:t>Time: 1 minute.</a:t>
+            </a:r>
+          </a:p>
+          <a:p xmlns:a="http://schemas.openxmlformats.org/drawingml/2006/main">
+            <a:r>
+              <a:t/>
             </a:r>
           </a:p>
           <a:p xmlns:a="http://schemas.openxmlformats.org/drawingml/2006/main">
@@ -1441,7 +1756,17 @@
           </a:p>
           <a:p xmlns:a="http://schemas.openxmlformats.org/drawingml/2006/main">
             <a:r>
-              <a:t>Teaching cue: predict the result before executing the example. Code blocks are excerpts unless shown as complete components.</a:t>
+              <a:t/>
+            </a:r>
+          </a:p>
+          <a:p xmlns:a="http://schemas.openxmlformats.org/drawingml/2006/main">
+            <a:r>
+              <a:t/>
+            </a:r>
+          </a:p>
+          <a:p xmlns:a="http://schemas.openxmlformats.org/drawingml/2006/main">
+            <a:r>
+              <a:t>Project example: Product Catalog. Products have a numeric INR price and a boolean inStock field.</a:t>
             </a:r>
           </a:p>
         </p:txBody>
@@ -1511,7 +1836,22 @@
           <a:lstStyle xmlns:a="http://schemas.openxmlformats.org/drawingml/2006/main"/>
           <a:p xmlns:a="http://schemas.openxmlformats.org/drawingml/2006/main">
             <a:r>
-              <a:t>Allocated time: 1 minutes.</a:t>
+              <a:t>## Slide 21: key and regular props</a:t>
+            </a:r>
+          </a:p>
+          <a:p xmlns:a="http://schemas.openxmlformats.org/drawingml/2006/main">
+            <a:r>
+              <a:t/>
+            </a:r>
+          </a:p>
+          <a:p xmlns:a="http://schemas.openxmlformats.org/drawingml/2006/main">
+            <a:r>
+              <a:t>Time: 1 minute.</a:t>
+            </a:r>
+          </a:p>
+          <a:p xmlns:a="http://schemas.openxmlformats.org/drawingml/2006/main">
+            <a:r>
+              <a:t/>
             </a:r>
           </a:p>
           <a:p xmlns:a="http://schemas.openxmlformats.org/drawingml/2006/main">
@@ -1521,7 +1861,17 @@
           </a:p>
           <a:p xmlns:a="http://schemas.openxmlformats.org/drawingml/2006/main">
             <a:r>
-              <a:t>Teaching cue: predict the result before executing the example. Code blocks are excerpts unless shown as complete components.</a:t>
+              <a:t/>
+            </a:r>
+          </a:p>
+          <a:p xmlns:a="http://schemas.openxmlformats.org/drawingml/2006/main">
+            <a:r>
+              <a:t/>
+            </a:r>
+          </a:p>
+          <a:p xmlns:a="http://schemas.openxmlformats.org/drawingml/2006/main">
+            <a:r>
+              <a:t>Project example: Product Catalog. Products have a numeric INR price and a boolean inStock field.</a:t>
             </a:r>
           </a:p>
         </p:txBody>
@@ -1591,7 +1941,22 @@
           <a:lstStyle xmlns:a="http://schemas.openxmlformats.org/drawingml/2006/main"/>
           <a:p xmlns:a="http://schemas.openxmlformats.org/drawingml/2006/main">
             <a:r>
-              <a:t>Allocated time: 1 minutes.</a:t>
+              <a:t>## Slide 22: Filtering before rendering</a:t>
+            </a:r>
+          </a:p>
+          <a:p xmlns:a="http://schemas.openxmlformats.org/drawingml/2006/main">
+            <a:r>
+              <a:t/>
+            </a:r>
+          </a:p>
+          <a:p xmlns:a="http://schemas.openxmlformats.org/drawingml/2006/main">
+            <a:r>
+              <a:t>Time: 1 minute.</a:t>
+            </a:r>
+          </a:p>
+          <a:p xmlns:a="http://schemas.openxmlformats.org/drawingml/2006/main">
+            <a:r>
+              <a:t/>
             </a:r>
           </a:p>
           <a:p xmlns:a="http://schemas.openxmlformats.org/drawingml/2006/main">
@@ -1601,7 +1966,17 @@
           </a:p>
           <a:p xmlns:a="http://schemas.openxmlformats.org/drawingml/2006/main">
             <a:r>
-              <a:t>Teaching cue: predict the result before executing the example. Code blocks are excerpts unless shown as complete components.</a:t>
+              <a:t/>
+            </a:r>
+          </a:p>
+          <a:p xmlns:a="http://schemas.openxmlformats.org/drawingml/2006/main">
+            <a:r>
+              <a:t/>
+            </a:r>
+          </a:p>
+          <a:p xmlns:a="http://schemas.openxmlformats.org/drawingml/2006/main">
+            <a:r>
+              <a:t>Project example: Product Catalog. Products have a numeric INR price and a boolean inStock field.</a:t>
             </a:r>
           </a:p>
         </p:txBody>
@@ -1671,17 +2046,42 @@
           <a:lstStyle xmlns:a="http://schemas.openxmlformats.org/drawingml/2006/main"/>
           <a:p xmlns:a="http://schemas.openxmlformats.org/drawingml/2006/main">
             <a:r>
-              <a:t>Allocated time: 1 minutes.</a:t>
-            </a:r>
-          </a:p>
-          <a:p xmlns:a="http://schemas.openxmlformats.org/drawingml/2006/main">
-            <a:r>
-              <a:t>This snippet belongs inside StatusBadge. Text also conveys status, so meaning does not rely on colour alone. Source: https://react.dev/learn</a:t>
-            </a:r>
-          </a:p>
-          <a:p xmlns:a="http://schemas.openxmlformats.org/drawingml/2006/main">
-            <a:r>
-              <a:t>Teaching cue: predict the result before executing the example. Code blocks are excerpts unless shown as complete components.</a:t>
+              <a:t>## Slide 23: Styling reusable components</a:t>
+            </a:r>
+          </a:p>
+          <a:p xmlns:a="http://schemas.openxmlformats.org/drawingml/2006/main">
+            <a:r>
+              <a:t/>
+            </a:r>
+          </a:p>
+          <a:p xmlns:a="http://schemas.openxmlformats.org/drawingml/2006/main">
+            <a:r>
+              <a:t>Time: 1 minute.</a:t>
+            </a:r>
+          </a:p>
+          <a:p xmlns:a="http://schemas.openxmlformats.org/drawingml/2006/main">
+            <a:r>
+              <a:t/>
+            </a:r>
+          </a:p>
+          <a:p xmlns:a="http://schemas.openxmlformats.org/drawingml/2006/main">
+            <a:r>
+              <a:t>This snippet belongs inside StockBadge. Text also conveys status, so meaning does not rely on colour alone. Source: https://react.dev/learn</a:t>
+            </a:r>
+          </a:p>
+          <a:p xmlns:a="http://schemas.openxmlformats.org/drawingml/2006/main">
+            <a:r>
+              <a:t/>
+            </a:r>
+          </a:p>
+          <a:p xmlns:a="http://schemas.openxmlformats.org/drawingml/2006/main">
+            <a:r>
+              <a:t/>
+            </a:r>
+          </a:p>
+          <a:p xmlns:a="http://schemas.openxmlformats.org/drawingml/2006/main">
+            <a:r>
+              <a:t>Project example: Product Catalog. Products have a numeric INR price and a boolean inStock field.</a:t>
             </a:r>
           </a:p>
         </p:txBody>
@@ -1751,17 +2151,42 @@
           <a:lstStyle xmlns:a="http://schemas.openxmlformats.org/drawingml/2006/main"/>
           <a:p xmlns:a="http://schemas.openxmlformats.org/drawingml/2006/main">
             <a:r>
-              <a:t>Allocated time: 2 minutes.</a:t>
-            </a:r>
-          </a:p>
-          <a:p xmlns:a="http://schemas.openxmlformats.org/drawingml/2006/main">
-            <a:r>
-              <a:t>Walk through the actual UI for 2 minutes. Original counts: 4 total, 2 available, 2 assigned.</a:t>
-            </a:r>
-          </a:p>
-          <a:p xmlns:a="http://schemas.openxmlformats.org/drawingml/2006/main">
-            <a:r>
-              <a:t>Teaching cue: predict the result before executing the example. Code blocks are excerpts unless shown as complete components.</a:t>
+              <a:t>## Slide 24: Our composed Product Catalog</a:t>
+            </a:r>
+          </a:p>
+          <a:p xmlns:a="http://schemas.openxmlformats.org/drawingml/2006/main">
+            <a:r>
+              <a:t/>
+            </a:r>
+          </a:p>
+          <a:p xmlns:a="http://schemas.openxmlformats.org/drawingml/2006/main">
+            <a:r>
+              <a:t>Time: 2 minutes.</a:t>
+            </a:r>
+          </a:p>
+          <a:p xmlns:a="http://schemas.openxmlformats.org/drawingml/2006/main">
+            <a:r>
+              <a:t/>
+            </a:r>
+          </a:p>
+          <a:p xmlns:a="http://schemas.openxmlformats.org/drawingml/2006/main">
+            <a:r>
+              <a:t>Walk through the actual UI for 2 minutes. Original counts: 4 total, 2 in stock, 2 out of stock.</a:t>
+            </a:r>
+          </a:p>
+          <a:p xmlns:a="http://schemas.openxmlformats.org/drawingml/2006/main">
+            <a:r>
+              <a:t/>
+            </a:r>
+          </a:p>
+          <a:p xmlns:a="http://schemas.openxmlformats.org/drawingml/2006/main">
+            <a:r>
+              <a:t/>
+            </a:r>
+          </a:p>
+          <a:p xmlns:a="http://schemas.openxmlformats.org/drawingml/2006/main">
+            <a:r>
+              <a:t>Project example: Product Catalog. Products have a numeric INR price and a boolean inStock field.</a:t>
             </a:r>
           </a:p>
         </p:txBody>
@@ -1831,17 +2256,42 @@
           <a:lstStyle xmlns:a="http://schemas.openxmlformats.org/drawingml/2006/main"/>
           <a:p xmlns:a="http://schemas.openxmlformats.org/drawingml/2006/main">
             <a:r>
-              <a:t>Allocated time: 6 minutes.</a:t>
-            </a:r>
-          </a:p>
-          <a:p xmlns:a="http://schemas.openxmlformats.org/drawingml/2006/main">
-            <a:r>
-              <a:t>6-minute demo. Open each file and ask learners to identify the receiving parameter. Point out showLocation forwarding and headingId in Section.</a:t>
-            </a:r>
-          </a:p>
-          <a:p xmlns:a="http://schemas.openxmlformats.org/drawingml/2006/main">
-            <a:r>
-              <a:t>Teaching cue: predict the result before executing the example. Code blocks are excerpts unless shown as complete components.</a:t>
+              <a:t>## Slide 25: Tracing parent and child props</a:t>
+            </a:r>
+          </a:p>
+          <a:p xmlns:a="http://schemas.openxmlformats.org/drawingml/2006/main">
+            <a:r>
+              <a:t/>
+            </a:r>
+          </a:p>
+          <a:p xmlns:a="http://schemas.openxmlformats.org/drawingml/2006/main">
+            <a:r>
+              <a:t>Time: 6 minutes.</a:t>
+            </a:r>
+          </a:p>
+          <a:p xmlns:a="http://schemas.openxmlformats.org/drawingml/2006/main">
+            <a:r>
+              <a:t/>
+            </a:r>
+          </a:p>
+          <a:p xmlns:a="http://schemas.openxmlformats.org/drawingml/2006/main">
+            <a:r>
+              <a:t>6-minute demo. Open each file and ask learners to identify the receiving parameter. Point out showCategory forwarding and headingId in Section.</a:t>
+            </a:r>
+          </a:p>
+          <a:p xmlns:a="http://schemas.openxmlformats.org/drawingml/2006/main">
+            <a:r>
+              <a:t/>
+            </a:r>
+          </a:p>
+          <a:p xmlns:a="http://schemas.openxmlformats.org/drawingml/2006/main">
+            <a:r>
+              <a:t/>
+            </a:r>
+          </a:p>
+          <a:p xmlns:a="http://schemas.openxmlformats.org/drawingml/2006/main">
+            <a:r>
+              <a:t>Project example: Product Catalog. Products have a numeric INR price and a boolean inStock field.</a:t>
             </a:r>
           </a:p>
         </p:txBody>
@@ -1911,17 +2361,42 @@
           <a:lstStyle xmlns:a="http://schemas.openxmlformats.org/drawingml/2006/main"/>
           <a:p xmlns:a="http://schemas.openxmlformats.org/drawingml/2006/main">
             <a:r>
-              <a:t>Allocated time: 7 minutes.</a:t>
-            </a:r>
-          </a:p>
-          <a:p xmlns:a="http://schemas.openxmlformats.org/drawingml/2006/main">
-            <a:r>
-              <a:t>7-minute demo: filtering 2 min, location 2 min, empty list 2 min, restore 1 min. Changes happen in source files, not UI controls.</a:t>
-            </a:r>
-          </a:p>
-          <a:p xmlns:a="http://schemas.openxmlformats.org/drawingml/2006/main">
-            <a:r>
-              <a:t>Teaching cue: predict the result before executing the example. Code blocks are excerpts unless shown as complete components.</a:t>
+              <a:t>## Slide 26: Changing the component inputs</a:t>
+            </a:r>
+          </a:p>
+          <a:p xmlns:a="http://schemas.openxmlformats.org/drawingml/2006/main">
+            <a:r>
+              <a:t/>
+            </a:r>
+          </a:p>
+          <a:p xmlns:a="http://schemas.openxmlformats.org/drawingml/2006/main">
+            <a:r>
+              <a:t>Time: 7 minutes.</a:t>
+            </a:r>
+          </a:p>
+          <a:p xmlns:a="http://schemas.openxmlformats.org/drawingml/2006/main">
+            <a:r>
+              <a:t/>
+            </a:r>
+          </a:p>
+          <a:p xmlns:a="http://schemas.openxmlformats.org/drawingml/2006/main">
+            <a:r>
+              <a:t>7-minute demo: filtering 2 min, category 2 min, empty list 2 min, restore 1 min. Changes happen in source files, not UI controls.</a:t>
+            </a:r>
+          </a:p>
+          <a:p xmlns:a="http://schemas.openxmlformats.org/drawingml/2006/main">
+            <a:r>
+              <a:t/>
+            </a:r>
+          </a:p>
+          <a:p xmlns:a="http://schemas.openxmlformats.org/drawingml/2006/main">
+            <a:r>
+              <a:t/>
+            </a:r>
+          </a:p>
+          <a:p xmlns:a="http://schemas.openxmlformats.org/drawingml/2006/main">
+            <a:r>
+              <a:t>Project example: Product Catalog. Products have a numeric INR price and a boolean inStock field.</a:t>
             </a:r>
           </a:p>
         </p:txBody>
@@ -1991,17 +2466,42 @@
           <a:lstStyle xmlns:a="http://schemas.openxmlformats.org/drawingml/2006/main"/>
           <a:p xmlns:a="http://schemas.openxmlformats.org/drawingml/2006/main">
             <a:r>
-              <a:t>Allocated time: 10 minutes.</a:t>
-            </a:r>
-          </a:p>
-          <a:p xmlns:a="http://schemas.openxmlformats.org/drawingml/2006/main">
-            <a:r>
-              <a:t>10-minute learner exercise. First 2 min explain, next 6 min work, last 2 min inspect results. AssetCard accepts showSerialNumber=true as a default. AssetList forwards it. App supplies it.</a:t>
-            </a:r>
-          </a:p>
-          <a:p xmlns:a="http://schemas.openxmlformats.org/drawingml/2006/main">
-            <a:r>
-              <a:t>Teaching cue: predict the result before executing the example. Code blocks are excerpts unless shown as complete components.</a:t>
+              <a:t>## Slide 27: A brand on every card</a:t>
+            </a:r>
+          </a:p>
+          <a:p xmlns:a="http://schemas.openxmlformats.org/drawingml/2006/main">
+            <a:r>
+              <a:t/>
+            </a:r>
+          </a:p>
+          <a:p xmlns:a="http://schemas.openxmlformats.org/drawingml/2006/main">
+            <a:r>
+              <a:t>Time: 10 minutes.</a:t>
+            </a:r>
+          </a:p>
+          <a:p xmlns:a="http://schemas.openxmlformats.org/drawingml/2006/main">
+            <a:r>
+              <a:t/>
+            </a:r>
+          </a:p>
+          <a:p xmlns:a="http://schemas.openxmlformats.org/drawingml/2006/main">
+            <a:r>
+              <a:t>10-minute learner exercise. First 2 min explain, next 6 min work, last 2 min inspect results. ProductCard accepts showBrand=true as a default. ProductList forwards it. App supplies it.</a:t>
+            </a:r>
+          </a:p>
+          <a:p xmlns:a="http://schemas.openxmlformats.org/drawingml/2006/main">
+            <a:r>
+              <a:t/>
+            </a:r>
+          </a:p>
+          <a:p xmlns:a="http://schemas.openxmlformats.org/drawingml/2006/main">
+            <a:r>
+              <a:t/>
+            </a:r>
+          </a:p>
+          <a:p xmlns:a="http://schemas.openxmlformats.org/drawingml/2006/main">
+            <a:r>
+              <a:t>Project example: Product Catalog. Products have a numeric INR price and a boolean inStock field.</a:t>
             </a:r>
           </a:p>
         </p:txBody>
@@ -2071,7 +2571,22 @@
           <a:lstStyle xmlns:a="http://schemas.openxmlformats.org/drawingml/2006/main"/>
           <a:p xmlns:a="http://schemas.openxmlformats.org/drawingml/2006/main">
             <a:r>
-              <a:t>Allocated time: 3 minutes.</a:t>
+              <a:t>## Slide 28: Day 2 knowledge check</a:t>
+            </a:r>
+          </a:p>
+          <a:p xmlns:a="http://schemas.openxmlformats.org/drawingml/2006/main">
+            <a:r>
+              <a:t/>
+            </a:r>
+          </a:p>
+          <a:p xmlns:a="http://schemas.openxmlformats.org/drawingml/2006/main">
+            <a:r>
+              <a:t>Time: 3 minutes.</a:t>
+            </a:r>
+          </a:p>
+          <a:p xmlns:a="http://schemas.openxmlformats.org/drawingml/2006/main">
+            <a:r>
+              <a:t/>
             </a:r>
           </a:p>
           <a:p xmlns:a="http://schemas.openxmlformats.org/drawingml/2006/main">
@@ -2081,7 +2596,17 @@
           </a:p>
           <a:p xmlns:a="http://schemas.openxmlformats.org/drawingml/2006/main">
             <a:r>
-              <a:t>Teaching cue: predict the result before executing the example. Code blocks are excerpts unless shown as complete components.</a:t>
+              <a:t/>
+            </a:r>
+          </a:p>
+          <a:p xmlns:a="http://schemas.openxmlformats.org/drawingml/2006/main">
+            <a:r>
+              <a:t/>
+            </a:r>
+          </a:p>
+          <a:p xmlns:a="http://schemas.openxmlformats.org/drawingml/2006/main">
+            <a:r>
+              <a:t>Project example: Product Catalog. Products have a numeric INR price and a boolean inStock field.</a:t>
             </a:r>
           </a:p>
         </p:txBody>
@@ -2151,17 +2676,42 @@
           <a:lstStyle xmlns:a="http://schemas.openxmlformats.org/drawingml/2006/main"/>
           <a:p xmlns:a="http://schemas.openxmlformats.org/drawingml/2006/main">
             <a:r>
-              <a:t>Allocated time: 1 minutes.</a:t>
-            </a:r>
-          </a:p>
-          <a:p xmlns:a="http://schemas.openxmlformats.org/drawingml/2006/main">
-            <a:r>
-              <a:t>1-minute recap. Ask a learner to explain the path from App to StatusBadge. Next session adds events, state and controlled forms.</a:t>
-            </a:r>
-          </a:p>
-          <a:p xmlns:a="http://schemas.openxmlformats.org/drawingml/2006/main">
-            <a:r>
-              <a:t>Teaching cue: predict the result before executing the example. Code blocks are excerpts unless shown as complete components.</a:t>
+              <a:t>## Slide 29: Components describe UI from inputs</a:t>
+            </a:r>
+          </a:p>
+          <a:p xmlns:a="http://schemas.openxmlformats.org/drawingml/2006/main">
+            <a:r>
+              <a:t/>
+            </a:r>
+          </a:p>
+          <a:p xmlns:a="http://schemas.openxmlformats.org/drawingml/2006/main">
+            <a:r>
+              <a:t>Time: 1 minute.</a:t>
+            </a:r>
+          </a:p>
+          <a:p xmlns:a="http://schemas.openxmlformats.org/drawingml/2006/main">
+            <a:r>
+              <a:t/>
+            </a:r>
+          </a:p>
+          <a:p xmlns:a="http://schemas.openxmlformats.org/drawingml/2006/main">
+            <a:r>
+              <a:t>1-minute recap. Ask a learner to explain the path from App to StockBadge. Next session adds events, state and controlled forms.</a:t>
+            </a:r>
+          </a:p>
+          <a:p xmlns:a="http://schemas.openxmlformats.org/drawingml/2006/main">
+            <a:r>
+              <a:t/>
+            </a:r>
+          </a:p>
+          <a:p xmlns:a="http://schemas.openxmlformats.org/drawingml/2006/main">
+            <a:r>
+              <a:t/>
+            </a:r>
+          </a:p>
+          <a:p xmlns:a="http://schemas.openxmlformats.org/drawingml/2006/main">
+            <a:r>
+              <a:t>Project example: Product Catalog. Products have a numeric INR price and a boolean inStock field.</a:t>
             </a:r>
           </a:p>
         </p:txBody>
@@ -2231,7 +2781,22 @@
           <a:lstStyle xmlns:a="http://schemas.openxmlformats.org/drawingml/2006/main"/>
           <a:p xmlns:a="http://schemas.openxmlformats.org/drawingml/2006/main">
             <a:r>
-              <a:t>Allocated time: 1 minutes.</a:t>
+              <a:t>## Slide 3: Today’s topic index</a:t>
+            </a:r>
+          </a:p>
+          <a:p xmlns:a="http://schemas.openxmlformats.org/drawingml/2006/main">
+            <a:r>
+              <a:t/>
+            </a:r>
+          </a:p>
+          <a:p xmlns:a="http://schemas.openxmlformats.org/drawingml/2006/main">
+            <a:r>
+              <a:t>Time: 1 minute.</a:t>
+            </a:r>
+          </a:p>
+          <a:p xmlns:a="http://schemas.openxmlformats.org/drawingml/2006/main">
+            <a:r>
+              <a:t/>
             </a:r>
           </a:p>
           <a:p xmlns:a="http://schemas.openxmlformats.org/drawingml/2006/main">
@@ -2241,7 +2806,17 @@
           </a:p>
           <a:p xmlns:a="http://schemas.openxmlformats.org/drawingml/2006/main">
             <a:r>
-              <a:t>Teaching cue: predict the result before executing the example. Code blocks are excerpts unless shown as complete components.</a:t>
+              <a:t/>
+            </a:r>
+          </a:p>
+          <a:p xmlns:a="http://schemas.openxmlformats.org/drawingml/2006/main">
+            <a:r>
+              <a:t/>
+            </a:r>
+          </a:p>
+          <a:p xmlns:a="http://schemas.openxmlformats.org/drawingml/2006/main">
+            <a:r>
+              <a:t>Project example: Product Catalog. Products have a numeric INR price and a boolean inStock field.</a:t>
             </a:r>
           </a:p>
         </p:txBody>
@@ -2311,7 +2886,22 @@
           <a:lstStyle xmlns:a="http://schemas.openxmlformats.org/drawingml/2006/main"/>
           <a:p xmlns:a="http://schemas.openxmlformats.org/drawingml/2006/main">
             <a:r>
-              <a:t>Allocated time: 1 minutes.</a:t>
+              <a:t>## Slide 30: Practice and learning references</a:t>
+            </a:r>
+          </a:p>
+          <a:p xmlns:a="http://schemas.openxmlformats.org/drawingml/2006/main">
+            <a:r>
+              <a:t/>
+            </a:r>
+          </a:p>
+          <a:p xmlns:a="http://schemas.openxmlformats.org/drawingml/2006/main">
+            <a:r>
+              <a:t>Time: 1 minute.</a:t>
+            </a:r>
+          </a:p>
+          <a:p xmlns:a="http://schemas.openxmlformats.org/drawingml/2006/main">
+            <a:r>
+              <a:t/>
             </a:r>
           </a:p>
           <a:p xmlns:a="http://schemas.openxmlformats.org/drawingml/2006/main">
@@ -2321,7 +2911,17 @@
           </a:p>
           <a:p xmlns:a="http://schemas.openxmlformats.org/drawingml/2006/main">
             <a:r>
-              <a:t>Teaching cue: predict the result before executing the example. Code blocks are excerpts unless shown as complete components.</a:t>
+              <a:t/>
+            </a:r>
+          </a:p>
+          <a:p xmlns:a="http://schemas.openxmlformats.org/drawingml/2006/main">
+            <a:r>
+              <a:t/>
+            </a:r>
+          </a:p>
+          <a:p xmlns:a="http://schemas.openxmlformats.org/drawingml/2006/main">
+            <a:r>
+              <a:t>Project example: Product Catalog. Products have a numeric INR price and a boolean inStock field.</a:t>
             </a:r>
           </a:p>
         </p:txBody>
@@ -2391,7 +2991,22 @@
           <a:lstStyle xmlns:a="http://schemas.openxmlformats.org/drawingml/2006/main"/>
           <a:p xmlns:a="http://schemas.openxmlformats.org/drawingml/2006/main">
             <a:r>
-              <a:t>Allocated time: 2 minutes.</a:t>
+              <a:t>## Slide 4: Day 1 in one example</a:t>
+            </a:r>
+          </a:p>
+          <a:p xmlns:a="http://schemas.openxmlformats.org/drawingml/2006/main">
+            <a:r>
+              <a:t/>
+            </a:r>
+          </a:p>
+          <a:p xmlns:a="http://schemas.openxmlformats.org/drawingml/2006/main">
+            <a:r>
+              <a:t>Time: 2 minutes.</a:t>
+            </a:r>
+          </a:p>
+          <a:p xmlns:a="http://schemas.openxmlformats.org/drawingml/2006/main">
+            <a:r>
+              <a:t/>
             </a:r>
           </a:p>
           <a:p xmlns:a="http://schemas.openxmlformats.org/drawingml/2006/main">
@@ -2401,7 +3016,17 @@
           </a:p>
           <a:p xmlns:a="http://schemas.openxmlformats.org/drawingml/2006/main">
             <a:r>
-              <a:t>Teaching cue: predict the result before executing the example. Code blocks are excerpts unless shown as complete components.</a:t>
+              <a:t/>
+            </a:r>
+          </a:p>
+          <a:p xmlns:a="http://schemas.openxmlformats.org/drawingml/2006/main">
+            <a:r>
+              <a:t/>
+            </a:r>
+          </a:p>
+          <a:p xmlns:a="http://schemas.openxmlformats.org/drawingml/2006/main">
+            <a:r>
+              <a:t>Project example: Product Catalog. Products have a numeric INR price and a boolean inStock field.</a:t>
             </a:r>
           </a:p>
         </p:txBody>
@@ -2471,7 +3096,22 @@
           <a:lstStyle xmlns:a="http://schemas.openxmlformats.org/drawingml/2006/main"/>
           <a:p xmlns:a="http://schemas.openxmlformats.org/drawingml/2006/main">
             <a:r>
-              <a:t>Allocated time: 2 minutes.</a:t>
+              <a:t>## Slide 5: A component has a clear job</a:t>
+            </a:r>
+          </a:p>
+          <a:p xmlns:a="http://schemas.openxmlformats.org/drawingml/2006/main">
+            <a:r>
+              <a:t/>
+            </a:r>
+          </a:p>
+          <a:p xmlns:a="http://schemas.openxmlformats.org/drawingml/2006/main">
+            <a:r>
+              <a:t>Time: 2 minutes.</a:t>
+            </a:r>
+          </a:p>
+          <a:p xmlns:a="http://schemas.openxmlformats.org/drawingml/2006/main">
+            <a:r>
+              <a:t/>
             </a:r>
           </a:p>
           <a:p xmlns:a="http://schemas.openxmlformats.org/drawingml/2006/main">
@@ -2481,7 +3121,17 @@
           </a:p>
           <a:p xmlns:a="http://schemas.openxmlformats.org/drawingml/2006/main">
             <a:r>
-              <a:t>Teaching cue: predict the result before executing the example. Code blocks are excerpts unless shown as complete components.</a:t>
+              <a:t/>
+            </a:r>
+          </a:p>
+          <a:p xmlns:a="http://schemas.openxmlformats.org/drawingml/2006/main">
+            <a:r>
+              <a:t/>
+            </a:r>
+          </a:p>
+          <a:p xmlns:a="http://schemas.openxmlformats.org/drawingml/2006/main">
+            <a:r>
+              <a:t>Project example: Product Catalog. Products have a numeric INR price and a boolean inStock field.</a:t>
             </a:r>
           </a:p>
         </p:txBody>
@@ -2551,7 +3201,22 @@
           <a:lstStyle xmlns:a="http://schemas.openxmlformats.org/drawingml/2006/main"/>
           <a:p xmlns:a="http://schemas.openxmlformats.org/drawingml/2006/main">
             <a:r>
-              <a:t>Allocated time: 2 minutes.</a:t>
+              <a:t>## Slide 6: Component extraction</a:t>
+            </a:r>
+          </a:p>
+          <a:p xmlns:a="http://schemas.openxmlformats.org/drawingml/2006/main">
+            <a:r>
+              <a:t/>
+            </a:r>
+          </a:p>
+          <a:p xmlns:a="http://schemas.openxmlformats.org/drawingml/2006/main">
+            <a:r>
+              <a:t>Time: 2 minutes.</a:t>
+            </a:r>
+          </a:p>
+          <a:p xmlns:a="http://schemas.openxmlformats.org/drawingml/2006/main">
+            <a:r>
+              <a:t/>
             </a:r>
           </a:p>
           <a:p xmlns:a="http://schemas.openxmlformats.org/drawingml/2006/main">
@@ -2561,7 +3226,17 @@
           </a:p>
           <a:p xmlns:a="http://schemas.openxmlformats.org/drawingml/2006/main">
             <a:r>
-              <a:t>Teaching cue: predict the result before executing the example. Code blocks are excerpts unless shown as complete components.</a:t>
+              <a:t/>
+            </a:r>
+          </a:p>
+          <a:p xmlns:a="http://schemas.openxmlformats.org/drawingml/2006/main">
+            <a:r>
+              <a:t/>
+            </a:r>
+          </a:p>
+          <a:p xmlns:a="http://schemas.openxmlformats.org/drawingml/2006/main">
+            <a:r>
+              <a:t>Project example: Product Catalog. Products have a numeric INR price and a boolean inStock field.</a:t>
             </a:r>
           </a:p>
         </p:txBody>
@@ -2631,7 +3306,22 @@
           <a:lstStyle xmlns:a="http://schemas.openxmlformats.org/drawingml/2006/main"/>
           <a:p xmlns:a="http://schemas.openxmlformats.org/drawingml/2006/main">
             <a:r>
-              <a:t>Allocated time: 1 minutes.</a:t>
+              <a:t>## Slide 7: Default and named imports</a:t>
+            </a:r>
+          </a:p>
+          <a:p xmlns:a="http://schemas.openxmlformats.org/drawingml/2006/main">
+            <a:r>
+              <a:t/>
+            </a:r>
+          </a:p>
+          <a:p xmlns:a="http://schemas.openxmlformats.org/drawingml/2006/main">
+            <a:r>
+              <a:t>Time: 1 minute.</a:t>
+            </a:r>
+          </a:p>
+          <a:p xmlns:a="http://schemas.openxmlformats.org/drawingml/2006/main">
+            <a:r>
+              <a:t/>
             </a:r>
           </a:p>
           <a:p xmlns:a="http://schemas.openxmlformats.org/drawingml/2006/main">
@@ -2641,7 +3331,17 @@
           </a:p>
           <a:p xmlns:a="http://schemas.openxmlformats.org/drawingml/2006/main">
             <a:r>
-              <a:t>Teaching cue: predict the result before executing the example. Code blocks are excerpts unless shown as complete components.</a:t>
+              <a:t/>
+            </a:r>
+          </a:p>
+          <a:p xmlns:a="http://schemas.openxmlformats.org/drawingml/2006/main">
+            <a:r>
+              <a:t/>
+            </a:r>
+          </a:p>
+          <a:p xmlns:a="http://schemas.openxmlformats.org/drawingml/2006/main">
+            <a:r>
+              <a:t>Project example: Product Catalog. Products have a numeric INR price and a boolean inStock field.</a:t>
             </a:r>
           </a:p>
         </p:txBody>
@@ -2711,7 +3411,22 @@
           <a:lstStyle xmlns:a="http://schemas.openxmlformats.org/drawingml/2006/main"/>
           <a:p xmlns:a="http://schemas.openxmlformats.org/drawingml/2006/main">
             <a:r>
-              <a:t>Allocated time: 2 minutes.</a:t>
+              <a:t>## Slide 8: Props are component inputs</a:t>
+            </a:r>
+          </a:p>
+          <a:p xmlns:a="http://schemas.openxmlformats.org/drawingml/2006/main">
+            <a:r>
+              <a:t/>
+            </a:r>
+          </a:p>
+          <a:p xmlns:a="http://schemas.openxmlformats.org/drawingml/2006/main">
+            <a:r>
+              <a:t>Time: 2 minutes.</a:t>
+            </a:r>
+          </a:p>
+          <a:p xmlns:a="http://schemas.openxmlformats.org/drawingml/2006/main">
+            <a:r>
+              <a:t/>
             </a:r>
           </a:p>
           <a:p xmlns:a="http://schemas.openxmlformats.org/drawingml/2006/main">
@@ -2721,7 +3436,17 @@
           </a:p>
           <a:p xmlns:a="http://schemas.openxmlformats.org/drawingml/2006/main">
             <a:r>
-              <a:t>Teaching cue: predict the result before executing the example. Code blocks are excerpts unless shown as complete components.</a:t>
+              <a:t/>
+            </a:r>
+          </a:p>
+          <a:p xmlns:a="http://schemas.openxmlformats.org/drawingml/2006/main">
+            <a:r>
+              <a:t/>
+            </a:r>
+          </a:p>
+          <a:p xmlns:a="http://schemas.openxmlformats.org/drawingml/2006/main">
+            <a:r>
+              <a:t>Project example: Product Catalog. Products have a numeric INR price and a boolean inStock field.</a:t>
             </a:r>
           </a:p>
         </p:txBody>
@@ -2791,7 +3516,22 @@
           <a:lstStyle xmlns:a="http://schemas.openxmlformats.org/drawingml/2006/main"/>
           <a:p xmlns:a="http://schemas.openxmlformats.org/drawingml/2006/main">
             <a:r>
-              <a:t>Allocated time: 1 minutes.</a:t>
+              <a:t>## Slide 9: Destructuring the props object</a:t>
+            </a:r>
+          </a:p>
+          <a:p xmlns:a="http://schemas.openxmlformats.org/drawingml/2006/main">
+            <a:r>
+              <a:t/>
+            </a:r>
+          </a:p>
+          <a:p xmlns:a="http://schemas.openxmlformats.org/drawingml/2006/main">
+            <a:r>
+              <a:t>Time: 1 minute.</a:t>
+            </a:r>
+          </a:p>
+          <a:p xmlns:a="http://schemas.openxmlformats.org/drawingml/2006/main">
+            <a:r>
+              <a:t/>
             </a:r>
           </a:p>
           <a:p xmlns:a="http://schemas.openxmlformats.org/drawingml/2006/main">
@@ -2801,7 +3541,17 @@
           </a:p>
           <a:p xmlns:a="http://schemas.openxmlformats.org/drawingml/2006/main">
             <a:r>
-              <a:t>Teaching cue: predict the result before executing the example. Code blocks are excerpts unless shown as complete components.</a:t>
+              <a:t/>
+            </a:r>
+          </a:p>
+          <a:p xmlns:a="http://schemas.openxmlformats.org/drawingml/2006/main">
+            <a:r>
+              <a:t/>
+            </a:r>
+          </a:p>
+          <a:p xmlns:a="http://schemas.openxmlformats.org/drawingml/2006/main">
+            <a:r>
+              <a:t>Project example: Product Catalog. Products have a numeric INR price and a boolean inStock field.</a:t>
             </a:r>
           </a:p>
         </p:txBody>
@@ -2899,6 +3649,7 @@
                 <a:spcPts val="0"/>
               </a:spcAft>
               <a:buNone/>
+              <a:defRPr/>
             </a:lvl1pPr>
             <a:lvl2pPr marL="0" indent="0">
               <a:lnSpc>
@@ -2911,6 +3662,7 @@
                 <a:spcPts val="0"/>
               </a:spcAft>
               <a:buNone/>
+              <a:defRPr/>
             </a:lvl2pPr>
             <a:lvl3pPr marL="0" indent="0">
               <a:lnSpc>
@@ -2923,6 +3675,7 @@
                 <a:spcPts val="0"/>
               </a:spcAft>
               <a:buNone/>
+              <a:defRPr/>
             </a:lvl3pPr>
             <a:lvl4pPr marL="0" indent="0">
               <a:lnSpc>
@@ -2935,6 +3688,7 @@
                 <a:spcPts val="0"/>
               </a:spcAft>
               <a:buNone/>
+              <a:defRPr/>
             </a:lvl4pPr>
             <a:lvl5pPr marL="0" indent="0">
               <a:lnSpc>
@@ -2947,6 +3701,7 @@
                 <a:spcPts val="0"/>
               </a:spcAft>
               <a:buNone/>
+              <a:defRPr/>
             </a:lvl5pPr>
             <a:lvl6pPr marL="0" indent="0">
               <a:lnSpc>
@@ -2959,6 +3714,7 @@
                 <a:spcPts val="0"/>
               </a:spcAft>
               <a:buNone/>
+              <a:defRPr/>
             </a:lvl6pPr>
             <a:lvl7pPr marL="0" indent="0">
               <a:lnSpc>
@@ -2971,6 +3727,7 @@
                 <a:spcPts val="0"/>
               </a:spcAft>
               <a:buNone/>
+              <a:defRPr/>
             </a:lvl7pPr>
             <a:lvl8pPr marL="0" indent="0">
               <a:lnSpc>
@@ -2983,6 +3740,7 @@
                 <a:spcPts val="0"/>
               </a:spcAft>
               <a:buNone/>
+              <a:defRPr/>
             </a:lvl8pPr>
             <a:lvl9pPr marL="0" indent="0">
               <a:lnSpc>
@@ -2995,6 +3753,7 @@
                 <a:spcPts val="0"/>
               </a:spcAft>
               <a:buNone/>
+              <a:defRPr/>
             </a:lvl9pPr>
           </a:lstStyle>
           <a:p xmlns:a="http://schemas.openxmlformats.org/drawingml/2006/main"/>
@@ -3056,6 +3815,7 @@
                 <a:spcPts val="0"/>
               </a:spcAft>
               <a:buNone/>
+              <a:defRPr/>
             </a:lvl1pPr>
             <a:lvl2pPr marL="0" indent="0">
               <a:lnSpc>
@@ -3068,6 +3828,7 @@
                 <a:spcPts val="0"/>
               </a:spcAft>
               <a:buNone/>
+              <a:defRPr/>
             </a:lvl2pPr>
             <a:lvl3pPr marL="0" indent="0">
               <a:lnSpc>
@@ -3080,6 +3841,7 @@
                 <a:spcPts val="0"/>
               </a:spcAft>
               <a:buNone/>
+              <a:defRPr/>
             </a:lvl3pPr>
             <a:lvl4pPr marL="0" indent="0">
               <a:lnSpc>
@@ -3092,6 +3854,7 @@
                 <a:spcPts val="0"/>
               </a:spcAft>
               <a:buNone/>
+              <a:defRPr/>
             </a:lvl4pPr>
             <a:lvl5pPr marL="0" indent="0">
               <a:lnSpc>
@@ -3104,6 +3867,7 @@
                 <a:spcPts val="0"/>
               </a:spcAft>
               <a:buNone/>
+              <a:defRPr/>
             </a:lvl5pPr>
             <a:lvl6pPr marL="0" indent="0">
               <a:lnSpc>
@@ -3116,6 +3880,7 @@
                 <a:spcPts val="0"/>
               </a:spcAft>
               <a:buNone/>
+              <a:defRPr/>
             </a:lvl6pPr>
             <a:lvl7pPr marL="0" indent="0">
               <a:lnSpc>
@@ -3128,6 +3893,7 @@
                 <a:spcPts val="0"/>
               </a:spcAft>
               <a:buNone/>
+              <a:defRPr/>
             </a:lvl7pPr>
             <a:lvl8pPr marL="0" indent="0">
               <a:lnSpc>
@@ -3140,6 +3906,7 @@
                 <a:spcPts val="0"/>
               </a:spcAft>
               <a:buNone/>
+              <a:defRPr/>
             </a:lvl8pPr>
             <a:lvl9pPr marL="0" indent="0">
               <a:lnSpc>
@@ -3152,6 +3919,7 @@
                 <a:spcPts val="0"/>
               </a:spcAft>
               <a:buNone/>
+              <a:defRPr/>
             </a:lvl9pPr>
           </a:lstStyle>
           <a:p xmlns:a="http://schemas.openxmlformats.org/drawingml/2006/main"/>
@@ -3230,6 +3998,7 @@
                 <a:spcPts val="0"/>
               </a:spcAft>
               <a:buNone/>
+              <a:defRPr/>
             </a:lvl1pPr>
             <a:lvl2pPr marL="0" indent="0">
               <a:lnSpc>
@@ -3242,6 +4011,7 @@
                 <a:spcPts val="0"/>
               </a:spcAft>
               <a:buNone/>
+              <a:defRPr/>
             </a:lvl2pPr>
             <a:lvl3pPr marL="0" indent="0">
               <a:lnSpc>
@@ -3254,6 +4024,7 @@
                 <a:spcPts val="0"/>
               </a:spcAft>
               <a:buNone/>
+              <a:defRPr/>
             </a:lvl3pPr>
             <a:lvl4pPr marL="0" indent="0">
               <a:lnSpc>
@@ -3266,6 +4037,7 @@
                 <a:spcPts val="0"/>
               </a:spcAft>
               <a:buNone/>
+              <a:defRPr/>
             </a:lvl4pPr>
             <a:lvl5pPr marL="0" indent="0">
               <a:lnSpc>
@@ -3278,6 +4050,7 @@
                 <a:spcPts val="0"/>
               </a:spcAft>
               <a:buNone/>
+              <a:defRPr/>
             </a:lvl5pPr>
             <a:lvl6pPr marL="0" indent="0">
               <a:lnSpc>
@@ -3290,6 +4063,7 @@
                 <a:spcPts val="0"/>
               </a:spcAft>
               <a:buNone/>
+              <a:defRPr/>
             </a:lvl6pPr>
             <a:lvl7pPr marL="0" indent="0">
               <a:lnSpc>
@@ -3302,6 +4076,7 @@
                 <a:spcPts val="0"/>
               </a:spcAft>
               <a:buNone/>
+              <a:defRPr/>
             </a:lvl7pPr>
             <a:lvl8pPr marL="0" indent="0">
               <a:lnSpc>
@@ -3314,6 +4089,7 @@
                 <a:spcPts val="0"/>
               </a:spcAft>
               <a:buNone/>
+              <a:defRPr/>
             </a:lvl8pPr>
             <a:lvl9pPr marL="0" indent="0">
               <a:lnSpc>
@@ -3326,6 +4102,7 @@
                 <a:spcPts val="0"/>
               </a:spcAft>
               <a:buNone/>
+              <a:defRPr/>
             </a:lvl9pPr>
           </a:lstStyle>
           <a:p xmlns:a="http://schemas.openxmlformats.org/drawingml/2006/main"/>
@@ -3404,6 +4181,7 @@
                 <a:spcPts val="0"/>
               </a:spcAft>
               <a:buNone/>
+              <a:defRPr/>
             </a:lvl1pPr>
             <a:lvl2pPr marL="0" indent="0">
               <a:lnSpc>
@@ -3416,6 +4194,7 @@
                 <a:spcPts val="0"/>
               </a:spcAft>
               <a:buNone/>
+              <a:defRPr/>
             </a:lvl2pPr>
             <a:lvl3pPr marL="0" indent="0">
               <a:lnSpc>
@@ -3428,6 +4207,7 @@
                 <a:spcPts val="0"/>
               </a:spcAft>
               <a:buNone/>
+              <a:defRPr/>
             </a:lvl3pPr>
             <a:lvl4pPr marL="0" indent="0">
               <a:lnSpc>
@@ -3440,6 +4220,7 @@
                 <a:spcPts val="0"/>
               </a:spcAft>
               <a:buNone/>
+              <a:defRPr/>
             </a:lvl4pPr>
             <a:lvl5pPr marL="0" indent="0">
               <a:lnSpc>
@@ -3452,6 +4233,7 @@
                 <a:spcPts val="0"/>
               </a:spcAft>
               <a:buNone/>
+              <a:defRPr/>
             </a:lvl5pPr>
             <a:lvl6pPr marL="0" indent="0">
               <a:lnSpc>
@@ -3464,6 +4246,7 @@
                 <a:spcPts val="0"/>
               </a:spcAft>
               <a:buNone/>
+              <a:defRPr/>
             </a:lvl6pPr>
             <a:lvl7pPr marL="0" indent="0">
               <a:lnSpc>
@@ -3476,6 +4259,7 @@
                 <a:spcPts val="0"/>
               </a:spcAft>
               <a:buNone/>
+              <a:defRPr/>
             </a:lvl7pPr>
             <a:lvl8pPr marL="0" indent="0">
               <a:lnSpc>
@@ -3488,6 +4272,7 @@
                 <a:spcPts val="0"/>
               </a:spcAft>
               <a:buNone/>
+              <a:defRPr/>
             </a:lvl8pPr>
             <a:lvl9pPr marL="0" indent="0">
               <a:lnSpc>
@@ -3500,6 +4285,7 @@
                 <a:spcPts val="0"/>
               </a:spcAft>
               <a:buNone/>
+              <a:defRPr/>
             </a:lvl9pPr>
           </a:lstStyle>
           <a:p xmlns:a="http://schemas.openxmlformats.org/drawingml/2006/main"/>
@@ -3561,6 +4347,7 @@
                 <a:spcPts val="1200"/>
               </a:spcAft>
               <a:buChar char="•"/>
+              <a:defRPr/>
             </a:lvl1pPr>
             <a:lvl2pPr marL="533400" indent="-228600">
               <a:lnSpc>
@@ -3573,6 +4360,7 @@
                 <a:spcPts val="1200"/>
               </a:spcAft>
               <a:buChar char="•"/>
+              <a:defRPr/>
             </a:lvl2pPr>
             <a:lvl3pPr marL="838200" indent="-228600">
               <a:lnSpc>
@@ -3585,6 +4373,7 @@
                 <a:spcPts val="1200"/>
               </a:spcAft>
               <a:buChar char="•"/>
+              <a:defRPr/>
             </a:lvl3pPr>
             <a:lvl4pPr marL="1143000" indent="-228600">
               <a:lnSpc>
@@ -3597,6 +4386,7 @@
                 <a:spcPts val="1200"/>
               </a:spcAft>
               <a:buChar char="•"/>
+              <a:defRPr/>
             </a:lvl4pPr>
             <a:lvl5pPr marL="1447800" indent="-228600">
               <a:lnSpc>
@@ -3609,6 +4399,7 @@
                 <a:spcPts val="1200"/>
               </a:spcAft>
               <a:buChar char="•"/>
+              <a:defRPr/>
             </a:lvl5pPr>
             <a:lvl6pPr marL="1752600" indent="-228600">
               <a:lnSpc>
@@ -3621,6 +4412,7 @@
                 <a:spcPts val="1200"/>
               </a:spcAft>
               <a:buChar char="•"/>
+              <a:defRPr/>
             </a:lvl6pPr>
             <a:lvl7pPr marL="2057400" indent="-228600">
               <a:lnSpc>
@@ -3633,6 +4425,7 @@
                 <a:spcPts val="1200"/>
               </a:spcAft>
               <a:buChar char="•"/>
+              <a:defRPr/>
             </a:lvl7pPr>
             <a:lvl8pPr marL="2362200" indent="-228600">
               <a:lnSpc>
@@ -3645,6 +4438,7 @@
                 <a:spcPts val="1200"/>
               </a:spcAft>
               <a:buChar char="•"/>
+              <a:defRPr/>
             </a:lvl8pPr>
             <a:lvl9pPr marL="2667000" indent="-228600">
               <a:lnSpc>
@@ -3657,6 +4451,7 @@
                 <a:spcPts val="1200"/>
               </a:spcAft>
               <a:buChar char="•"/>
+              <a:defRPr/>
             </a:lvl9pPr>
           </a:lstStyle>
           <a:p xmlns:a="http://schemas.openxmlformats.org/drawingml/2006/main"/>
@@ -3735,6 +4530,7 @@
                 <a:spcPts val="0"/>
               </a:spcAft>
               <a:buNone/>
+              <a:defRPr/>
             </a:lvl1pPr>
             <a:lvl2pPr marL="0" indent="0">
               <a:lnSpc>
@@ -3747,6 +4543,7 @@
                 <a:spcPts val="0"/>
               </a:spcAft>
               <a:buNone/>
+              <a:defRPr/>
             </a:lvl2pPr>
             <a:lvl3pPr marL="0" indent="0">
               <a:lnSpc>
@@ -3759,6 +4556,7 @@
                 <a:spcPts val="0"/>
               </a:spcAft>
               <a:buNone/>
+              <a:defRPr/>
             </a:lvl3pPr>
             <a:lvl4pPr marL="0" indent="0">
               <a:lnSpc>
@@ -3771,6 +4569,7 @@
                 <a:spcPts val="0"/>
               </a:spcAft>
               <a:buNone/>
+              <a:defRPr/>
             </a:lvl4pPr>
             <a:lvl5pPr marL="0" indent="0">
               <a:lnSpc>
@@ -3783,6 +4582,7 @@
                 <a:spcPts val="0"/>
               </a:spcAft>
               <a:buNone/>
+              <a:defRPr/>
             </a:lvl5pPr>
             <a:lvl6pPr marL="0" indent="0">
               <a:lnSpc>
@@ -3795,6 +4595,7 @@
                 <a:spcPts val="0"/>
               </a:spcAft>
               <a:buNone/>
+              <a:defRPr/>
             </a:lvl6pPr>
             <a:lvl7pPr marL="0" indent="0">
               <a:lnSpc>
@@ -3807,6 +4608,7 @@
                 <a:spcPts val="0"/>
               </a:spcAft>
               <a:buNone/>
+              <a:defRPr/>
             </a:lvl7pPr>
             <a:lvl8pPr marL="0" indent="0">
               <a:lnSpc>
@@ -3819,6 +4621,7 @@
                 <a:spcPts val="0"/>
               </a:spcAft>
               <a:buNone/>
+              <a:defRPr/>
             </a:lvl8pPr>
             <a:lvl9pPr marL="0" indent="0">
               <a:lnSpc>
@@ -3831,6 +4634,7 @@
                 <a:spcPts val="0"/>
               </a:spcAft>
               <a:buNone/>
+              <a:defRPr/>
             </a:lvl9pPr>
           </a:lstStyle>
           <a:p xmlns:a="http://schemas.openxmlformats.org/drawingml/2006/main"/>
@@ -3892,6 +4696,7 @@
                 <a:spcPts val="1200"/>
               </a:spcAft>
               <a:buChar char="•"/>
+              <a:defRPr/>
             </a:lvl1pPr>
             <a:lvl2pPr marL="533400" indent="-228600">
               <a:lnSpc>
@@ -3904,6 +4709,7 @@
                 <a:spcPts val="1200"/>
               </a:spcAft>
               <a:buChar char="•"/>
+              <a:defRPr/>
             </a:lvl2pPr>
             <a:lvl3pPr marL="838200" indent="-228600">
               <a:lnSpc>
@@ -3916,6 +4722,7 @@
                 <a:spcPts val="1200"/>
               </a:spcAft>
               <a:buChar char="•"/>
+              <a:defRPr/>
             </a:lvl3pPr>
             <a:lvl4pPr marL="1143000" indent="-228600">
               <a:lnSpc>
@@ -3928,6 +4735,7 @@
                 <a:spcPts val="1200"/>
               </a:spcAft>
               <a:buChar char="•"/>
+              <a:defRPr/>
             </a:lvl4pPr>
             <a:lvl5pPr marL="1447800" indent="-228600">
               <a:lnSpc>
@@ -3940,6 +4748,7 @@
                 <a:spcPts val="1200"/>
               </a:spcAft>
               <a:buChar char="•"/>
+              <a:defRPr/>
             </a:lvl5pPr>
             <a:lvl6pPr marL="1752600" indent="-228600">
               <a:lnSpc>
@@ -3952,6 +4761,7 @@
                 <a:spcPts val="1200"/>
               </a:spcAft>
               <a:buChar char="•"/>
+              <a:defRPr/>
             </a:lvl6pPr>
             <a:lvl7pPr marL="2057400" indent="-228600">
               <a:lnSpc>
@@ -3964,6 +4774,7 @@
                 <a:spcPts val="1200"/>
               </a:spcAft>
               <a:buChar char="•"/>
+              <a:defRPr/>
             </a:lvl7pPr>
             <a:lvl8pPr marL="2362200" indent="-228600">
               <a:lnSpc>
@@ -3976,6 +4787,7 @@
                 <a:spcPts val="1200"/>
               </a:spcAft>
               <a:buChar char="•"/>
+              <a:defRPr/>
             </a:lvl8pPr>
             <a:lvl9pPr marL="2667000" indent="-228600">
               <a:lnSpc>
@@ -3988,6 +4800,7 @@
                 <a:spcPts val="1200"/>
               </a:spcAft>
               <a:buChar char="•"/>
+              <a:defRPr/>
             </a:lvl9pPr>
           </a:lstStyle>
           <a:p xmlns:a="http://schemas.openxmlformats.org/drawingml/2006/main"/>
@@ -4049,6 +4862,7 @@
                 <a:spcPts val="1200"/>
               </a:spcAft>
               <a:buChar char="•"/>
+              <a:defRPr/>
             </a:lvl1pPr>
             <a:lvl2pPr marL="533400" indent="-228600">
               <a:lnSpc>
@@ -4061,6 +4875,7 @@
                 <a:spcPts val="1200"/>
               </a:spcAft>
               <a:buChar char="•"/>
+              <a:defRPr/>
             </a:lvl2pPr>
             <a:lvl3pPr marL="838200" indent="-228600">
               <a:lnSpc>
@@ -4073,6 +4888,7 @@
                 <a:spcPts val="1200"/>
               </a:spcAft>
               <a:buChar char="•"/>
+              <a:defRPr/>
             </a:lvl3pPr>
             <a:lvl4pPr marL="1143000" indent="-228600">
               <a:lnSpc>
@@ -4085,6 +4901,7 @@
                 <a:spcPts val="1200"/>
               </a:spcAft>
               <a:buChar char="•"/>
+              <a:defRPr/>
             </a:lvl4pPr>
             <a:lvl5pPr marL="1447800" indent="-228600">
               <a:lnSpc>
@@ -4097,6 +4914,7 @@
                 <a:spcPts val="1200"/>
               </a:spcAft>
               <a:buChar char="•"/>
+              <a:defRPr/>
             </a:lvl5pPr>
             <a:lvl6pPr marL="1752600" indent="-228600">
               <a:lnSpc>
@@ -4109,6 +4927,7 @@
                 <a:spcPts val="1200"/>
               </a:spcAft>
               <a:buChar char="•"/>
+              <a:defRPr/>
             </a:lvl6pPr>
             <a:lvl7pPr marL="2057400" indent="-228600">
               <a:lnSpc>
@@ -4121,6 +4940,7 @@
                 <a:spcPts val="1200"/>
               </a:spcAft>
               <a:buChar char="•"/>
+              <a:defRPr/>
             </a:lvl7pPr>
             <a:lvl8pPr marL="2362200" indent="-228600">
               <a:lnSpc>
@@ -4133,6 +4953,7 @@
                 <a:spcPts val="1200"/>
               </a:spcAft>
               <a:buChar char="•"/>
+              <a:defRPr/>
             </a:lvl8pPr>
             <a:lvl9pPr marL="2667000" indent="-228600">
               <a:lnSpc>
@@ -4145,6 +4966,7 @@
                 <a:spcPts val="1200"/>
               </a:spcAft>
               <a:buChar char="•"/>
+              <a:defRPr/>
             </a:lvl9pPr>
           </a:lstStyle>
           <a:p xmlns:a="http://schemas.openxmlformats.org/drawingml/2006/main"/>
@@ -4223,6 +5045,7 @@
                 <a:spcPts val="0"/>
               </a:spcAft>
               <a:buNone/>
+              <a:defRPr/>
             </a:lvl1pPr>
             <a:lvl2pPr marL="0" indent="0">
               <a:lnSpc>
@@ -4235,6 +5058,7 @@
                 <a:spcPts val="0"/>
               </a:spcAft>
               <a:buNone/>
+              <a:defRPr/>
             </a:lvl2pPr>
             <a:lvl3pPr marL="0" indent="0">
               <a:lnSpc>
@@ -4247,6 +5071,7 @@
                 <a:spcPts val="0"/>
               </a:spcAft>
               <a:buNone/>
+              <a:defRPr/>
             </a:lvl3pPr>
             <a:lvl4pPr marL="0" indent="0">
               <a:lnSpc>
@@ -4259,6 +5084,7 @@
                 <a:spcPts val="0"/>
               </a:spcAft>
               <a:buNone/>
+              <a:defRPr/>
             </a:lvl4pPr>
             <a:lvl5pPr marL="0" indent="0">
               <a:lnSpc>
@@ -4271,6 +5097,7 @@
                 <a:spcPts val="0"/>
               </a:spcAft>
               <a:buNone/>
+              <a:defRPr/>
             </a:lvl5pPr>
             <a:lvl6pPr marL="0" indent="0">
               <a:lnSpc>
@@ -4283,6 +5110,7 @@
                 <a:spcPts val="0"/>
               </a:spcAft>
               <a:buNone/>
+              <a:defRPr/>
             </a:lvl6pPr>
             <a:lvl7pPr marL="0" indent="0">
               <a:lnSpc>
@@ -4295,6 +5123,7 @@
                 <a:spcPts val="0"/>
               </a:spcAft>
               <a:buNone/>
+              <a:defRPr/>
             </a:lvl7pPr>
             <a:lvl8pPr marL="0" indent="0">
               <a:lnSpc>
@@ -4307,6 +5136,7 @@
                 <a:spcPts val="0"/>
               </a:spcAft>
               <a:buNone/>
+              <a:defRPr/>
             </a:lvl8pPr>
             <a:lvl9pPr marL="0" indent="0">
               <a:lnSpc>
@@ -4319,6 +5149,7 @@
                 <a:spcPts val="0"/>
               </a:spcAft>
               <a:buNone/>
+              <a:defRPr/>
             </a:lvl9pPr>
           </a:lstStyle>
           <a:p xmlns:a="http://schemas.openxmlformats.org/drawingml/2006/main"/>
@@ -4380,6 +5211,7 @@
                 <a:spcPts val="1200"/>
               </a:spcAft>
               <a:buChar char="•"/>
+              <a:defRPr/>
             </a:lvl1pPr>
             <a:lvl2pPr marL="533400" indent="-228600">
               <a:lnSpc>
@@ -4392,6 +5224,7 @@
                 <a:spcPts val="1200"/>
               </a:spcAft>
               <a:buChar char="•"/>
+              <a:defRPr/>
             </a:lvl2pPr>
             <a:lvl3pPr marL="838200" indent="-228600">
               <a:lnSpc>
@@ -4404,6 +5237,7 @@
                 <a:spcPts val="1200"/>
               </a:spcAft>
               <a:buChar char="•"/>
+              <a:defRPr/>
             </a:lvl3pPr>
             <a:lvl4pPr marL="1143000" indent="-228600">
               <a:lnSpc>
@@ -4416,6 +5250,7 @@
                 <a:spcPts val="1200"/>
               </a:spcAft>
               <a:buChar char="•"/>
+              <a:defRPr/>
             </a:lvl4pPr>
             <a:lvl5pPr marL="1447800" indent="-228600">
               <a:lnSpc>
@@ -4428,6 +5263,7 @@
                 <a:spcPts val="1200"/>
               </a:spcAft>
               <a:buChar char="•"/>
+              <a:defRPr/>
             </a:lvl5pPr>
             <a:lvl6pPr marL="1752600" indent="-228600">
               <a:lnSpc>
@@ -4440,6 +5276,7 @@
                 <a:spcPts val="1200"/>
               </a:spcAft>
               <a:buChar char="•"/>
+              <a:defRPr/>
             </a:lvl6pPr>
             <a:lvl7pPr marL="2057400" indent="-228600">
               <a:lnSpc>
@@ -4452,6 +5289,7 @@
                 <a:spcPts val="1200"/>
               </a:spcAft>
               <a:buChar char="•"/>
+              <a:defRPr/>
             </a:lvl7pPr>
             <a:lvl8pPr marL="2362200" indent="-228600">
               <a:lnSpc>
@@ -4464,6 +5302,7 @@
                 <a:spcPts val="1200"/>
               </a:spcAft>
               <a:buChar char="•"/>
+              <a:defRPr/>
             </a:lvl8pPr>
             <a:lvl9pPr marL="2667000" indent="-228600">
               <a:lnSpc>
@@ -4476,6 +5315,7 @@
                 <a:spcPts val="1200"/>
               </a:spcAft>
               <a:buChar char="•"/>
+              <a:defRPr/>
             </a:lvl9pPr>
           </a:lstStyle>
           <a:p xmlns:a="http://schemas.openxmlformats.org/drawingml/2006/main"/>
@@ -4524,12 +5364,12 @@
   </p:cSld>
   <p:clrMap bg1="lt1" tx1="dk1" bg2="lt2" tx2="dk2" accent1="accent1" accent2="accent2" accent3="accent3" accent4="accent4" accent5="accent5" accent6="accent6" hlink="hlink" folHlink="folHlink"/>
   <p:sldLayoutIdLst>
-    <p:sldLayoutId xmlns:r="http://schemas.openxmlformats.org/officeDocument/2006/relationships" id="2147483649" r:id="Rdf83e120d86043c0"/>
-    <p:sldLayoutId xmlns:r="http://schemas.openxmlformats.org/officeDocument/2006/relationships" id="2147483650" r:id="Rf54b160d66cd4296"/>
-    <p:sldLayoutId xmlns:r="http://schemas.openxmlformats.org/officeDocument/2006/relationships" id="2147483651" r:id="R4545c73f7db74e7e"/>
-    <p:sldLayoutId xmlns:r="http://schemas.openxmlformats.org/officeDocument/2006/relationships" id="2147483652" r:id="R711190cd4fc4490c"/>
-    <p:sldLayoutId xmlns:r="http://schemas.openxmlformats.org/officeDocument/2006/relationships" id="2147483653" r:id="R7cf9bb4a532b41a6"/>
-    <p:sldLayoutId xmlns:r="http://schemas.openxmlformats.org/officeDocument/2006/relationships" id="2147483654" r:id="Rfc306b15d8ad47b9"/>
+    <p:sldLayoutId xmlns:r="http://schemas.openxmlformats.org/officeDocument/2006/relationships" id="2147483649" r:id="R911c7136308e4df5"/>
+    <p:sldLayoutId xmlns:r="http://schemas.openxmlformats.org/officeDocument/2006/relationships" id="2147483650" r:id="R934a67d2b32449a9"/>
+    <p:sldLayoutId xmlns:r="http://schemas.openxmlformats.org/officeDocument/2006/relationships" id="2147483651" r:id="R233c6da6835c487e"/>
+    <p:sldLayoutId xmlns:r="http://schemas.openxmlformats.org/officeDocument/2006/relationships" id="2147483652" r:id="R847ea64938ce4f87"/>
+    <p:sldLayoutId xmlns:r="http://schemas.openxmlformats.org/officeDocument/2006/relationships" id="2147483653" r:id="Ra1a3cdfb2e644928"/>
+    <p:sldLayoutId xmlns:r="http://schemas.openxmlformats.org/officeDocument/2006/relationships" id="2147483654" r:id="R733052f661d44d56"/>
   </p:sldLayoutIdLst>
   <p:txStyles>
     <p:titleStyle>
@@ -5105,7 +5945,7 @@
         <p:txBody>
           <a:bodyPr xmlns:a="http://schemas.openxmlformats.org/drawingml/2006/main"/>
           <a:lstStyle xmlns:a="http://schemas.openxmlformats.org/drawingml/2006/main">
-            <a:defPPr>
+            <a:defPPr algn="l">
               <a:defRPr sz="1275" b="1">
                 <a:solidFill>
                   <a:srgbClr val="92E8DF"/>
@@ -5117,7 +5957,8 @@
             </a:defPPr>
           </a:lstStyle>
           <a:p xmlns:a="http://schemas.openxmlformats.org/drawingml/2006/main">
-            <a:pPr>
+            <a:pPr algn="l">
+              <a:buNone/>
               <a:defRPr sz="1275" b="1">
                 <a:solidFill>
                   <a:srgbClr val="92E8DF"/>
@@ -5171,7 +6012,7 @@
         <p:txBody>
           <a:bodyPr xmlns:a="http://schemas.openxmlformats.org/drawingml/2006/main"/>
           <a:lstStyle xmlns:a="http://schemas.openxmlformats.org/drawingml/2006/main">
-            <a:defPPr>
+            <a:defPPr algn="l">
               <a:defRPr sz="4650" b="1">
                 <a:solidFill>
                   <a:srgbClr val="FFFFFF"/>
@@ -5183,7 +6024,8 @@
             </a:defPPr>
           </a:lstStyle>
           <a:p xmlns:a="http://schemas.openxmlformats.org/drawingml/2006/main">
-            <a:pPr>
+            <a:pPr algn="l">
+              <a:buNone/>
               <a:defRPr sz="4650" b="1">
                 <a:solidFill>
                   <a:srgbClr val="FFFFFF"/>
@@ -5212,7 +6054,7 @@
           <p:cNvPr id="3" name="">
             <a:extLst xmlns:a="http://schemas.openxmlformats.org/drawingml/2006/main">
               <a:ext uri="{FF2B5EF4-FFF2-40B4-BE49-F238E27FC236}">
-                <a16:creationId xmlns:a16="http://schemas.microsoft.com/office/drawing/2014/main" id="{FD73C876-13C9-4690-AC0F-CE523CA9EC42}"/>
+                <a16:creationId xmlns:a16="http://schemas.microsoft.com/office/drawing/2014/main" id="{DF977216-842A-4AC2-B814-F91FE277C05C}"/>
               </a:ext>
             </a:extLst>
           </p:cNvPr>
@@ -5222,7 +6064,7 @@
           <p:nvPr/>
         </p:nvPicPr>
         <p:blipFill>
-          <a:blip xmlns:r="http://schemas.openxmlformats.org/officeDocument/2006/relationships" xmlns:a="http://schemas.openxmlformats.org/drawingml/2006/main" r:embed="R01357645091046e3"/>
+          <a:blip xmlns:r="http://schemas.openxmlformats.org/officeDocument/2006/relationships" xmlns:a="http://schemas.openxmlformats.org/drawingml/2006/main" r:embed="Rbcd00f5fd9b54282"/>
           <a:stretch xmlns:a="http://schemas.openxmlformats.org/drawingml/2006/main"/>
         </p:blipFill>
         <p:spPr>
@@ -5265,7 +6107,7 @@
         <p:txBody>
           <a:bodyPr xmlns:a="http://schemas.openxmlformats.org/drawingml/2006/main"/>
           <a:lstStyle xmlns:a="http://schemas.openxmlformats.org/drawingml/2006/main">
-            <a:defPPr>
+            <a:defPPr algn="l">
               <a:defRPr sz="2325" b="0">
                 <a:solidFill>
                   <a:srgbClr val="FFFFFF"/>
@@ -5277,7 +6119,8 @@
             </a:defPPr>
           </a:lstStyle>
           <a:p xmlns:a="http://schemas.openxmlformats.org/drawingml/2006/main">
-            <a:pPr>
+            <a:pPr algn="l">
+              <a:buNone/>
               <a:defRPr sz="2325" b="0">
                 <a:solidFill>
                   <a:srgbClr val="FFFFFF"/>
@@ -5300,7 +6143,8 @@
             </a:r>
           </a:p>
           <a:p xmlns:a="http://schemas.openxmlformats.org/drawingml/2006/main">
-            <a:pPr>
+            <a:pPr algn="l">
+              <a:buNone/>
               <a:defRPr sz="2325" b="0">
                 <a:solidFill>
                   <a:srgbClr val="FFFFFF"/>
@@ -5323,7 +6167,8 @@
             </a:r>
           </a:p>
           <a:p xmlns:a="http://schemas.openxmlformats.org/drawingml/2006/main">
-            <a:pPr>
+            <a:pPr algn="l">
+              <a:buNone/>
               <a:defRPr sz="2325" b="0">
                 <a:solidFill>
                   <a:srgbClr val="FFFFFF"/>
@@ -5377,7 +6222,7 @@
         <p:txBody>
           <a:bodyPr xmlns:a="http://schemas.openxmlformats.org/drawingml/2006/main"/>
           <a:lstStyle xmlns:a="http://schemas.openxmlformats.org/drawingml/2006/main">
-            <a:defPPr>
+            <a:defPPr algn="l">
               <a:defRPr sz="1200" b="0">
                 <a:solidFill>
                   <a:srgbClr val="92B4C2"/>
@@ -5389,7 +6234,8 @@
             </a:defPPr>
           </a:lstStyle>
           <a:p xmlns:a="http://schemas.openxmlformats.org/drawingml/2006/main">
-            <a:pPr>
+            <a:pPr algn="l">
+              <a:buNone/>
               <a:defRPr sz="1200" b="0">
                 <a:solidFill>
                   <a:srgbClr val="92B4C2"/>
@@ -5472,7 +6318,7 @@
         <p:txBody>
           <a:bodyPr xmlns:a="http://schemas.openxmlformats.org/drawingml/2006/main"/>
           <a:lstStyle xmlns:a="http://schemas.openxmlformats.org/drawingml/2006/main">
-            <a:defPPr>
+            <a:defPPr algn="l">
               <a:defRPr sz="1275" b="1">
                 <a:solidFill>
                   <a:srgbClr val="007D83"/>
@@ -5484,7 +6330,8 @@
             </a:defPPr>
           </a:lstStyle>
           <a:p xmlns:a="http://schemas.openxmlformats.org/drawingml/2006/main">
-            <a:pPr>
+            <a:pPr algn="l">
+              <a:buNone/>
               <a:defRPr sz="1275" b="1">
                 <a:solidFill>
                   <a:srgbClr val="007D83"/>
@@ -5538,7 +6385,7 @@
         <p:txBody>
           <a:bodyPr xmlns:a="http://schemas.openxmlformats.org/drawingml/2006/main"/>
           <a:lstStyle xmlns:a="http://schemas.openxmlformats.org/drawingml/2006/main">
-            <a:defPPr>
+            <a:defPPr algn="l">
               <a:defRPr sz="3300" b="1">
                 <a:solidFill>
                   <a:srgbClr val="203B4D"/>
@@ -5550,7 +6397,8 @@
             </a:defPPr>
           </a:lstStyle>
           <a:p xmlns:a="http://schemas.openxmlformats.org/drawingml/2006/main">
-            <a:pPr>
+            <a:pPr algn="l">
+              <a:buNone/>
               <a:defRPr sz="3300" b="1">
                 <a:solidFill>
                   <a:srgbClr val="203B4D"/>
@@ -5604,7 +6452,7 @@
         <p:txBody>
           <a:bodyPr xmlns:a="http://schemas.openxmlformats.org/drawingml/2006/main"/>
           <a:lstStyle xmlns:a="http://schemas.openxmlformats.org/drawingml/2006/main">
-            <a:defPPr>
+            <a:defPPr algn="l">
               <a:defRPr sz="2025" b="0">
                 <a:solidFill>
                   <a:srgbClr val="203B4D"/>
@@ -5616,7 +6464,8 @@
             </a:defPPr>
           </a:lstStyle>
           <a:p xmlns:a="http://schemas.openxmlformats.org/drawingml/2006/main">
-            <a:pPr>
+            <a:pPr algn="l">
+              <a:buNone/>
               <a:defRPr sz="2025" b="0">
                 <a:solidFill>
                   <a:srgbClr val="203B4D"/>
@@ -5639,7 +6488,8 @@
             </a:r>
           </a:p>
           <a:p xmlns:a="http://schemas.openxmlformats.org/drawingml/2006/main">
-            <a:pPr>
+            <a:pPr algn="l">
+              <a:buNone/>
               <a:defRPr sz="2025" b="0">
                 <a:solidFill>
                   <a:srgbClr val="203B4D"/>
@@ -5662,7 +6512,8 @@
             </a:r>
           </a:p>
           <a:p xmlns:a="http://schemas.openxmlformats.org/drawingml/2006/main">
-            <a:pPr>
+            <a:pPr algn="l">
+              <a:buNone/>
               <a:defRPr sz="2025" b="0">
                 <a:solidFill>
                   <a:srgbClr val="203B4D"/>
@@ -5716,7 +6567,7 @@
         <p:txBody>
           <a:bodyPr xmlns:a="http://schemas.openxmlformats.org/drawingml/2006/main"/>
           <a:lstStyle xmlns:a="http://schemas.openxmlformats.org/drawingml/2006/main">
-            <a:defPPr>
+            <a:defPPr algn="l">
               <a:defRPr sz="1875" b="0">
                 <a:solidFill>
                   <a:srgbClr val="087B80"/>
@@ -5728,7 +6579,8 @@
             </a:defPPr>
           </a:lstStyle>
           <a:p xmlns:a="http://schemas.openxmlformats.org/drawingml/2006/main">
-            <a:pPr>
+            <a:pPr algn="l">
+              <a:buNone/>
               <a:defRPr sz="1875" b="0">
                 <a:solidFill>
                   <a:srgbClr val="087B80"/>
@@ -5747,11 +6599,12 @@
                 <a:ea typeface="Consolas"/>
                 <a:cs typeface="Consolas"/>
               </a:rPr>
-              <a:t>&lt;PageHeader title="Asset inventory" /&gt;</a:t>
-            </a:r>
-          </a:p>
-          <a:p xmlns:a="http://schemas.openxmlformats.org/drawingml/2006/main">
-            <a:pPr>
+              <a:t>&lt;PageHeader title="Shop products" /&gt;</a:t>
+            </a:r>
+          </a:p>
+          <a:p xmlns:a="http://schemas.openxmlformats.org/drawingml/2006/main">
+            <a:pPr algn="l">
+              <a:buNone/>
               <a:defRPr sz="1875" b="0">
                 <a:solidFill>
                   <a:srgbClr val="087B80"/>
@@ -5770,11 +6623,12 @@
                 <a:ea typeface="Consolas"/>
                 <a:cs typeface="Consolas"/>
               </a:rPr>
-              <a:t>&lt;AssetSummary assets={assets} /&gt;</a:t>
-            </a:r>
-          </a:p>
-          <a:p xmlns:a="http://schemas.openxmlformats.org/drawingml/2006/main">
-            <a:pPr>
+              <a:t>&lt;ProductSummary products={products} /&gt;</a:t>
+            </a:r>
+          </a:p>
+          <a:p xmlns:a="http://schemas.openxmlformats.org/drawingml/2006/main">
+            <a:pPr algn="l">
+              <a:buNone/>
               <a:defRPr sz="1875" b="0">
                 <a:solidFill>
                   <a:srgbClr val="087B80"/>
@@ -5793,7 +6647,7 @@
                 <a:ea typeface="Consolas"/>
                 <a:cs typeface="Consolas"/>
               </a:rPr>
-              <a:t>&lt;AssetCard asset={assets[0]} showLocation={false} /&gt;</a:t>
+              <a:t>&lt;ProductCard product={products[0]} showCategory={false} /&gt;</a:t>
             </a:r>
           </a:p>
         </p:txBody>
@@ -5828,7 +6682,7 @@
         <p:txBody>
           <a:bodyPr xmlns:a="http://schemas.openxmlformats.org/drawingml/2006/main"/>
           <a:lstStyle xmlns:a="http://schemas.openxmlformats.org/drawingml/2006/main">
-            <a:defPPr>
+            <a:defPPr algn="l">
               <a:defRPr sz="1725" b="1">
                 <a:solidFill>
                   <a:srgbClr val="85551E"/>
@@ -5840,7 +6694,8 @@
             </a:defPPr>
           </a:lstStyle>
           <a:p xmlns:a="http://schemas.openxmlformats.org/drawingml/2006/main">
-            <a:pPr>
+            <a:pPr algn="l">
+              <a:buNone/>
               <a:defRPr sz="1725" b="1">
                 <a:solidFill>
                   <a:srgbClr val="85551E"/>
@@ -5894,7 +6749,7 @@
         <p:txBody>
           <a:bodyPr xmlns:a="http://schemas.openxmlformats.org/drawingml/2006/main"/>
           <a:lstStyle xmlns:a="http://schemas.openxmlformats.org/drawingml/2006/main">
-            <a:defPPr>
+            <a:defPPr algn="l">
               <a:defRPr sz="1200" b="0">
                 <a:solidFill>
                   <a:srgbClr val="6B7F8D"/>
@@ -5906,7 +6761,8 @@
             </a:defPPr>
           </a:lstStyle>
           <a:p xmlns:a="http://schemas.openxmlformats.org/drawingml/2006/main">
-            <a:pPr>
+            <a:pPr algn="l">
+              <a:buNone/>
               <a:defRPr sz="1200" b="0">
                 <a:solidFill>
                   <a:srgbClr val="6B7F8D"/>
@@ -5989,7 +6845,7 @@
         <p:txBody>
           <a:bodyPr xmlns:a="http://schemas.openxmlformats.org/drawingml/2006/main"/>
           <a:lstStyle xmlns:a="http://schemas.openxmlformats.org/drawingml/2006/main">
-            <a:defPPr>
+            <a:defPPr algn="l">
               <a:defRPr sz="1275" b="1">
                 <a:solidFill>
                   <a:srgbClr val="007D83"/>
@@ -6001,7 +6857,8 @@
             </a:defPPr>
           </a:lstStyle>
           <a:p xmlns:a="http://schemas.openxmlformats.org/drawingml/2006/main">
-            <a:pPr>
+            <a:pPr algn="l">
+              <a:buNone/>
               <a:defRPr sz="1275" b="1">
                 <a:solidFill>
                   <a:srgbClr val="007D83"/>
@@ -6055,7 +6912,7 @@
         <p:txBody>
           <a:bodyPr xmlns:a="http://schemas.openxmlformats.org/drawingml/2006/main"/>
           <a:lstStyle xmlns:a="http://schemas.openxmlformats.org/drawingml/2006/main">
-            <a:defPPr>
+            <a:defPPr algn="l">
               <a:defRPr sz="3300" b="1">
                 <a:solidFill>
                   <a:srgbClr val="203B4D"/>
@@ -6067,7 +6924,8 @@
             </a:defPPr>
           </a:lstStyle>
           <a:p xmlns:a="http://schemas.openxmlformats.org/drawingml/2006/main">
-            <a:pPr>
+            <a:pPr algn="l">
+              <a:buNone/>
               <a:defRPr sz="3300" b="1">
                 <a:solidFill>
                   <a:srgbClr val="203B4D"/>
@@ -6121,7 +6979,7 @@
         <p:txBody>
           <a:bodyPr xmlns:a="http://schemas.openxmlformats.org/drawingml/2006/main"/>
           <a:lstStyle xmlns:a="http://schemas.openxmlformats.org/drawingml/2006/main">
-            <a:defPPr>
+            <a:defPPr algn="l">
               <a:defRPr sz="2025" b="0">
                 <a:solidFill>
                   <a:srgbClr val="203B4D"/>
@@ -6133,7 +6991,8 @@
             </a:defPPr>
           </a:lstStyle>
           <a:p xmlns:a="http://schemas.openxmlformats.org/drawingml/2006/main">
-            <a:pPr>
+            <a:pPr algn="l">
+              <a:buNone/>
               <a:defRPr sz="2025" b="0">
                 <a:solidFill>
                   <a:srgbClr val="203B4D"/>
@@ -6156,7 +7015,8 @@
             </a:r>
           </a:p>
           <a:p xmlns:a="http://schemas.openxmlformats.org/drawingml/2006/main">
-            <a:pPr>
+            <a:pPr algn="l">
+              <a:buNone/>
               <a:defRPr sz="2025" b="0">
                 <a:solidFill>
                   <a:srgbClr val="203B4D"/>
@@ -6179,7 +7039,8 @@
             </a:r>
           </a:p>
           <a:p xmlns:a="http://schemas.openxmlformats.org/drawingml/2006/main">
-            <a:pPr>
+            <a:pPr algn="l">
+              <a:buNone/>
               <a:defRPr sz="2025" b="0">
                 <a:solidFill>
                   <a:srgbClr val="203B4D"/>
@@ -6233,7 +7094,7 @@
         <p:txBody>
           <a:bodyPr xmlns:a="http://schemas.openxmlformats.org/drawingml/2006/main"/>
           <a:lstStyle xmlns:a="http://schemas.openxmlformats.org/drawingml/2006/main">
-            <a:defPPr>
+            <a:defPPr algn="l">
               <a:defRPr sz="1875" b="0">
                 <a:solidFill>
                   <a:srgbClr val="087B80"/>
@@ -6245,7 +7106,8 @@
             </a:defPPr>
           </a:lstStyle>
           <a:p xmlns:a="http://schemas.openxmlformats.org/drawingml/2006/main">
-            <a:pPr>
+            <a:pPr algn="l">
+              <a:buNone/>
               <a:defRPr sz="1875" b="0">
                 <a:solidFill>
                   <a:srgbClr val="087B80"/>
@@ -6264,11 +7126,12 @@
                 <a:ea typeface="Consolas"/>
                 <a:cs typeface="Consolas"/>
               </a:rPr>
-              <a:t>function StatusBadge({ status = 'Available' }) {</a:t>
-            </a:r>
-          </a:p>
-          <a:p xmlns:a="http://schemas.openxmlformats.org/drawingml/2006/main">
-            <a:pPr>
+              <a:t>function StockBadge({ inStock = true }) {</a:t>
+            </a:r>
+          </a:p>
+          <a:p xmlns:a="http://schemas.openxmlformats.org/drawingml/2006/main">
+            <a:pPr algn="l">
+              <a:buNone/>
               <a:defRPr sz="1875" b="0">
                 <a:solidFill>
                   <a:srgbClr val="087B80"/>
@@ -6287,11 +7150,12 @@
                 <a:ea typeface="Consolas"/>
                 <a:cs typeface="Consolas"/>
               </a:rPr>
-              <a:t>  return &lt;span&gt;{status}&lt;/span&gt;;</a:t>
-            </a:r>
-          </a:p>
-          <a:p xmlns:a="http://schemas.openxmlformats.org/drawingml/2006/main">
-            <a:pPr>
+              <a:t>  return &lt;span&gt;{inStock</a:t>
+            </a:r>
+          </a:p>
+          <a:p xmlns:a="http://schemas.openxmlformats.org/drawingml/2006/main">
+            <a:pPr algn="l">
+              <a:buNone/>
               <a:defRPr sz="1875" b="0">
                 <a:solidFill>
                   <a:srgbClr val="087B80"/>
@@ -6310,11 +7174,36 @@
                 <a:ea typeface="Consolas"/>
                 <a:cs typeface="Consolas"/>
               </a:rPr>
+              <a:t>    ? 'In stock' : 'Out of stock'}&lt;/span&gt;;</a:t>
+            </a:r>
+          </a:p>
+          <a:p xmlns:a="http://schemas.openxmlformats.org/drawingml/2006/main">
+            <a:pPr algn="l">
+              <a:buNone/>
+              <a:defRPr sz="1875" b="0">
+                <a:solidFill>
+                  <a:srgbClr val="087B80"/>
+                </a:solidFill>
+                <a:latin typeface="Consolas"/>
+                <a:ea typeface="Consolas"/>
+                <a:cs typeface="Consolas"/>
+              </a:defRPr>
+            </a:pPr>
+            <a:r>
+              <a:rPr sz="1875" b="0">
+                <a:solidFill>
+                  <a:srgbClr val="087B80"/>
+                </a:solidFill>
+                <a:latin typeface="Consolas"/>
+                <a:ea typeface="Consolas"/>
+                <a:cs typeface="Consolas"/>
+              </a:rPr>
               <a:t>}</a:t>
             </a:r>
           </a:p>
           <a:p xmlns:a="http://schemas.openxmlformats.org/drawingml/2006/main">
-            <a:pPr>
+            <a:pPr algn="l">
+              <a:buNone/>
               <a:defRPr sz="1875" b="0">
                 <a:solidFill>
                   <a:srgbClr val="087B80"/>
@@ -6333,11 +7222,12 @@
                 <a:ea typeface="Consolas"/>
                 <a:cs typeface="Consolas"/>
               </a:rPr>
-              <a:t>&lt;StatusBadge /&gt;</a:t>
-            </a:r>
-          </a:p>
-          <a:p xmlns:a="http://schemas.openxmlformats.org/drawingml/2006/main">
-            <a:pPr>
+              <a:t>&lt;StockBadge /&gt;</a:t>
+            </a:r>
+          </a:p>
+          <a:p xmlns:a="http://schemas.openxmlformats.org/drawingml/2006/main">
+            <a:pPr algn="l">
+              <a:buNone/>
               <a:defRPr sz="1875" b="0">
                 <a:solidFill>
                   <a:srgbClr val="087B80"/>
@@ -6356,7 +7246,7 @@
                 <a:ea typeface="Consolas"/>
                 <a:cs typeface="Consolas"/>
               </a:rPr>
-              <a:t>&lt;StatusBadge status="Assigned" /&gt;</a:t>
+              <a:t>&lt;StockBadge inStock={false} /&gt;</a:t>
             </a:r>
           </a:p>
         </p:txBody>
@@ -6391,7 +7281,7 @@
         <p:txBody>
           <a:bodyPr xmlns:a="http://schemas.openxmlformats.org/drawingml/2006/main"/>
           <a:lstStyle xmlns:a="http://schemas.openxmlformats.org/drawingml/2006/main">
-            <a:defPPr>
+            <a:defPPr algn="l">
               <a:defRPr sz="1725" b="1">
                 <a:solidFill>
                   <a:srgbClr val="85551E"/>
@@ -6403,7 +7293,8 @@
             </a:defPPr>
           </a:lstStyle>
           <a:p xmlns:a="http://schemas.openxmlformats.org/drawingml/2006/main">
-            <a:pPr>
+            <a:pPr algn="l">
+              <a:buNone/>
               <a:defRPr sz="1725" b="1">
                 <a:solidFill>
                   <a:srgbClr val="85551E"/>
@@ -6422,7 +7313,7 @@
                 <a:ea typeface="Arial"/>
                 <a:cs typeface="Arial"/>
               </a:rPr>
-              <a:t>The badges display Available and Assigned</a:t>
+              <a:t>The badges display In stock and Out of stock</a:t>
             </a:r>
           </a:p>
         </p:txBody>
@@ -6457,7 +7348,7 @@
         <p:txBody>
           <a:bodyPr xmlns:a="http://schemas.openxmlformats.org/drawingml/2006/main"/>
           <a:lstStyle xmlns:a="http://schemas.openxmlformats.org/drawingml/2006/main">
-            <a:defPPr>
+            <a:defPPr algn="l">
               <a:defRPr sz="1200" b="0">
                 <a:solidFill>
                   <a:srgbClr val="6B7F8D"/>
@@ -6469,7 +7360,8 @@
             </a:defPPr>
           </a:lstStyle>
           <a:p xmlns:a="http://schemas.openxmlformats.org/drawingml/2006/main">
-            <a:pPr>
+            <a:pPr algn="l">
+              <a:buNone/>
               <a:defRPr sz="1200" b="0">
                 <a:solidFill>
                   <a:srgbClr val="6B7F8D"/>
@@ -6552,7 +7444,7 @@
         <p:txBody>
           <a:bodyPr xmlns:a="http://schemas.openxmlformats.org/drawingml/2006/main"/>
           <a:lstStyle xmlns:a="http://schemas.openxmlformats.org/drawingml/2006/main">
-            <a:defPPr>
+            <a:defPPr algn="l">
               <a:defRPr sz="1275" b="1">
                 <a:solidFill>
                   <a:srgbClr val="007D83"/>
@@ -6564,7 +7456,8 @@
             </a:defPPr>
           </a:lstStyle>
           <a:p xmlns:a="http://schemas.openxmlformats.org/drawingml/2006/main">
-            <a:pPr>
+            <a:pPr algn="l">
+              <a:buNone/>
               <a:defRPr sz="1275" b="1">
                 <a:solidFill>
                   <a:srgbClr val="007D83"/>
@@ -6618,7 +7511,7 @@
         <p:txBody>
           <a:bodyPr xmlns:a="http://schemas.openxmlformats.org/drawingml/2006/main"/>
           <a:lstStyle xmlns:a="http://schemas.openxmlformats.org/drawingml/2006/main">
-            <a:defPPr>
+            <a:defPPr algn="l">
               <a:defRPr sz="3300" b="1">
                 <a:solidFill>
                   <a:srgbClr val="203B4D"/>
@@ -6630,7 +7523,8 @@
             </a:defPPr>
           </a:lstStyle>
           <a:p xmlns:a="http://schemas.openxmlformats.org/drawingml/2006/main">
-            <a:pPr>
+            <a:pPr algn="l">
+              <a:buNone/>
               <a:defRPr sz="3300" b="1">
                 <a:solidFill>
                   <a:srgbClr val="203B4D"/>
@@ -6684,7 +7578,7 @@
         <p:txBody>
           <a:bodyPr xmlns:a="http://schemas.openxmlformats.org/drawingml/2006/main"/>
           <a:lstStyle xmlns:a="http://schemas.openxmlformats.org/drawingml/2006/main">
-            <a:defPPr>
+            <a:defPPr algn="l">
               <a:defRPr sz="2025" b="0">
                 <a:solidFill>
                   <a:srgbClr val="203B4D"/>
@@ -6696,7 +7590,8 @@
             </a:defPPr>
           </a:lstStyle>
           <a:p xmlns:a="http://schemas.openxmlformats.org/drawingml/2006/main">
-            <a:pPr>
+            <a:pPr algn="l">
+              <a:buNone/>
               <a:defRPr sz="2025" b="0">
                 <a:solidFill>
                   <a:srgbClr val="203B4D"/>
@@ -6719,7 +7614,8 @@
             </a:r>
           </a:p>
           <a:p xmlns:a="http://schemas.openxmlformats.org/drawingml/2006/main">
-            <a:pPr>
+            <a:pPr algn="l">
+              <a:buNone/>
               <a:defRPr sz="2025" b="0">
                 <a:solidFill>
                   <a:srgbClr val="203B4D"/>
@@ -6742,7 +7638,8 @@
             </a:r>
           </a:p>
           <a:p xmlns:a="http://schemas.openxmlformats.org/drawingml/2006/main">
-            <a:pPr>
+            <a:pPr algn="l">
+              <a:buNone/>
               <a:defRPr sz="2025" b="0">
                 <a:solidFill>
                   <a:srgbClr val="203B4D"/>
@@ -6796,7 +7693,7 @@
         <p:txBody>
           <a:bodyPr xmlns:a="http://schemas.openxmlformats.org/drawingml/2006/main"/>
           <a:lstStyle xmlns:a="http://schemas.openxmlformats.org/drawingml/2006/main">
-            <a:defPPr>
+            <a:defPPr algn="l">
               <a:defRPr sz="1875" b="0">
                 <a:solidFill>
                   <a:srgbClr val="087B80"/>
@@ -6808,7 +7705,8 @@
             </a:defPPr>
           </a:lstStyle>
           <a:p xmlns:a="http://schemas.openxmlformats.org/drawingml/2006/main">
-            <a:pPr>
+            <a:pPr algn="l">
+              <a:buNone/>
               <a:defRPr sz="1875" b="0">
                 <a:solidFill>
                   <a:srgbClr val="087B80"/>
@@ -6827,11 +7725,12 @@
                 <a:ea typeface="Consolas"/>
                 <a:cs typeface="Consolas"/>
               </a:rPr>
-              <a:t>const availableAssets = assets.filter(</a:t>
-            </a:r>
-          </a:p>
-          <a:p xmlns:a="http://schemas.openxmlformats.org/drawingml/2006/main">
-            <a:pPr>
+              <a:t>const inStockProducts = products.filter(</a:t>
+            </a:r>
+          </a:p>
+          <a:p xmlns:a="http://schemas.openxmlformats.org/drawingml/2006/main">
+            <a:pPr algn="l">
+              <a:buNone/>
               <a:defRPr sz="1875" b="0">
                 <a:solidFill>
                   <a:srgbClr val="087B80"/>
@@ -6850,11 +7749,12 @@
                 <a:ea typeface="Consolas"/>
                 <a:cs typeface="Consolas"/>
               </a:rPr>
-              <a:t>  asset =&gt; asset.status === 'Available'</a:t>
-            </a:r>
-          </a:p>
-          <a:p xmlns:a="http://schemas.openxmlformats.org/drawingml/2006/main">
-            <a:pPr>
+              <a:t>  product =&gt; product.inStock</a:t>
+            </a:r>
+          </a:p>
+          <a:p xmlns:a="http://schemas.openxmlformats.org/drawingml/2006/main">
+            <a:pPr algn="l">
+              <a:buNone/>
               <a:defRPr sz="1875" b="0">
                 <a:solidFill>
                   <a:srgbClr val="087B80"/>
@@ -6877,7 +7777,8 @@
             </a:r>
           </a:p>
           <a:p xmlns:a="http://schemas.openxmlformats.org/drawingml/2006/main">
-            <a:pPr>
+            <a:pPr algn="l">
+              <a:buNone/>
               <a:defRPr sz="1875" b="0">
                 <a:solidFill>
                   <a:srgbClr val="087B80"/>
@@ -6896,7 +7797,7 @@
                 <a:ea typeface="Consolas"/>
                 <a:cs typeface="Consolas"/>
               </a:rPr>
-              <a:t>// assets still contains the original collection</a:t>
+              <a:t>// products still holds the original collection</a:t>
             </a:r>
           </a:p>
         </p:txBody>
@@ -6931,7 +7832,7 @@
         <p:txBody>
           <a:bodyPr xmlns:a="http://schemas.openxmlformats.org/drawingml/2006/main"/>
           <a:lstStyle xmlns:a="http://schemas.openxmlformats.org/drawingml/2006/main">
-            <a:defPPr>
+            <a:defPPr algn="l">
               <a:defRPr sz="1725" b="1">
                 <a:solidFill>
                   <a:srgbClr val="85551E"/>
@@ -6943,7 +7844,8 @@
             </a:defPPr>
           </a:lstStyle>
           <a:p xmlns:a="http://schemas.openxmlformats.org/drawingml/2006/main">
-            <a:pPr>
+            <a:pPr algn="l">
+              <a:buNone/>
               <a:defRPr sz="1725" b="1">
                 <a:solidFill>
                   <a:srgbClr val="85551E"/>
@@ -6997,7 +7899,7 @@
         <p:txBody>
           <a:bodyPr xmlns:a="http://schemas.openxmlformats.org/drawingml/2006/main"/>
           <a:lstStyle xmlns:a="http://schemas.openxmlformats.org/drawingml/2006/main">
-            <a:defPPr>
+            <a:defPPr algn="l">
               <a:defRPr sz="1200" b="0">
                 <a:solidFill>
                   <a:srgbClr val="6B7F8D"/>
@@ -7009,7 +7911,8 @@
             </a:defPPr>
           </a:lstStyle>
           <a:p xmlns:a="http://schemas.openxmlformats.org/drawingml/2006/main">
-            <a:pPr>
+            <a:pPr algn="l">
+              <a:buNone/>
               <a:defRPr sz="1200" b="0">
                 <a:solidFill>
                   <a:srgbClr val="6B7F8D"/>
@@ -7092,7 +7995,7 @@
         <p:txBody>
           <a:bodyPr xmlns:a="http://schemas.openxmlformats.org/drawingml/2006/main"/>
           <a:lstStyle xmlns:a="http://schemas.openxmlformats.org/drawingml/2006/main">
-            <a:defPPr>
+            <a:defPPr algn="l">
               <a:defRPr sz="1275" b="1">
                 <a:solidFill>
                   <a:srgbClr val="007D83"/>
@@ -7104,7 +8007,8 @@
             </a:defPPr>
           </a:lstStyle>
           <a:p xmlns:a="http://schemas.openxmlformats.org/drawingml/2006/main">
-            <a:pPr>
+            <a:pPr algn="l">
+              <a:buNone/>
               <a:defRPr sz="1275" b="1">
                 <a:solidFill>
                   <a:srgbClr val="007D83"/>
@@ -7158,7 +8062,7 @@
         <p:txBody>
           <a:bodyPr xmlns:a="http://schemas.openxmlformats.org/drawingml/2006/main"/>
           <a:lstStyle xmlns:a="http://schemas.openxmlformats.org/drawingml/2006/main">
-            <a:defPPr>
+            <a:defPPr algn="l">
               <a:defRPr sz="3300" b="1">
                 <a:solidFill>
                   <a:srgbClr val="203B4D"/>
@@ -7170,7 +8074,8 @@
             </a:defPPr>
           </a:lstStyle>
           <a:p xmlns:a="http://schemas.openxmlformats.org/drawingml/2006/main">
-            <a:pPr>
+            <a:pPr algn="l">
+              <a:buNone/>
               <a:defRPr sz="3300" b="1">
                 <a:solidFill>
                   <a:srgbClr val="203B4D"/>
@@ -7224,7 +8129,7 @@
         <p:txBody>
           <a:bodyPr xmlns:a="http://schemas.openxmlformats.org/drawingml/2006/main"/>
           <a:lstStyle xmlns:a="http://schemas.openxmlformats.org/drawingml/2006/main">
-            <a:defPPr>
+            <a:defPPr algn="l">
               <a:defRPr sz="2025" b="0">
                 <a:solidFill>
                   <a:srgbClr val="203B4D"/>
@@ -7236,7 +8141,8 @@
             </a:defPPr>
           </a:lstStyle>
           <a:p xmlns:a="http://schemas.openxmlformats.org/drawingml/2006/main">
-            <a:pPr>
+            <a:pPr algn="l">
+              <a:buNone/>
               <a:defRPr sz="2025" b="0">
                 <a:solidFill>
                   <a:srgbClr val="203B4D"/>
@@ -7259,7 +8165,8 @@
             </a:r>
           </a:p>
           <a:p xmlns:a="http://schemas.openxmlformats.org/drawingml/2006/main">
-            <a:pPr>
+            <a:pPr algn="l">
+              <a:buNone/>
               <a:defRPr sz="2025" b="0">
                 <a:solidFill>
                   <a:srgbClr val="203B4D"/>
@@ -7282,7 +8189,8 @@
             </a:r>
           </a:p>
           <a:p xmlns:a="http://schemas.openxmlformats.org/drawingml/2006/main">
-            <a:pPr>
+            <a:pPr algn="l">
+              <a:buNone/>
               <a:defRPr sz="2025" b="0">
                 <a:solidFill>
                   <a:srgbClr val="203B4D"/>
@@ -7336,7 +8244,7 @@
         <p:txBody>
           <a:bodyPr xmlns:a="http://schemas.openxmlformats.org/drawingml/2006/main"/>
           <a:lstStyle xmlns:a="http://schemas.openxmlformats.org/drawingml/2006/main">
-            <a:defPPr>
+            <a:defPPr algn="l">
               <a:defRPr sz="1875" b="0">
                 <a:solidFill>
                   <a:srgbClr val="087B80"/>
@@ -7348,7 +8256,8 @@
             </a:defPPr>
           </a:lstStyle>
           <a:p xmlns:a="http://schemas.openxmlformats.org/drawingml/2006/main">
-            <a:pPr>
+            <a:pPr algn="l">
+              <a:buNone/>
               <a:defRPr sz="1875" b="0">
                 <a:solidFill>
                   <a:srgbClr val="087B80"/>
@@ -7371,7 +8280,8 @@
             </a:r>
           </a:p>
           <a:p xmlns:a="http://schemas.openxmlformats.org/drawingml/2006/main">
-            <a:pPr>
+            <a:pPr algn="l">
+              <a:buNone/>
               <a:defRPr sz="1875" b="0">
                 <a:solidFill>
                   <a:srgbClr val="087B80"/>
@@ -7394,7 +8304,8 @@
             </a:r>
           </a:p>
           <a:p xmlns:a="http://schemas.openxmlformats.org/drawingml/2006/main">
-            <a:pPr>
+            <a:pPr algn="l">
+              <a:buNone/>
               <a:defRPr sz="1875" b="0">
                 <a:solidFill>
                   <a:srgbClr val="087B80"/>
@@ -7417,7 +8328,8 @@
             </a:r>
           </a:p>
           <a:p xmlns:a="http://schemas.openxmlformats.org/drawingml/2006/main">
-            <a:pPr>
+            <a:pPr algn="l">
+              <a:buNone/>
               <a:defRPr sz="1875" b="0">
                 <a:solidFill>
                   <a:srgbClr val="087B80"/>
@@ -7440,7 +8352,8 @@
             </a:r>
           </a:p>
           <a:p xmlns:a="http://schemas.openxmlformats.org/drawingml/2006/main">
-            <a:pPr>
+            <a:pPr algn="l">
+              <a:buNone/>
               <a:defRPr sz="1875" b="0">
                 <a:solidFill>
                   <a:srgbClr val="087B80"/>
@@ -7463,7 +8376,8 @@
             </a:r>
           </a:p>
           <a:p xmlns:a="http://schemas.openxmlformats.org/drawingml/2006/main">
-            <a:pPr>
+            <a:pPr algn="l">
+              <a:buNone/>
               <a:defRPr sz="1875" b="0">
                 <a:solidFill>
                   <a:srgbClr val="087B80"/>
@@ -7486,7 +8400,8 @@
             </a:r>
           </a:p>
           <a:p xmlns:a="http://schemas.openxmlformats.org/drawingml/2006/main">
-            <a:pPr>
+            <a:pPr algn="l">
+              <a:buNone/>
               <a:defRPr sz="1875" b="0">
                 <a:solidFill>
                   <a:srgbClr val="087B80"/>
@@ -7509,7 +8424,8 @@
             </a:r>
           </a:p>
           <a:p xmlns:a="http://schemas.openxmlformats.org/drawingml/2006/main">
-            <a:pPr>
+            <a:pPr algn="l">
+              <a:buNone/>
               <a:defRPr sz="1875" b="0">
                 <a:solidFill>
                   <a:srgbClr val="087B80"/>
@@ -7563,7 +8479,7 @@
         <p:txBody>
           <a:bodyPr xmlns:a="http://schemas.openxmlformats.org/drawingml/2006/main"/>
           <a:lstStyle xmlns:a="http://schemas.openxmlformats.org/drawingml/2006/main">
-            <a:defPPr>
+            <a:defPPr algn="l">
               <a:defRPr sz="1725" b="1">
                 <a:solidFill>
                   <a:srgbClr val="85551E"/>
@@ -7575,7 +8491,8 @@
             </a:defPPr>
           </a:lstStyle>
           <a:p xmlns:a="http://schemas.openxmlformats.org/drawingml/2006/main">
-            <a:pPr>
+            <a:pPr algn="l">
+              <a:buNone/>
               <a:defRPr sz="1725" b="1">
                 <a:solidFill>
                   <a:srgbClr val="85551E"/>
@@ -7629,7 +8546,7 @@
         <p:txBody>
           <a:bodyPr xmlns:a="http://schemas.openxmlformats.org/drawingml/2006/main"/>
           <a:lstStyle xmlns:a="http://schemas.openxmlformats.org/drawingml/2006/main">
-            <a:defPPr>
+            <a:defPPr algn="l">
               <a:defRPr sz="1200" b="0">
                 <a:solidFill>
                   <a:srgbClr val="6B7F8D"/>
@@ -7641,7 +8558,8 @@
             </a:defPPr>
           </a:lstStyle>
           <a:p xmlns:a="http://schemas.openxmlformats.org/drawingml/2006/main">
-            <a:pPr>
+            <a:pPr algn="l">
+              <a:buNone/>
               <a:defRPr sz="1200" b="0">
                 <a:solidFill>
                   <a:srgbClr val="6B7F8D"/>
@@ -7724,7 +8642,7 @@
         <p:txBody>
           <a:bodyPr xmlns:a="http://schemas.openxmlformats.org/drawingml/2006/main"/>
           <a:lstStyle xmlns:a="http://schemas.openxmlformats.org/drawingml/2006/main">
-            <a:defPPr>
+            <a:defPPr algn="l">
               <a:defRPr sz="1275" b="1">
                 <a:solidFill>
                   <a:srgbClr val="007D83"/>
@@ -7736,7 +8654,8 @@
             </a:defPPr>
           </a:lstStyle>
           <a:p xmlns:a="http://schemas.openxmlformats.org/drawingml/2006/main">
-            <a:pPr>
+            <a:pPr algn="l">
+              <a:buNone/>
               <a:defRPr sz="1275" b="1">
                 <a:solidFill>
                   <a:srgbClr val="007D83"/>
@@ -7790,7 +8709,7 @@
         <p:txBody>
           <a:bodyPr xmlns:a="http://schemas.openxmlformats.org/drawingml/2006/main"/>
           <a:lstStyle xmlns:a="http://schemas.openxmlformats.org/drawingml/2006/main">
-            <a:defPPr>
+            <a:defPPr algn="l">
               <a:defRPr sz="3300" b="1">
                 <a:solidFill>
                   <a:srgbClr val="203B4D"/>
@@ -7802,7 +8721,8 @@
             </a:defPPr>
           </a:lstStyle>
           <a:p xmlns:a="http://schemas.openxmlformats.org/drawingml/2006/main">
-            <a:pPr>
+            <a:pPr algn="l">
+              <a:buNone/>
               <a:defRPr sz="3300" b="1">
                 <a:solidFill>
                   <a:srgbClr val="203B4D"/>
@@ -7856,7 +8776,7 @@
         <p:txBody>
           <a:bodyPr xmlns:a="http://schemas.openxmlformats.org/drawingml/2006/main"/>
           <a:lstStyle xmlns:a="http://schemas.openxmlformats.org/drawingml/2006/main">
-            <a:defPPr>
+            <a:defPPr algn="l">
               <a:defRPr sz="2025" b="0">
                 <a:solidFill>
                   <a:srgbClr val="203B4D"/>
@@ -7868,7 +8788,8 @@
             </a:defPPr>
           </a:lstStyle>
           <a:p xmlns:a="http://schemas.openxmlformats.org/drawingml/2006/main">
-            <a:pPr>
+            <a:pPr algn="l">
+              <a:buNone/>
               <a:defRPr sz="2025" b="0">
                 <a:solidFill>
                   <a:srgbClr val="203B4D"/>
@@ -7891,7 +8812,8 @@
             </a:r>
           </a:p>
           <a:p xmlns:a="http://schemas.openxmlformats.org/drawingml/2006/main">
-            <a:pPr>
+            <a:pPr algn="l">
+              <a:buNone/>
               <a:defRPr sz="2025" b="0">
                 <a:solidFill>
                   <a:srgbClr val="203B4D"/>
@@ -7945,7 +8867,7 @@
         <p:txBody>
           <a:bodyPr xmlns:a="http://schemas.openxmlformats.org/drawingml/2006/main"/>
           <a:lstStyle xmlns:a="http://schemas.openxmlformats.org/drawingml/2006/main">
-            <a:defPPr>
+            <a:defPPr algn="l">
               <a:defRPr sz="1875" b="0">
                 <a:solidFill>
                   <a:srgbClr val="087B80"/>
@@ -7957,7 +8879,8 @@
             </a:defPPr>
           </a:lstStyle>
           <a:p xmlns:a="http://schemas.openxmlformats.org/drawingml/2006/main">
-            <a:pPr>
+            <a:pPr algn="l">
+              <a:buNone/>
               <a:defRPr sz="1875" b="0">
                 <a:solidFill>
                   <a:srgbClr val="087B80"/>
@@ -7976,11 +8899,12 @@
                 <a:ea typeface="Consolas"/>
                 <a:cs typeface="Consolas"/>
               </a:rPr>
-              <a:t>&lt;Section title="Asset inventory"&gt;</a:t>
-            </a:r>
-          </a:p>
-          <a:p xmlns:a="http://schemas.openxmlformats.org/drawingml/2006/main">
-            <a:pPr>
+              <a:t>&lt;Section title="Shop products"&gt;</a:t>
+            </a:r>
+          </a:p>
+          <a:p xmlns:a="http://schemas.openxmlformats.org/drawingml/2006/main">
+            <a:pPr algn="l">
+              <a:buNone/>
               <a:defRPr sz="1875" b="0">
                 <a:solidFill>
                   <a:srgbClr val="087B80"/>
@@ -7999,11 +8923,12 @@
                 <a:ea typeface="Consolas"/>
                 <a:cs typeface="Consolas"/>
               </a:rPr>
-              <a:t>  &lt;AssetList assets={assets} /&gt;</a:t>
-            </a:r>
-          </a:p>
-          <a:p xmlns:a="http://schemas.openxmlformats.org/drawingml/2006/main">
-            <a:pPr>
+              <a:t>  &lt;ProductList products={products} /&gt;</a:t>
+            </a:r>
+          </a:p>
+          <a:p xmlns:a="http://schemas.openxmlformats.org/drawingml/2006/main">
+            <a:pPr algn="l">
+              <a:buNone/>
               <a:defRPr sz="1875" b="0">
                 <a:solidFill>
                   <a:srgbClr val="087B80"/>
@@ -8031,7 +8956,8 @@
             </a:r>
           </a:p>
           <a:p xmlns:a="http://schemas.openxmlformats.org/drawingml/2006/main">
-            <a:pPr>
+            <a:pPr algn="l">
+              <a:buNone/>
               <a:defRPr sz="1875" b="0">
                 <a:solidFill>
                   <a:srgbClr val="087B80"/>
@@ -8054,7 +8980,8 @@
             </a:r>
           </a:p>
           <a:p xmlns:a="http://schemas.openxmlformats.org/drawingml/2006/main">
-            <a:pPr>
+            <a:pPr algn="l">
+              <a:buNone/>
               <a:defRPr sz="1875" b="0">
                 <a:solidFill>
                   <a:srgbClr val="087B80"/>
@@ -8073,11 +9000,12 @@
                 <a:ea typeface="Consolas"/>
                 <a:cs typeface="Consolas"/>
               </a:rPr>
-              <a:t>  &lt;AssetList assets={[]} /&gt;</a:t>
-            </a:r>
-          </a:p>
-          <a:p xmlns:a="http://schemas.openxmlformats.org/drawingml/2006/main">
-            <a:pPr>
+              <a:t>  &lt;ProductList products={[]} /&gt;</a:t>
+            </a:r>
+          </a:p>
+          <a:p xmlns:a="http://schemas.openxmlformats.org/drawingml/2006/main">
+            <a:pPr algn="l">
+              <a:buNone/>
               <a:defRPr sz="1875" b="0">
                 <a:solidFill>
                   <a:srgbClr val="087B80"/>
@@ -8131,7 +9059,7 @@
         <p:txBody>
           <a:bodyPr xmlns:a="http://schemas.openxmlformats.org/drawingml/2006/main"/>
           <a:lstStyle xmlns:a="http://schemas.openxmlformats.org/drawingml/2006/main">
-            <a:defPPr>
+            <a:defPPr algn="l">
               <a:defRPr sz="1725" b="1">
                 <a:solidFill>
                   <a:srgbClr val="85551E"/>
@@ -8143,7 +9071,8 @@
             </a:defPPr>
           </a:lstStyle>
           <a:p xmlns:a="http://schemas.openxmlformats.org/drawingml/2006/main">
-            <a:pPr>
+            <a:pPr algn="l">
+              <a:buNone/>
               <a:defRPr sz="1725" b="1">
                 <a:solidFill>
                   <a:srgbClr val="85551E"/>
@@ -8197,7 +9126,7 @@
         <p:txBody>
           <a:bodyPr xmlns:a="http://schemas.openxmlformats.org/drawingml/2006/main"/>
           <a:lstStyle xmlns:a="http://schemas.openxmlformats.org/drawingml/2006/main">
-            <a:defPPr>
+            <a:defPPr algn="l">
               <a:defRPr sz="1200" b="0">
                 <a:solidFill>
                   <a:srgbClr val="6B7F8D"/>
@@ -8209,7 +9138,8 @@
             </a:defPPr>
           </a:lstStyle>
           <a:p xmlns:a="http://schemas.openxmlformats.org/drawingml/2006/main">
-            <a:pPr>
+            <a:pPr algn="l">
+              <a:buNone/>
               <a:defRPr sz="1200" b="0">
                 <a:solidFill>
                   <a:srgbClr val="6B7F8D"/>
@@ -8292,7 +9222,7 @@
         <p:txBody>
           <a:bodyPr xmlns:a="http://schemas.openxmlformats.org/drawingml/2006/main"/>
           <a:lstStyle xmlns:a="http://schemas.openxmlformats.org/drawingml/2006/main">
-            <a:defPPr>
+            <a:defPPr algn="l">
               <a:defRPr sz="1275" b="1">
                 <a:solidFill>
                   <a:srgbClr val="007D83"/>
@@ -8304,7 +9234,8 @@
             </a:defPPr>
           </a:lstStyle>
           <a:p xmlns:a="http://schemas.openxmlformats.org/drawingml/2006/main">
-            <a:pPr>
+            <a:pPr algn="l">
+              <a:buNone/>
               <a:defRPr sz="1275" b="1">
                 <a:solidFill>
                   <a:srgbClr val="007D83"/>
@@ -8358,7 +9289,7 @@
         <p:txBody>
           <a:bodyPr xmlns:a="http://schemas.openxmlformats.org/drawingml/2006/main"/>
           <a:lstStyle xmlns:a="http://schemas.openxmlformats.org/drawingml/2006/main">
-            <a:defPPr>
+            <a:defPPr algn="l">
               <a:defRPr sz="3300" b="1">
                 <a:solidFill>
                   <a:srgbClr val="203B4D"/>
@@ -8370,7 +9301,8 @@
             </a:defPPr>
           </a:lstStyle>
           <a:p xmlns:a="http://schemas.openxmlformats.org/drawingml/2006/main">
-            <a:pPr>
+            <a:pPr algn="l">
+              <a:buNone/>
               <a:defRPr sz="3300" b="1">
                 <a:solidFill>
                   <a:srgbClr val="203B4D"/>
@@ -8424,7 +9356,7 @@
         <p:txBody>
           <a:bodyPr xmlns:a="http://schemas.openxmlformats.org/drawingml/2006/main"/>
           <a:lstStyle xmlns:a="http://schemas.openxmlformats.org/drawingml/2006/main">
-            <a:defPPr>
+            <a:defPPr algn="l">
               <a:defRPr sz="2025" b="0">
                 <a:solidFill>
                   <a:srgbClr val="203B4D"/>
@@ -8436,7 +9368,8 @@
             </a:defPPr>
           </a:lstStyle>
           <a:p xmlns:a="http://schemas.openxmlformats.org/drawingml/2006/main">
-            <a:pPr>
+            <a:pPr algn="l">
+              <a:buNone/>
               <a:defRPr sz="2025" b="0">
                 <a:solidFill>
                   <a:srgbClr val="203B4D"/>
@@ -8459,7 +9392,8 @@
             </a:r>
           </a:p>
           <a:p xmlns:a="http://schemas.openxmlformats.org/drawingml/2006/main">
-            <a:pPr>
+            <a:pPr algn="l">
+              <a:buNone/>
               <a:defRPr sz="2025" b="0">
                 <a:solidFill>
                   <a:srgbClr val="203B4D"/>
@@ -8513,7 +9447,7 @@
         <p:txBody>
           <a:bodyPr xmlns:a="http://schemas.openxmlformats.org/drawingml/2006/main"/>
           <a:lstStyle xmlns:a="http://schemas.openxmlformats.org/drawingml/2006/main">
-            <a:defPPr>
+            <a:defPPr algn="l">
               <a:defRPr sz="1875" b="0">
                 <a:solidFill>
                   <a:srgbClr val="087B80"/>
@@ -8525,7 +9459,8 @@
             </a:defPPr>
           </a:lstStyle>
           <a:p xmlns:a="http://schemas.openxmlformats.org/drawingml/2006/main">
-            <a:pPr>
+            <a:pPr algn="l">
+              <a:buNone/>
               <a:defRPr sz="1875" b="0">
                 <a:solidFill>
                   <a:srgbClr val="087B80"/>
@@ -8544,11 +9479,12 @@
                 <a:ea typeface="Consolas"/>
                 <a:cs typeface="Consolas"/>
               </a:rPr>
-              <a:t>function AssetList({ assets = [] }) {</a:t>
-            </a:r>
-          </a:p>
-          <a:p xmlns:a="http://schemas.openxmlformats.org/drawingml/2006/main">
-            <a:pPr>
+              <a:t>function ProductList({ products = [] }) {</a:t>
+            </a:r>
+          </a:p>
+          <a:p xmlns:a="http://schemas.openxmlformats.org/drawingml/2006/main">
+            <a:pPr algn="l">
+              <a:buNone/>
               <a:defRPr sz="1875" b="0">
                 <a:solidFill>
                   <a:srgbClr val="087B80"/>
@@ -8567,11 +9503,12 @@
                 <a:ea typeface="Consolas"/>
                 <a:cs typeface="Consolas"/>
               </a:rPr>
-              <a:t>  if (assets.length === 0) {</a:t>
-            </a:r>
-          </a:p>
-          <a:p xmlns:a="http://schemas.openxmlformats.org/drawingml/2006/main">
-            <a:pPr>
+              <a:t>  if (products.length === 0) {</a:t>
+            </a:r>
+          </a:p>
+          <a:p xmlns:a="http://schemas.openxmlformats.org/drawingml/2006/main">
+            <a:pPr algn="l">
+              <a:buNone/>
               <a:defRPr sz="1875" b="0">
                 <a:solidFill>
                   <a:srgbClr val="087B80"/>
@@ -8590,11 +9527,12 @@
                 <a:ea typeface="Consolas"/>
                 <a:cs typeface="Consolas"/>
               </a:rPr>
-              <a:t>    return &lt;p&gt;No assets to display.&lt;/p&gt;;</a:t>
-            </a:r>
-          </a:p>
-          <a:p xmlns:a="http://schemas.openxmlformats.org/drawingml/2006/main">
-            <a:pPr>
+              <a:t>    return &lt;p&gt;No products to display.&lt;/p&gt;;</a:t>
+            </a:r>
+          </a:p>
+          <a:p xmlns:a="http://schemas.openxmlformats.org/drawingml/2006/main">
+            <a:pPr algn="l">
+              <a:buNone/>
               <a:defRPr sz="1875" b="0">
                 <a:solidFill>
                   <a:srgbClr val="087B80"/>
@@ -8617,7 +9555,8 @@
             </a:r>
           </a:p>
           <a:p xmlns:a="http://schemas.openxmlformats.org/drawingml/2006/main">
-            <a:pPr>
+            <a:pPr algn="l">
+              <a:buNone/>
               <a:defRPr sz="1875" b="0">
                 <a:solidFill>
                   <a:srgbClr val="087B80"/>
@@ -8636,11 +9575,12 @@
                 <a:ea typeface="Consolas"/>
                 <a:cs typeface="Consolas"/>
               </a:rPr>
-              <a:t>  return &lt;div&gt;{/* asset cards */}&lt;/div&gt;;</a:t>
-            </a:r>
-          </a:p>
-          <a:p xmlns:a="http://schemas.openxmlformats.org/drawingml/2006/main">
-            <a:pPr>
+              <a:t>  return &lt;div&gt;{/* product cards */}&lt;/div&gt;;</a:t>
+            </a:r>
+          </a:p>
+          <a:p xmlns:a="http://schemas.openxmlformats.org/drawingml/2006/main">
+            <a:pPr algn="l">
+              <a:buNone/>
               <a:defRPr sz="1875" b="0">
                 <a:solidFill>
                   <a:srgbClr val="087B80"/>
@@ -8694,7 +9634,7 @@
         <p:txBody>
           <a:bodyPr xmlns:a="http://schemas.openxmlformats.org/drawingml/2006/main"/>
           <a:lstStyle xmlns:a="http://schemas.openxmlformats.org/drawingml/2006/main">
-            <a:defPPr>
+            <a:defPPr algn="l">
               <a:defRPr sz="1725" b="1">
                 <a:solidFill>
                   <a:srgbClr val="85551E"/>
@@ -8706,7 +9646,8 @@
             </a:defPPr>
           </a:lstStyle>
           <a:p xmlns:a="http://schemas.openxmlformats.org/drawingml/2006/main">
-            <a:pPr>
+            <a:pPr algn="l">
+              <a:buNone/>
               <a:defRPr sz="1725" b="1">
                 <a:solidFill>
                   <a:srgbClr val="85551E"/>
@@ -8760,7 +9701,7 @@
         <p:txBody>
           <a:bodyPr xmlns:a="http://schemas.openxmlformats.org/drawingml/2006/main"/>
           <a:lstStyle xmlns:a="http://schemas.openxmlformats.org/drawingml/2006/main">
-            <a:defPPr>
+            <a:defPPr algn="l">
               <a:defRPr sz="1200" b="0">
                 <a:solidFill>
                   <a:srgbClr val="6B7F8D"/>
@@ -8772,7 +9713,8 @@
             </a:defPPr>
           </a:lstStyle>
           <a:p xmlns:a="http://schemas.openxmlformats.org/drawingml/2006/main">
-            <a:pPr>
+            <a:pPr algn="l">
+              <a:buNone/>
               <a:defRPr sz="1200" b="0">
                 <a:solidFill>
                   <a:srgbClr val="6B7F8D"/>
@@ -8855,7 +9797,7 @@
         <p:txBody>
           <a:bodyPr xmlns:a="http://schemas.openxmlformats.org/drawingml/2006/main"/>
           <a:lstStyle xmlns:a="http://schemas.openxmlformats.org/drawingml/2006/main">
-            <a:defPPr>
+            <a:defPPr algn="l">
               <a:defRPr sz="1275" b="1">
                 <a:solidFill>
                   <a:srgbClr val="007D83"/>
@@ -8867,7 +9809,8 @@
             </a:defPPr>
           </a:lstStyle>
           <a:p xmlns:a="http://schemas.openxmlformats.org/drawingml/2006/main">
-            <a:pPr>
+            <a:pPr algn="l">
+              <a:buNone/>
               <a:defRPr sz="1275" b="1">
                 <a:solidFill>
                   <a:srgbClr val="007D83"/>
@@ -8921,7 +9864,7 @@
         <p:txBody>
           <a:bodyPr xmlns:a="http://schemas.openxmlformats.org/drawingml/2006/main"/>
           <a:lstStyle xmlns:a="http://schemas.openxmlformats.org/drawingml/2006/main">
-            <a:defPPr>
+            <a:defPPr algn="l">
               <a:defRPr sz="3300" b="1">
                 <a:solidFill>
                   <a:srgbClr val="203B4D"/>
@@ -8933,7 +9876,8 @@
             </a:defPPr>
           </a:lstStyle>
           <a:p xmlns:a="http://schemas.openxmlformats.org/drawingml/2006/main">
-            <a:pPr>
+            <a:pPr algn="l">
+              <a:buNone/>
               <a:defRPr sz="3300" b="1">
                 <a:solidFill>
                   <a:srgbClr val="203B4D"/>
@@ -8987,7 +9931,7 @@
         <p:txBody>
           <a:bodyPr xmlns:a="http://schemas.openxmlformats.org/drawingml/2006/main"/>
           <a:lstStyle xmlns:a="http://schemas.openxmlformats.org/drawingml/2006/main">
-            <a:defPPr>
+            <a:defPPr algn="l">
               <a:defRPr sz="2025" b="0">
                 <a:solidFill>
                   <a:srgbClr val="203B4D"/>
@@ -8999,7 +9943,8 @@
             </a:defPPr>
           </a:lstStyle>
           <a:p xmlns:a="http://schemas.openxmlformats.org/drawingml/2006/main">
-            <a:pPr>
+            <a:pPr algn="l">
+              <a:buNone/>
               <a:defRPr sz="2025" b="0">
                 <a:solidFill>
                   <a:srgbClr val="203B4D"/>
@@ -9022,7 +9967,8 @@
             </a:r>
           </a:p>
           <a:p xmlns:a="http://schemas.openxmlformats.org/drawingml/2006/main">
-            <a:pPr>
+            <a:pPr algn="l">
+              <a:buNone/>
               <a:defRPr sz="2025" b="0">
                 <a:solidFill>
                   <a:srgbClr val="203B4D"/>
@@ -9045,7 +9991,8 @@
             </a:r>
           </a:p>
           <a:p xmlns:a="http://schemas.openxmlformats.org/drawingml/2006/main">
-            <a:pPr>
+            <a:pPr algn="l">
+              <a:buNone/>
               <a:defRPr sz="2025" b="0">
                 <a:solidFill>
                   <a:srgbClr val="203B4D"/>
@@ -9099,7 +10046,7 @@
         <p:txBody>
           <a:bodyPr xmlns:a="http://schemas.openxmlformats.org/drawingml/2006/main"/>
           <a:lstStyle xmlns:a="http://schemas.openxmlformats.org/drawingml/2006/main">
-            <a:defPPr>
+            <a:defPPr algn="l">
               <a:defRPr sz="1875" b="0">
                 <a:solidFill>
                   <a:srgbClr val="087B80"/>
@@ -9111,7 +10058,8 @@
             </a:defPPr>
           </a:lstStyle>
           <a:p xmlns:a="http://schemas.openxmlformats.org/drawingml/2006/main">
-            <a:pPr>
+            <a:pPr algn="l">
+              <a:buNone/>
               <a:defRPr sz="1875" b="0">
                 <a:solidFill>
                   <a:srgbClr val="087B80"/>
@@ -9134,7 +10082,8 @@
             </a:r>
           </a:p>
           <a:p xmlns:a="http://schemas.openxmlformats.org/drawingml/2006/main">
-            <a:pPr>
+            <a:pPr algn="l">
+              <a:buNone/>
               <a:defRPr sz="1875" b="0">
                 <a:solidFill>
                   <a:srgbClr val="087B80"/>
@@ -9153,11 +10102,12 @@
                 <a:ea typeface="Consolas"/>
                 <a:cs typeface="Consolas"/>
               </a:rPr>
-              <a:t>  {asset.status === 'Available'</a:t>
-            </a:r>
-          </a:p>
-          <a:p xmlns:a="http://schemas.openxmlformats.org/drawingml/2006/main">
-            <a:pPr>
+              <a:t>  {product.inStock</a:t>
+            </a:r>
+          </a:p>
+          <a:p xmlns:a="http://schemas.openxmlformats.org/drawingml/2006/main">
+            <a:pPr algn="l">
+              <a:buNone/>
               <a:defRPr sz="1875" b="0">
                 <a:solidFill>
                   <a:srgbClr val="087B80"/>
@@ -9176,11 +10126,12 @@
                 <a:ea typeface="Consolas"/>
                 <a:cs typeface="Consolas"/>
               </a:rPr>
-              <a:t>    ? 'Ready to allocate'</a:t>
-            </a:r>
-          </a:p>
-          <a:p xmlns:a="http://schemas.openxmlformats.org/drawingml/2006/main">
-            <a:pPr>
+              <a:t>    ? 'Ready to order'</a:t>
+            </a:r>
+          </a:p>
+          <a:p xmlns:a="http://schemas.openxmlformats.org/drawingml/2006/main">
+            <a:pPr algn="l">
+              <a:buNone/>
               <a:defRPr sz="1875" b="0">
                 <a:solidFill>
                   <a:srgbClr val="087B80"/>
@@ -9199,11 +10150,12 @@
                 <a:ea typeface="Consolas"/>
                 <a:cs typeface="Consolas"/>
               </a:rPr>
-              <a:t>    : 'Currently in use'}</a:t>
-            </a:r>
-          </a:p>
-          <a:p xmlns:a="http://schemas.openxmlformats.org/drawingml/2006/main">
-            <a:pPr>
+              <a:t>    : 'Currently unavailable'}</a:t>
+            </a:r>
+          </a:p>
+          <a:p xmlns:a="http://schemas.openxmlformats.org/drawingml/2006/main">
+            <a:pPr algn="l">
+              <a:buNone/>
               <a:defRPr sz="1875" b="0">
                 <a:solidFill>
                   <a:srgbClr val="087B80"/>
@@ -9257,7 +10209,7 @@
         <p:txBody>
           <a:bodyPr xmlns:a="http://schemas.openxmlformats.org/drawingml/2006/main"/>
           <a:lstStyle xmlns:a="http://schemas.openxmlformats.org/drawingml/2006/main">
-            <a:defPPr>
+            <a:defPPr algn="l">
               <a:defRPr sz="1725" b="1">
                 <a:solidFill>
                   <a:srgbClr val="85551E"/>
@@ -9269,7 +10221,8 @@
             </a:defPPr>
           </a:lstStyle>
           <a:p xmlns:a="http://schemas.openxmlformats.org/drawingml/2006/main">
-            <a:pPr>
+            <a:pPr algn="l">
+              <a:buNone/>
               <a:defRPr sz="1725" b="1">
                 <a:solidFill>
                   <a:srgbClr val="85551E"/>
@@ -9288,7 +10241,7 @@
                 <a:ea typeface="Arial"/>
                 <a:cs typeface="Arial"/>
               </a:rPr>
-              <a:t>Assigned assets display Currently in use</a:t>
+              <a:t>Out of stock products show Currently unavailable</a:t>
             </a:r>
           </a:p>
         </p:txBody>
@@ -9323,7 +10276,7 @@
         <p:txBody>
           <a:bodyPr xmlns:a="http://schemas.openxmlformats.org/drawingml/2006/main"/>
           <a:lstStyle xmlns:a="http://schemas.openxmlformats.org/drawingml/2006/main">
-            <a:defPPr>
+            <a:defPPr algn="l">
               <a:defRPr sz="1200" b="0">
                 <a:solidFill>
                   <a:srgbClr val="6B7F8D"/>
@@ -9335,7 +10288,8 @@
             </a:defPPr>
           </a:lstStyle>
           <a:p xmlns:a="http://schemas.openxmlformats.org/drawingml/2006/main">
-            <a:pPr>
+            <a:pPr algn="l">
+              <a:buNone/>
               <a:defRPr sz="1200" b="0">
                 <a:solidFill>
                   <a:srgbClr val="6B7F8D"/>
@@ -9418,7 +10372,7 @@
         <p:txBody>
           <a:bodyPr xmlns:a="http://schemas.openxmlformats.org/drawingml/2006/main"/>
           <a:lstStyle xmlns:a="http://schemas.openxmlformats.org/drawingml/2006/main">
-            <a:defPPr>
+            <a:defPPr algn="l">
               <a:defRPr sz="1275" b="1">
                 <a:solidFill>
                   <a:srgbClr val="007D83"/>
@@ -9430,7 +10384,8 @@
             </a:defPPr>
           </a:lstStyle>
           <a:p xmlns:a="http://schemas.openxmlformats.org/drawingml/2006/main">
-            <a:pPr>
+            <a:pPr algn="l">
+              <a:buNone/>
               <a:defRPr sz="1275" b="1">
                 <a:solidFill>
                   <a:srgbClr val="007D83"/>
@@ -9484,7 +10439,7 @@
         <p:txBody>
           <a:bodyPr xmlns:a="http://schemas.openxmlformats.org/drawingml/2006/main"/>
           <a:lstStyle xmlns:a="http://schemas.openxmlformats.org/drawingml/2006/main">
-            <a:defPPr>
+            <a:defPPr algn="l">
               <a:defRPr sz="3300" b="1">
                 <a:solidFill>
                   <a:srgbClr val="203B4D"/>
@@ -9496,7 +10451,8 @@
             </a:defPPr>
           </a:lstStyle>
           <a:p xmlns:a="http://schemas.openxmlformats.org/drawingml/2006/main">
-            <a:pPr>
+            <a:pPr algn="l">
+              <a:buNone/>
               <a:defRPr sz="3300" b="1">
                 <a:solidFill>
                   <a:srgbClr val="203B4D"/>
@@ -9550,7 +10506,7 @@
         <p:txBody>
           <a:bodyPr xmlns:a="http://schemas.openxmlformats.org/drawingml/2006/main"/>
           <a:lstStyle xmlns:a="http://schemas.openxmlformats.org/drawingml/2006/main">
-            <a:defPPr>
+            <a:defPPr algn="l">
               <a:defRPr sz="2025" b="0">
                 <a:solidFill>
                   <a:srgbClr val="203B4D"/>
@@ -9562,7 +10518,8 @@
             </a:defPPr>
           </a:lstStyle>
           <a:p xmlns:a="http://schemas.openxmlformats.org/drawingml/2006/main">
-            <a:pPr>
+            <a:pPr algn="l">
+              <a:buNone/>
               <a:defRPr sz="2025" b="0">
                 <a:solidFill>
                   <a:srgbClr val="203B4D"/>
@@ -9585,7 +10542,8 @@
             </a:r>
           </a:p>
           <a:p xmlns:a="http://schemas.openxmlformats.org/drawingml/2006/main">
-            <a:pPr>
+            <a:pPr algn="l">
+              <a:buNone/>
               <a:defRPr sz="2025" b="0">
                 <a:solidFill>
                   <a:srgbClr val="203B4D"/>
@@ -9608,7 +10566,8 @@
             </a:r>
           </a:p>
           <a:p xmlns:a="http://schemas.openxmlformats.org/drawingml/2006/main">
-            <a:pPr>
+            <a:pPr algn="l">
+              <a:buNone/>
               <a:defRPr sz="2025" b="0">
                 <a:solidFill>
                   <a:srgbClr val="203B4D"/>
@@ -9662,7 +10621,7 @@
         <p:txBody>
           <a:bodyPr xmlns:a="http://schemas.openxmlformats.org/drawingml/2006/main"/>
           <a:lstStyle xmlns:a="http://schemas.openxmlformats.org/drawingml/2006/main">
-            <a:defPPr>
+            <a:defPPr algn="l">
               <a:defRPr sz="1875" b="0">
                 <a:solidFill>
                   <a:srgbClr val="087B80"/>
@@ -9674,7 +10633,8 @@
             </a:defPPr>
           </a:lstStyle>
           <a:p xmlns:a="http://schemas.openxmlformats.org/drawingml/2006/main">
-            <a:pPr>
+            <a:pPr algn="l">
+              <a:buNone/>
               <a:defRPr sz="1875" b="0">
                 <a:solidFill>
                   <a:srgbClr val="087B80"/>
@@ -9693,11 +10653,12 @@
                 <a:ea typeface="Consolas"/>
                 <a:cs typeface="Consolas"/>
               </a:rPr>
-              <a:t>{showLocation &amp;&amp; (</a:t>
-            </a:r>
-          </a:p>
-          <a:p xmlns:a="http://schemas.openxmlformats.org/drawingml/2006/main">
-            <a:pPr>
+              <a:t>{showCategory &amp;&amp; (</a:t>
+            </a:r>
+          </a:p>
+          <a:p xmlns:a="http://schemas.openxmlformats.org/drawingml/2006/main">
+            <a:pPr algn="l">
+              <a:buNone/>
               <a:defRPr sz="1875" b="0">
                 <a:solidFill>
                   <a:srgbClr val="087B80"/>
@@ -9716,11 +10677,12 @@
                 <a:ea typeface="Consolas"/>
                 <a:cs typeface="Consolas"/>
               </a:rPr>
-              <a:t>  &lt;p&gt;Location: {asset.location}&lt;/p&gt;</a:t>
-            </a:r>
-          </a:p>
-          <a:p xmlns:a="http://schemas.openxmlformats.org/drawingml/2006/main">
-            <a:pPr>
+              <a:t>  &lt;p&gt;Category: {product.category}&lt;/p&gt;</a:t>
+            </a:r>
+          </a:p>
+          <a:p xmlns:a="http://schemas.openxmlformats.org/drawingml/2006/main">
+            <a:pPr algn="l">
+              <a:buNone/>
               <a:defRPr sz="1875" b="0">
                 <a:solidFill>
                   <a:srgbClr val="087B80"/>
@@ -9774,7 +10736,7 @@
         <p:txBody>
           <a:bodyPr xmlns:a="http://schemas.openxmlformats.org/drawingml/2006/main"/>
           <a:lstStyle xmlns:a="http://schemas.openxmlformats.org/drawingml/2006/main">
-            <a:defPPr>
+            <a:defPPr algn="l">
               <a:defRPr sz="1725" b="1">
                 <a:solidFill>
                   <a:srgbClr val="85551E"/>
@@ -9786,7 +10748,8 @@
             </a:defPPr>
           </a:lstStyle>
           <a:p xmlns:a="http://schemas.openxmlformats.org/drawingml/2006/main">
-            <a:pPr>
+            <a:pPr algn="l">
+              <a:buNone/>
               <a:defRPr sz="1725" b="1">
                 <a:solidFill>
                   <a:srgbClr val="85551E"/>
@@ -9805,7 +10768,7 @@
                 <a:ea typeface="Arial"/>
                 <a:cs typeface="Arial"/>
               </a:rPr>
-              <a:t>showLocation={false} hides the paragraph</a:t>
+              <a:t>showCategory={false} hides the paragraph</a:t>
             </a:r>
           </a:p>
         </p:txBody>
@@ -9840,7 +10803,7 @@
         <p:txBody>
           <a:bodyPr xmlns:a="http://schemas.openxmlformats.org/drawingml/2006/main"/>
           <a:lstStyle xmlns:a="http://schemas.openxmlformats.org/drawingml/2006/main">
-            <a:defPPr>
+            <a:defPPr algn="l">
               <a:defRPr sz="1200" b="0">
                 <a:solidFill>
                   <a:srgbClr val="6B7F8D"/>
@@ -9852,7 +10815,8 @@
             </a:defPPr>
           </a:lstStyle>
           <a:p xmlns:a="http://schemas.openxmlformats.org/drawingml/2006/main">
-            <a:pPr>
+            <a:pPr algn="l">
+              <a:buNone/>
               <a:defRPr sz="1200" b="0">
                 <a:solidFill>
                   <a:srgbClr val="6B7F8D"/>
@@ -9935,7 +10899,7 @@
         <p:txBody>
           <a:bodyPr xmlns:a="http://schemas.openxmlformats.org/drawingml/2006/main"/>
           <a:lstStyle xmlns:a="http://schemas.openxmlformats.org/drawingml/2006/main">
-            <a:defPPr>
+            <a:defPPr algn="l">
               <a:defRPr sz="1275" b="1">
                 <a:solidFill>
                   <a:srgbClr val="007D83"/>
@@ -9947,7 +10911,8 @@
             </a:defPPr>
           </a:lstStyle>
           <a:p xmlns:a="http://schemas.openxmlformats.org/drawingml/2006/main">
-            <a:pPr>
+            <a:pPr algn="l">
+              <a:buNone/>
               <a:defRPr sz="1275" b="1">
                 <a:solidFill>
                   <a:srgbClr val="007D83"/>
@@ -10001,7 +10966,7 @@
         <p:txBody>
           <a:bodyPr xmlns:a="http://schemas.openxmlformats.org/drawingml/2006/main"/>
           <a:lstStyle xmlns:a="http://schemas.openxmlformats.org/drawingml/2006/main">
-            <a:defPPr>
+            <a:defPPr algn="l">
               <a:defRPr sz="3300" b="1">
                 <a:solidFill>
                   <a:srgbClr val="203B4D"/>
@@ -10013,7 +10978,8 @@
             </a:defPPr>
           </a:lstStyle>
           <a:p xmlns:a="http://schemas.openxmlformats.org/drawingml/2006/main">
-            <a:pPr>
+            <a:pPr algn="l">
+              <a:buNone/>
               <a:defRPr sz="3300" b="1">
                 <a:solidFill>
                   <a:srgbClr val="203B4D"/>
@@ -10067,7 +11033,7 @@
         <p:txBody>
           <a:bodyPr xmlns:a="http://schemas.openxmlformats.org/drawingml/2006/main"/>
           <a:lstStyle xmlns:a="http://schemas.openxmlformats.org/drawingml/2006/main">
-            <a:defPPr>
+            <a:defPPr algn="l">
               <a:defRPr sz="2025" b="0">
                 <a:solidFill>
                   <a:srgbClr val="203B4D"/>
@@ -10079,7 +11045,8 @@
             </a:defPPr>
           </a:lstStyle>
           <a:p xmlns:a="http://schemas.openxmlformats.org/drawingml/2006/main">
-            <a:pPr>
+            <a:pPr algn="l">
+              <a:buNone/>
               <a:defRPr sz="2025" b="0">
                 <a:solidFill>
                   <a:srgbClr val="203B4D"/>
@@ -10102,7 +11069,8 @@
             </a:r>
           </a:p>
           <a:p xmlns:a="http://schemas.openxmlformats.org/drawingml/2006/main">
-            <a:pPr>
+            <a:pPr algn="l">
+              <a:buNone/>
               <a:defRPr sz="2025" b="0">
                 <a:solidFill>
                   <a:srgbClr val="203B4D"/>
@@ -10156,7 +11124,7 @@
         <p:txBody>
           <a:bodyPr xmlns:a="http://schemas.openxmlformats.org/drawingml/2006/main"/>
           <a:lstStyle xmlns:a="http://schemas.openxmlformats.org/drawingml/2006/main">
-            <a:defPPr>
+            <a:defPPr algn="l">
               <a:defRPr sz="1875" b="0">
                 <a:solidFill>
                   <a:srgbClr val="087B80"/>
@@ -10168,7 +11136,8 @@
             </a:defPPr>
           </a:lstStyle>
           <a:p xmlns:a="http://schemas.openxmlformats.org/drawingml/2006/main">
-            <a:pPr>
+            <a:pPr algn="l">
+              <a:buNone/>
               <a:defRPr sz="1875" b="0">
                 <a:solidFill>
                   <a:srgbClr val="087B80"/>
@@ -10191,7 +11160,8 @@
             </a:r>
           </a:p>
           <a:p xmlns:a="http://schemas.openxmlformats.org/drawingml/2006/main">
-            <a:pPr>
+            <a:pPr algn="l">
+              <a:buNone/>
               <a:defRPr sz="1875" b="0">
                 <a:solidFill>
                   <a:srgbClr val="087B80"/>
@@ -10210,7 +11180,7 @@
                 <a:ea typeface="Consolas"/>
                 <a:cs typeface="Consolas"/>
               </a:rPr>
-              <a:t>{count &amp;&amp; &lt;p&gt;Assets found&lt;/p&gt;}</a:t>
+              <a:t>{count &amp;&amp; &lt;p&gt;Products found&lt;/p&gt;}</a:t>
             </a:r>
           </a:p>
           <a:p xmlns:a="http://schemas.openxmlformats.org/drawingml/2006/main">
@@ -10219,7 +11189,8 @@
             </a:r>
           </a:p>
           <a:p xmlns:a="http://schemas.openxmlformats.org/drawingml/2006/main">
-            <a:pPr>
+            <a:pPr algn="l">
+              <a:buNone/>
               <a:defRPr sz="1875" b="0">
                 <a:solidFill>
                   <a:srgbClr val="087B80"/>
@@ -10242,7 +11213,8 @@
             </a:r>
           </a:p>
           <a:p xmlns:a="http://schemas.openxmlformats.org/drawingml/2006/main">
-            <a:pPr>
+            <a:pPr algn="l">
+              <a:buNone/>
               <a:defRPr sz="1875" b="0">
                 <a:solidFill>
                   <a:srgbClr val="087B80"/>
@@ -10261,7 +11233,7 @@
                 <a:ea typeface="Consolas"/>
                 <a:cs typeface="Consolas"/>
               </a:rPr>
-              <a:t>{count &gt; 0 &amp;&amp; &lt;p&gt;Assets found&lt;/p&gt;}</a:t>
+              <a:t>{count &gt; 0 &amp;&amp; &lt;p&gt;Products found&lt;/p&gt;}</a:t>
             </a:r>
           </a:p>
         </p:txBody>
@@ -10296,7 +11268,7 @@
         <p:txBody>
           <a:bodyPr xmlns:a="http://schemas.openxmlformats.org/drawingml/2006/main"/>
           <a:lstStyle xmlns:a="http://schemas.openxmlformats.org/drawingml/2006/main">
-            <a:defPPr>
+            <a:defPPr algn="l">
               <a:defRPr sz="1725" b="1">
                 <a:solidFill>
                   <a:srgbClr val="85551E"/>
@@ -10308,7 +11280,8 @@
             </a:defPPr>
           </a:lstStyle>
           <a:p xmlns:a="http://schemas.openxmlformats.org/drawingml/2006/main">
-            <a:pPr>
+            <a:pPr algn="l">
+              <a:buNone/>
               <a:defRPr sz="1725" b="1">
                 <a:solidFill>
                   <a:srgbClr val="85551E"/>
@@ -10362,7 +11335,7 @@
         <p:txBody>
           <a:bodyPr xmlns:a="http://schemas.openxmlformats.org/drawingml/2006/main"/>
           <a:lstStyle xmlns:a="http://schemas.openxmlformats.org/drawingml/2006/main">
-            <a:defPPr>
+            <a:defPPr algn="l">
               <a:defRPr sz="1200" b="0">
                 <a:solidFill>
                   <a:srgbClr val="6B7F8D"/>
@@ -10374,7 +11347,8 @@
             </a:defPPr>
           </a:lstStyle>
           <a:p xmlns:a="http://schemas.openxmlformats.org/drawingml/2006/main">
-            <a:pPr>
+            <a:pPr algn="l">
+              <a:buNone/>
               <a:defRPr sz="1200" b="0">
                 <a:solidFill>
                   <a:srgbClr val="6B7F8D"/>
@@ -10457,7 +11431,7 @@
         <p:txBody>
           <a:bodyPr xmlns:a="http://schemas.openxmlformats.org/drawingml/2006/main"/>
           <a:lstStyle xmlns:a="http://schemas.openxmlformats.org/drawingml/2006/main">
-            <a:defPPr>
+            <a:defPPr algn="l">
               <a:defRPr sz="1275" b="1">
                 <a:solidFill>
                   <a:srgbClr val="007D83"/>
@@ -10469,7 +11443,8 @@
             </a:defPPr>
           </a:lstStyle>
           <a:p xmlns:a="http://schemas.openxmlformats.org/drawingml/2006/main">
-            <a:pPr>
+            <a:pPr algn="l">
+              <a:buNone/>
               <a:defRPr sz="1275" b="1">
                 <a:solidFill>
                   <a:srgbClr val="007D83"/>
@@ -10523,7 +11498,7 @@
         <p:txBody>
           <a:bodyPr xmlns:a="http://schemas.openxmlformats.org/drawingml/2006/main"/>
           <a:lstStyle xmlns:a="http://schemas.openxmlformats.org/drawingml/2006/main">
-            <a:defPPr>
+            <a:defPPr algn="l">
               <a:defRPr sz="3300" b="1">
                 <a:solidFill>
                   <a:srgbClr val="203B4D"/>
@@ -10535,7 +11510,8 @@
             </a:defPPr>
           </a:lstStyle>
           <a:p xmlns:a="http://schemas.openxmlformats.org/drawingml/2006/main">
-            <a:pPr>
+            <a:pPr algn="l">
+              <a:buNone/>
               <a:defRPr sz="3300" b="1">
                 <a:solidFill>
                   <a:srgbClr val="203B4D"/>
@@ -10554,7 +11530,7 @@
                 <a:ea typeface="Arial"/>
                 <a:cs typeface="Arial"/>
               </a:rPr>
-              <a:t>map returns one element per asset</a:t>
+              <a:t>map returns one element per product</a:t>
             </a:r>
           </a:p>
         </p:txBody>
@@ -10589,7 +11565,7 @@
         <p:txBody>
           <a:bodyPr xmlns:a="http://schemas.openxmlformats.org/drawingml/2006/main"/>
           <a:lstStyle xmlns:a="http://schemas.openxmlformats.org/drawingml/2006/main">
-            <a:defPPr>
+            <a:defPPr algn="l">
               <a:defRPr sz="2025" b="0">
                 <a:solidFill>
                   <a:srgbClr val="203B4D"/>
@@ -10601,7 +11577,8 @@
             </a:defPPr>
           </a:lstStyle>
           <a:p xmlns:a="http://schemas.openxmlformats.org/drawingml/2006/main">
-            <a:pPr>
+            <a:pPr algn="l">
+              <a:buNone/>
               <a:defRPr sz="2025" b="0">
                 <a:solidFill>
                   <a:srgbClr val="203B4D"/>
@@ -10620,11 +11597,12 @@
                 <a:ea typeface="Arial"/>
                 <a:cs typeface="Arial"/>
               </a:rPr>
-              <a:t>Each callback receives one asset object.</a:t>
-            </a:r>
-          </a:p>
-          <a:p xmlns:a="http://schemas.openxmlformats.org/drawingml/2006/main">
-            <a:pPr>
+              <a:t>Each callback receives one product object.</a:t>
+            </a:r>
+          </a:p>
+          <a:p xmlns:a="http://schemas.openxmlformats.org/drawingml/2006/main">
+            <a:pPr algn="l">
+              <a:buNone/>
               <a:defRPr sz="2025" b="0">
                 <a:solidFill>
                   <a:srgbClr val="203B4D"/>
@@ -10647,7 +11625,8 @@
             </a:r>
           </a:p>
           <a:p xmlns:a="http://schemas.openxmlformats.org/drawingml/2006/main">
-            <a:pPr>
+            <a:pPr algn="l">
+              <a:buNone/>
               <a:defRPr sz="2025" b="0">
                 <a:solidFill>
                   <a:srgbClr val="203B4D"/>
@@ -10701,7 +11680,7 @@
         <p:txBody>
           <a:bodyPr xmlns:a="http://schemas.openxmlformats.org/drawingml/2006/main"/>
           <a:lstStyle xmlns:a="http://schemas.openxmlformats.org/drawingml/2006/main">
-            <a:defPPr>
+            <a:defPPr algn="l">
               <a:defRPr sz="1875" b="0">
                 <a:solidFill>
                   <a:srgbClr val="087B80"/>
@@ -10713,7 +11692,8 @@
             </a:defPPr>
           </a:lstStyle>
           <a:p xmlns:a="http://schemas.openxmlformats.org/drawingml/2006/main">
-            <a:pPr>
+            <a:pPr algn="l">
+              <a:buNone/>
               <a:defRPr sz="1875" b="0">
                 <a:solidFill>
                   <a:srgbClr val="087B80"/>
@@ -10732,11 +11712,12 @@
                 <a:ea typeface="Consolas"/>
                 <a:cs typeface="Consolas"/>
               </a:rPr>
-              <a:t>{assets.map(asset =&gt; (</a:t>
-            </a:r>
-          </a:p>
-          <a:p xmlns:a="http://schemas.openxmlformats.org/drawingml/2006/main">
-            <a:pPr>
+              <a:t>{products.map(product =&gt; (</a:t>
+            </a:r>
+          </a:p>
+          <a:p xmlns:a="http://schemas.openxmlformats.org/drawingml/2006/main">
+            <a:pPr algn="l">
+              <a:buNone/>
               <a:defRPr sz="1875" b="0">
                 <a:solidFill>
                   <a:srgbClr val="087B80"/>
@@ -10755,11 +11736,12 @@
                 <a:ea typeface="Consolas"/>
                 <a:cs typeface="Consolas"/>
               </a:rPr>
-              <a:t>  &lt;AssetCard</a:t>
-            </a:r>
-          </a:p>
-          <a:p xmlns:a="http://schemas.openxmlformats.org/drawingml/2006/main">
-            <a:pPr>
+              <a:t>  &lt;ProductCard</a:t>
+            </a:r>
+          </a:p>
+          <a:p xmlns:a="http://schemas.openxmlformats.org/drawingml/2006/main">
+            <a:pPr algn="l">
+              <a:buNone/>
               <a:defRPr sz="1875" b="0">
                 <a:solidFill>
                   <a:srgbClr val="087B80"/>
@@ -10778,11 +11760,12 @@
                 <a:ea typeface="Consolas"/>
                 <a:cs typeface="Consolas"/>
               </a:rPr>
-              <a:t>    key={asset.id}</a:t>
-            </a:r>
-          </a:p>
-          <a:p xmlns:a="http://schemas.openxmlformats.org/drawingml/2006/main">
-            <a:pPr>
+              <a:t>    key={product.id}</a:t>
+            </a:r>
+          </a:p>
+          <a:p xmlns:a="http://schemas.openxmlformats.org/drawingml/2006/main">
+            <a:pPr algn="l">
+              <a:buNone/>
               <a:defRPr sz="1875" b="0">
                 <a:solidFill>
                   <a:srgbClr val="087B80"/>
@@ -10801,11 +11784,12 @@
                 <a:ea typeface="Consolas"/>
                 <a:cs typeface="Consolas"/>
               </a:rPr>
-              <a:t>    asset={asset}</a:t>
-            </a:r>
-          </a:p>
-          <a:p xmlns:a="http://schemas.openxmlformats.org/drawingml/2006/main">
-            <a:pPr>
+              <a:t>    product={product}</a:t>
+            </a:r>
+          </a:p>
+          <a:p xmlns:a="http://schemas.openxmlformats.org/drawingml/2006/main">
+            <a:pPr algn="l">
+              <a:buNone/>
               <a:defRPr sz="1875" b="0">
                 <a:solidFill>
                   <a:srgbClr val="087B80"/>
@@ -10828,7 +11812,8 @@
             </a:r>
           </a:p>
           <a:p xmlns:a="http://schemas.openxmlformats.org/drawingml/2006/main">
-            <a:pPr>
+            <a:pPr algn="l">
+              <a:buNone/>
               <a:defRPr sz="1875" b="0">
                 <a:solidFill>
                   <a:srgbClr val="087B80"/>
@@ -10882,7 +11867,7 @@
         <p:txBody>
           <a:bodyPr xmlns:a="http://schemas.openxmlformats.org/drawingml/2006/main"/>
           <a:lstStyle xmlns:a="http://schemas.openxmlformats.org/drawingml/2006/main">
-            <a:defPPr>
+            <a:defPPr algn="l">
               <a:defRPr sz="1725" b="1">
                 <a:solidFill>
                   <a:srgbClr val="85551E"/>
@@ -10894,7 +11879,8 @@
             </a:defPPr>
           </a:lstStyle>
           <a:p xmlns:a="http://schemas.openxmlformats.org/drawingml/2006/main">
-            <a:pPr>
+            <a:pPr algn="l">
+              <a:buNone/>
               <a:defRPr sz="1725" b="1">
                 <a:solidFill>
                   <a:srgbClr val="85551E"/>
@@ -10948,7 +11934,7 @@
         <p:txBody>
           <a:bodyPr xmlns:a="http://schemas.openxmlformats.org/drawingml/2006/main"/>
           <a:lstStyle xmlns:a="http://schemas.openxmlformats.org/drawingml/2006/main">
-            <a:defPPr>
+            <a:defPPr algn="l">
               <a:defRPr sz="1200" b="0">
                 <a:solidFill>
                   <a:srgbClr val="6B7F8D"/>
@@ -10960,7 +11946,8 @@
             </a:defPPr>
           </a:lstStyle>
           <a:p xmlns:a="http://schemas.openxmlformats.org/drawingml/2006/main">
-            <a:pPr>
+            <a:pPr algn="l">
+              <a:buNone/>
               <a:defRPr sz="1200" b="0">
                 <a:solidFill>
                   <a:srgbClr val="6B7F8D"/>
@@ -11043,7 +12030,7 @@
         <p:txBody>
           <a:bodyPr xmlns:a="http://schemas.openxmlformats.org/drawingml/2006/main"/>
           <a:lstStyle xmlns:a="http://schemas.openxmlformats.org/drawingml/2006/main">
-            <a:defPPr>
+            <a:defPPr algn="l">
               <a:defRPr sz="1275" b="1">
                 <a:solidFill>
                   <a:srgbClr val="007D83"/>
@@ -11055,7 +12042,8 @@
             </a:defPPr>
           </a:lstStyle>
           <a:p xmlns:a="http://schemas.openxmlformats.org/drawingml/2006/main">
-            <a:pPr>
+            <a:pPr algn="l">
+              <a:buNone/>
               <a:defRPr sz="1275" b="1">
                 <a:solidFill>
                   <a:srgbClr val="007D83"/>
@@ -11109,7 +12097,7 @@
         <p:txBody>
           <a:bodyPr xmlns:a="http://schemas.openxmlformats.org/drawingml/2006/main"/>
           <a:lstStyle xmlns:a="http://schemas.openxmlformats.org/drawingml/2006/main">
-            <a:defPPr>
+            <a:defPPr algn="l">
               <a:defRPr sz="3300" b="1">
                 <a:solidFill>
                   <a:srgbClr val="203B4D"/>
@@ -11121,7 +12109,8 @@
             </a:defPPr>
           </a:lstStyle>
           <a:p xmlns:a="http://schemas.openxmlformats.org/drawingml/2006/main">
-            <a:pPr>
+            <a:pPr algn="l">
+              <a:buNone/>
               <a:defRPr sz="3300" b="1">
                 <a:solidFill>
                   <a:srgbClr val="203B4D"/>
@@ -11175,7 +12164,7 @@
         <p:txBody>
           <a:bodyPr xmlns:a="http://schemas.openxmlformats.org/drawingml/2006/main"/>
           <a:lstStyle xmlns:a="http://schemas.openxmlformats.org/drawingml/2006/main">
-            <a:defPPr>
+            <a:defPPr algn="l">
               <a:defRPr sz="2325" b="0">
                 <a:solidFill>
                   <a:srgbClr val="203B4D"/>
@@ -11187,7 +12176,8 @@
             </a:defPPr>
           </a:lstStyle>
           <a:p xmlns:a="http://schemas.openxmlformats.org/drawingml/2006/main">
-            <a:pPr>
+            <a:pPr algn="l">
+              <a:buNone/>
               <a:defRPr sz="2325" b="0">
                 <a:solidFill>
                   <a:srgbClr val="203B4D"/>
@@ -11215,7 +12205,8 @@
             </a:r>
           </a:p>
           <a:p xmlns:a="http://schemas.openxmlformats.org/drawingml/2006/main">
-            <a:pPr>
+            <a:pPr algn="l">
+              <a:buNone/>
               <a:defRPr sz="2325" b="0">
                 <a:solidFill>
                   <a:srgbClr val="203B4D"/>
@@ -11238,7 +12229,8 @@
             </a:r>
           </a:p>
           <a:p xmlns:a="http://schemas.openxmlformats.org/drawingml/2006/main">
-            <a:pPr>
+            <a:pPr algn="l">
+              <a:buNone/>
               <a:defRPr sz="2325" b="0">
                 <a:solidFill>
                   <a:srgbClr val="203B4D"/>
@@ -11261,7 +12253,8 @@
             </a:r>
           </a:p>
           <a:p xmlns:a="http://schemas.openxmlformats.org/drawingml/2006/main">
-            <a:pPr>
+            <a:pPr algn="l">
+              <a:buNone/>
               <a:defRPr sz="2325" b="0">
                 <a:solidFill>
                   <a:srgbClr val="203B4D"/>
@@ -11315,7 +12308,7 @@
         <p:txBody>
           <a:bodyPr xmlns:a="http://schemas.openxmlformats.org/drawingml/2006/main"/>
           <a:lstStyle xmlns:a="http://schemas.openxmlformats.org/drawingml/2006/main">
-            <a:defPPr>
+            <a:defPPr algn="l">
               <a:defRPr sz="1200" b="0">
                 <a:solidFill>
                   <a:srgbClr val="6B7F8D"/>
@@ -11327,7 +12320,8 @@
             </a:defPPr>
           </a:lstStyle>
           <a:p xmlns:a="http://schemas.openxmlformats.org/drawingml/2006/main">
-            <a:pPr>
+            <a:pPr algn="l">
+              <a:buNone/>
               <a:defRPr sz="1200" b="0">
                 <a:solidFill>
                   <a:srgbClr val="6B7F8D"/>
@@ -11410,7 +12404,7 @@
         <p:txBody>
           <a:bodyPr xmlns:a="http://schemas.openxmlformats.org/drawingml/2006/main"/>
           <a:lstStyle xmlns:a="http://schemas.openxmlformats.org/drawingml/2006/main">
-            <a:defPPr>
+            <a:defPPr algn="l">
               <a:defRPr sz="1275" b="1">
                 <a:solidFill>
                   <a:srgbClr val="007D83"/>
@@ -11422,7 +12416,8 @@
             </a:defPPr>
           </a:lstStyle>
           <a:p xmlns:a="http://schemas.openxmlformats.org/drawingml/2006/main">
-            <a:pPr>
+            <a:pPr algn="l">
+              <a:buNone/>
               <a:defRPr sz="1275" b="1">
                 <a:solidFill>
                   <a:srgbClr val="007D83"/>
@@ -11476,7 +12471,7 @@
         <p:txBody>
           <a:bodyPr xmlns:a="http://schemas.openxmlformats.org/drawingml/2006/main"/>
           <a:lstStyle xmlns:a="http://schemas.openxmlformats.org/drawingml/2006/main">
-            <a:defPPr>
+            <a:defPPr algn="l">
               <a:defRPr sz="3300" b="1">
                 <a:solidFill>
                   <a:srgbClr val="203B4D"/>
@@ -11488,7 +12483,8 @@
             </a:defPPr>
           </a:lstStyle>
           <a:p xmlns:a="http://schemas.openxmlformats.org/drawingml/2006/main">
-            <a:pPr>
+            <a:pPr algn="l">
+              <a:buNone/>
               <a:defRPr sz="3300" b="1">
                 <a:solidFill>
                   <a:srgbClr val="203B4D"/>
@@ -11542,7 +12538,7 @@
         <p:txBody>
           <a:bodyPr xmlns:a="http://schemas.openxmlformats.org/drawingml/2006/main"/>
           <a:lstStyle xmlns:a="http://schemas.openxmlformats.org/drawingml/2006/main">
-            <a:defPPr>
+            <a:defPPr algn="l">
               <a:defRPr sz="2025" b="0">
                 <a:solidFill>
                   <a:srgbClr val="203B4D"/>
@@ -11554,7 +12550,8 @@
             </a:defPPr>
           </a:lstStyle>
           <a:p xmlns:a="http://schemas.openxmlformats.org/drawingml/2006/main">
-            <a:pPr>
+            <a:pPr algn="l">
+              <a:buNone/>
               <a:defRPr sz="2025" b="0">
                 <a:solidFill>
                   <a:srgbClr val="203B4D"/>
@@ -11577,7 +12574,8 @@
             </a:r>
           </a:p>
           <a:p xmlns:a="http://schemas.openxmlformats.org/drawingml/2006/main">
-            <a:pPr>
+            <a:pPr algn="l">
+              <a:buNone/>
               <a:defRPr sz="2025" b="0">
                 <a:solidFill>
                   <a:srgbClr val="203B4D"/>
@@ -11600,7 +12598,8 @@
             </a:r>
           </a:p>
           <a:p xmlns:a="http://schemas.openxmlformats.org/drawingml/2006/main">
-            <a:pPr>
+            <a:pPr algn="l">
+              <a:buNone/>
               <a:defRPr sz="2025" b="0">
                 <a:solidFill>
                   <a:srgbClr val="203B4D"/>
@@ -11623,7 +12622,8 @@
             </a:r>
           </a:p>
           <a:p xmlns:a="http://schemas.openxmlformats.org/drawingml/2006/main">
-            <a:pPr>
+            <a:pPr algn="l">
+              <a:buNone/>
               <a:defRPr sz="2025" b="0">
                 <a:solidFill>
                   <a:srgbClr val="203B4D"/>
@@ -11677,7 +12677,7 @@
         <p:txBody>
           <a:bodyPr xmlns:a="http://schemas.openxmlformats.org/drawingml/2006/main"/>
           <a:lstStyle xmlns:a="http://schemas.openxmlformats.org/drawingml/2006/main">
-            <a:defPPr>
+            <a:defPPr algn="l">
               <a:defRPr sz="1875" b="0">
                 <a:solidFill>
                   <a:srgbClr val="087B80"/>
@@ -11689,7 +12689,8 @@
             </a:defPPr>
           </a:lstStyle>
           <a:p xmlns:a="http://schemas.openxmlformats.org/drawingml/2006/main">
-            <a:pPr>
+            <a:pPr algn="l">
+              <a:buNone/>
               <a:defRPr sz="1875" b="0">
                 <a:solidFill>
                   <a:srgbClr val="087B80"/>
@@ -11712,7 +12713,8 @@
             </a:r>
           </a:p>
           <a:p xmlns:a="http://schemas.openxmlformats.org/drawingml/2006/main">
-            <a:pPr>
+            <a:pPr algn="l">
+              <a:buNone/>
               <a:defRPr sz="1875" b="0">
                 <a:solidFill>
                   <a:srgbClr val="087B80"/>
@@ -11731,7 +12733,7 @@
                 <a:ea typeface="Consolas"/>
                 <a:cs typeface="Consolas"/>
               </a:rPr>
-              <a:t>['A-101', 'A-102', 'A-103']</a:t>
+              <a:t>['P-101', 'P-102', 'P-103']</a:t>
             </a:r>
           </a:p>
           <a:p xmlns:a="http://schemas.openxmlformats.org/drawingml/2006/main">
@@ -11740,7 +12742,8 @@
             </a:r>
           </a:p>
           <a:p xmlns:a="http://schemas.openxmlformats.org/drawingml/2006/main">
-            <a:pPr>
+            <a:pPr algn="l">
+              <a:buNone/>
               <a:defRPr sz="1875" b="0">
                 <a:solidFill>
                   <a:srgbClr val="087B80"/>
@@ -11763,7 +12766,8 @@
             </a:r>
           </a:p>
           <a:p xmlns:a="http://schemas.openxmlformats.org/drawingml/2006/main">
-            <a:pPr>
+            <a:pPr algn="l">
+              <a:buNone/>
               <a:defRPr sz="1875" b="0">
                 <a:solidFill>
                   <a:srgbClr val="087B80"/>
@@ -11782,7 +12786,7 @@
                 <a:ea typeface="Consolas"/>
                 <a:cs typeface="Consolas"/>
               </a:rPr>
-              <a:t>['A-103', 'A-101', 'A-102']</a:t>
+              <a:t>['P-103', 'P-101', 'P-102']</a:t>
             </a:r>
           </a:p>
         </p:txBody>
@@ -11817,7 +12821,7 @@
         <p:txBody>
           <a:bodyPr xmlns:a="http://schemas.openxmlformats.org/drawingml/2006/main"/>
           <a:lstStyle xmlns:a="http://schemas.openxmlformats.org/drawingml/2006/main">
-            <a:defPPr>
+            <a:defPPr algn="l">
               <a:defRPr sz="1725" b="1">
                 <a:solidFill>
                   <a:srgbClr val="85551E"/>
@@ -11829,7 +12833,8 @@
             </a:defPPr>
           </a:lstStyle>
           <a:p xmlns:a="http://schemas.openxmlformats.org/drawingml/2006/main">
-            <a:pPr>
+            <a:pPr algn="l">
+              <a:buNone/>
               <a:defRPr sz="1725" b="1">
                 <a:solidFill>
                   <a:srgbClr val="85551E"/>
@@ -11848,7 +12853,7 @@
                 <a:ea typeface="Arial"/>
                 <a:cs typeface="Arial"/>
               </a:rPr>
-              <a:t>Positions changed. Each asset’s ID stayed the same.</a:t>
+              <a:t>Positions changed. Each product’s ID stayed the same.</a:t>
             </a:r>
           </a:p>
         </p:txBody>
@@ -11883,7 +12888,7 @@
         <p:txBody>
           <a:bodyPr xmlns:a="http://schemas.openxmlformats.org/drawingml/2006/main"/>
           <a:lstStyle xmlns:a="http://schemas.openxmlformats.org/drawingml/2006/main">
-            <a:defPPr>
+            <a:defPPr algn="l">
               <a:defRPr sz="1200" b="0">
                 <a:solidFill>
                   <a:srgbClr val="6B7F8D"/>
@@ -11895,7 +12900,8 @@
             </a:defPPr>
           </a:lstStyle>
           <a:p xmlns:a="http://schemas.openxmlformats.org/drawingml/2006/main">
-            <a:pPr>
+            <a:pPr algn="l">
+              <a:buNone/>
               <a:defRPr sz="1200" b="0">
                 <a:solidFill>
                   <a:srgbClr val="6B7F8D"/>
@@ -11978,7 +12984,7 @@
         <p:txBody>
           <a:bodyPr xmlns:a="http://schemas.openxmlformats.org/drawingml/2006/main"/>
           <a:lstStyle xmlns:a="http://schemas.openxmlformats.org/drawingml/2006/main">
-            <a:defPPr>
+            <a:defPPr algn="l">
               <a:defRPr sz="1275" b="1">
                 <a:solidFill>
                   <a:srgbClr val="007D83"/>
@@ -11990,7 +12996,8 @@
             </a:defPPr>
           </a:lstStyle>
           <a:p xmlns:a="http://schemas.openxmlformats.org/drawingml/2006/main">
-            <a:pPr>
+            <a:pPr algn="l">
+              <a:buNone/>
               <a:defRPr sz="1275" b="1">
                 <a:solidFill>
                   <a:srgbClr val="007D83"/>
@@ -12044,7 +13051,7 @@
         <p:txBody>
           <a:bodyPr xmlns:a="http://schemas.openxmlformats.org/drawingml/2006/main"/>
           <a:lstStyle xmlns:a="http://schemas.openxmlformats.org/drawingml/2006/main">
-            <a:defPPr>
+            <a:defPPr algn="l">
               <a:defRPr sz="3300" b="1">
                 <a:solidFill>
                   <a:srgbClr val="203B4D"/>
@@ -12056,7 +13063,8 @@
             </a:defPPr>
           </a:lstStyle>
           <a:p xmlns:a="http://schemas.openxmlformats.org/drawingml/2006/main">
-            <a:pPr>
+            <a:pPr algn="l">
+              <a:buNone/>
               <a:defRPr sz="3300" b="1">
                 <a:solidFill>
                   <a:srgbClr val="203B4D"/>
@@ -12110,7 +13118,7 @@
         <p:txBody>
           <a:bodyPr xmlns:a="http://schemas.openxmlformats.org/drawingml/2006/main"/>
           <a:lstStyle xmlns:a="http://schemas.openxmlformats.org/drawingml/2006/main">
-            <a:defPPr>
+            <a:defPPr algn="l">
               <a:defRPr sz="2025" b="0">
                 <a:solidFill>
                   <a:srgbClr val="203B4D"/>
@@ -12122,7 +13130,8 @@
             </a:defPPr>
           </a:lstStyle>
           <a:p xmlns:a="http://schemas.openxmlformats.org/drawingml/2006/main">
-            <a:pPr>
+            <a:pPr algn="l">
+              <a:buNone/>
               <a:defRPr sz="2025" b="0">
                 <a:solidFill>
                   <a:srgbClr val="203B4D"/>
@@ -12145,7 +13154,8 @@
             </a:r>
           </a:p>
           <a:p xmlns:a="http://schemas.openxmlformats.org/drawingml/2006/main">
-            <a:pPr>
+            <a:pPr algn="l">
+              <a:buNone/>
               <a:defRPr sz="2025" b="0">
                 <a:solidFill>
                   <a:srgbClr val="203B4D"/>
@@ -12168,7 +13178,8 @@
             </a:r>
           </a:p>
           <a:p xmlns:a="http://schemas.openxmlformats.org/drawingml/2006/main">
-            <a:pPr>
+            <a:pPr algn="l">
+              <a:buNone/>
               <a:defRPr sz="2025" b="0">
                 <a:solidFill>
                   <a:srgbClr val="203B4D"/>
@@ -12222,7 +13233,7 @@
         <p:txBody>
           <a:bodyPr xmlns:a="http://schemas.openxmlformats.org/drawingml/2006/main"/>
           <a:lstStyle xmlns:a="http://schemas.openxmlformats.org/drawingml/2006/main">
-            <a:defPPr>
+            <a:defPPr algn="l">
               <a:defRPr sz="1875" b="0">
                 <a:solidFill>
                   <a:srgbClr val="087B80"/>
@@ -12234,7 +13245,8 @@
             </a:defPPr>
           </a:lstStyle>
           <a:p xmlns:a="http://schemas.openxmlformats.org/drawingml/2006/main">
-            <a:pPr>
+            <a:pPr algn="l">
+              <a:buNone/>
               <a:defRPr sz="1875" b="0">
                 <a:solidFill>
                   <a:srgbClr val="087B80"/>
@@ -12253,7 +13265,7 @@
                 <a:ea typeface="Consolas"/>
                 <a:cs typeface="Consolas"/>
               </a:rPr>
-              <a:t>&lt;AssetCard key={asset.id} asset={asset} /&gt;</a:t>
+              <a:t>&lt;ProductCard key={product.id} product={product} /&gt;</a:t>
             </a:r>
           </a:p>
           <a:p xmlns:a="http://schemas.openxmlformats.org/drawingml/2006/main">
@@ -12262,7 +13274,8 @@
             </a:r>
           </a:p>
           <a:p xmlns:a="http://schemas.openxmlformats.org/drawingml/2006/main">
-            <a:pPr>
+            <a:pPr algn="l">
+              <a:buNone/>
               <a:defRPr sz="1875" b="0">
                 <a:solidFill>
                   <a:srgbClr val="087B80"/>
@@ -12281,11 +13294,12 @@
                 <a:ea typeface="Consolas"/>
                 <a:cs typeface="Consolas"/>
               </a:rPr>
-              <a:t>// Inside AssetCard:</a:t>
-            </a:r>
-          </a:p>
-          <a:p xmlns:a="http://schemas.openxmlformats.org/drawingml/2006/main">
-            <a:pPr>
+              <a:t>// Inside ProductCard:</a:t>
+            </a:r>
+          </a:p>
+          <a:p xmlns:a="http://schemas.openxmlformats.org/drawingml/2006/main">
+            <a:pPr algn="l">
+              <a:buNone/>
               <a:defRPr sz="1875" b="0">
                 <a:solidFill>
                   <a:srgbClr val="087B80"/>
@@ -12304,7 +13318,7 @@
                 <a:ea typeface="Consolas"/>
                 <a:cs typeface="Consolas"/>
               </a:rPr>
-              <a:t>&lt;span&gt;{asset.id}&lt;/span&gt;</a:t>
+              <a:t>&lt;span&gt;{product.id}&lt;/span&gt;</a:t>
             </a:r>
           </a:p>
         </p:txBody>
@@ -12339,7 +13353,7 @@
         <p:txBody>
           <a:bodyPr xmlns:a="http://schemas.openxmlformats.org/drawingml/2006/main"/>
           <a:lstStyle xmlns:a="http://schemas.openxmlformats.org/drawingml/2006/main">
-            <a:defPPr>
+            <a:defPPr algn="l">
               <a:defRPr sz="1725" b="1">
                 <a:solidFill>
                   <a:srgbClr val="85551E"/>
@@ -12351,7 +13365,8 @@
             </a:defPPr>
           </a:lstStyle>
           <a:p xmlns:a="http://schemas.openxmlformats.org/drawingml/2006/main">
-            <a:pPr>
+            <a:pPr algn="l">
+              <a:buNone/>
               <a:defRPr sz="1725" b="1">
                 <a:solidFill>
                   <a:srgbClr val="85551E"/>
@@ -12370,7 +13385,7 @@
                 <a:ea typeface="Arial"/>
                 <a:cs typeface="Arial"/>
               </a:rPr>
-              <a:t>AssetCard reads asset.id rather than props.key</a:t>
+              <a:t>ProductCard reads product.id rather than props.key</a:t>
             </a:r>
           </a:p>
         </p:txBody>
@@ -12405,7 +13420,7 @@
         <p:txBody>
           <a:bodyPr xmlns:a="http://schemas.openxmlformats.org/drawingml/2006/main"/>
           <a:lstStyle xmlns:a="http://schemas.openxmlformats.org/drawingml/2006/main">
-            <a:defPPr>
+            <a:defPPr algn="l">
               <a:defRPr sz="1200" b="0">
                 <a:solidFill>
                   <a:srgbClr val="6B7F8D"/>
@@ -12417,7 +13432,8 @@
             </a:defPPr>
           </a:lstStyle>
           <a:p xmlns:a="http://schemas.openxmlformats.org/drawingml/2006/main">
-            <a:pPr>
+            <a:pPr algn="l">
+              <a:buNone/>
               <a:defRPr sz="1200" b="0">
                 <a:solidFill>
                   <a:srgbClr val="6B7F8D"/>
@@ -12500,7 +13516,7 @@
         <p:txBody>
           <a:bodyPr xmlns:a="http://schemas.openxmlformats.org/drawingml/2006/main"/>
           <a:lstStyle xmlns:a="http://schemas.openxmlformats.org/drawingml/2006/main">
-            <a:defPPr>
+            <a:defPPr algn="l">
               <a:defRPr sz="1275" b="1">
                 <a:solidFill>
                   <a:srgbClr val="007D83"/>
@@ -12512,7 +13528,8 @@
             </a:defPPr>
           </a:lstStyle>
           <a:p xmlns:a="http://schemas.openxmlformats.org/drawingml/2006/main">
-            <a:pPr>
+            <a:pPr algn="l">
+              <a:buNone/>
               <a:defRPr sz="1275" b="1">
                 <a:solidFill>
                   <a:srgbClr val="007D83"/>
@@ -12566,7 +13583,7 @@
         <p:txBody>
           <a:bodyPr xmlns:a="http://schemas.openxmlformats.org/drawingml/2006/main"/>
           <a:lstStyle xmlns:a="http://schemas.openxmlformats.org/drawingml/2006/main">
-            <a:defPPr>
+            <a:defPPr algn="l">
               <a:defRPr sz="3300" b="1">
                 <a:solidFill>
                   <a:srgbClr val="203B4D"/>
@@ -12578,7 +13595,8 @@
             </a:defPPr>
           </a:lstStyle>
           <a:p xmlns:a="http://schemas.openxmlformats.org/drawingml/2006/main">
-            <a:pPr>
+            <a:pPr algn="l">
+              <a:buNone/>
               <a:defRPr sz="3300" b="1">
                 <a:solidFill>
                   <a:srgbClr val="203B4D"/>
@@ -12632,7 +13650,7 @@
         <p:txBody>
           <a:bodyPr xmlns:a="http://schemas.openxmlformats.org/drawingml/2006/main"/>
           <a:lstStyle xmlns:a="http://schemas.openxmlformats.org/drawingml/2006/main">
-            <a:defPPr>
+            <a:defPPr algn="l">
               <a:defRPr sz="2025" b="0">
                 <a:solidFill>
                   <a:srgbClr val="203B4D"/>
@@ -12644,7 +13662,8 @@
             </a:defPPr>
           </a:lstStyle>
           <a:p xmlns:a="http://schemas.openxmlformats.org/drawingml/2006/main">
-            <a:pPr>
+            <a:pPr algn="l">
+              <a:buNone/>
               <a:defRPr sz="2025" b="0">
                 <a:solidFill>
                   <a:srgbClr val="203B4D"/>
@@ -12667,7 +13686,8 @@
             </a:r>
           </a:p>
           <a:p xmlns:a="http://schemas.openxmlformats.org/drawingml/2006/main">
-            <a:pPr>
+            <a:pPr algn="l">
+              <a:buNone/>
               <a:defRPr sz="2025" b="0">
                 <a:solidFill>
                   <a:srgbClr val="203B4D"/>
@@ -12690,7 +13710,8 @@
             </a:r>
           </a:p>
           <a:p xmlns:a="http://schemas.openxmlformats.org/drawingml/2006/main">
-            <a:pPr>
+            <a:pPr algn="l">
+              <a:buNone/>
               <a:defRPr sz="2025" b="0">
                 <a:solidFill>
                   <a:srgbClr val="203B4D"/>
@@ -12744,7 +13765,7 @@
         <p:txBody>
           <a:bodyPr xmlns:a="http://schemas.openxmlformats.org/drawingml/2006/main"/>
           <a:lstStyle xmlns:a="http://schemas.openxmlformats.org/drawingml/2006/main">
-            <a:defPPr>
+            <a:defPPr algn="l">
               <a:defRPr sz="1875" b="0">
                 <a:solidFill>
                   <a:srgbClr val="087B80"/>
@@ -12756,7 +13777,8 @@
             </a:defPPr>
           </a:lstStyle>
           <a:p xmlns:a="http://schemas.openxmlformats.org/drawingml/2006/main">
-            <a:pPr>
+            <a:pPr algn="l">
+              <a:buNone/>
               <a:defRPr sz="1875" b="0">
                 <a:solidFill>
                   <a:srgbClr val="087B80"/>
@@ -12775,11 +13797,12 @@
                 <a:ea typeface="Consolas"/>
                 <a:cs typeface="Consolas"/>
               </a:rPr>
-              <a:t>const visibleAssets = assets.filter(</a:t>
-            </a:r>
-          </a:p>
-          <a:p xmlns:a="http://schemas.openxmlformats.org/drawingml/2006/main">
-            <a:pPr>
+              <a:t>const visibleProducts = products.filter(</a:t>
+            </a:r>
+          </a:p>
+          <a:p xmlns:a="http://schemas.openxmlformats.org/drawingml/2006/main">
+            <a:pPr algn="l">
+              <a:buNone/>
               <a:defRPr sz="1875" b="0">
                 <a:solidFill>
                   <a:srgbClr val="087B80"/>
@@ -12798,11 +13821,12 @@
                 <a:ea typeface="Consolas"/>
                 <a:cs typeface="Consolas"/>
               </a:rPr>
-              <a:t>  asset =&gt; asset.status === 'Available'</a:t>
-            </a:r>
-          </a:p>
-          <a:p xmlns:a="http://schemas.openxmlformats.org/drawingml/2006/main">
-            <a:pPr>
+              <a:t>  product =&gt; product.inStock</a:t>
+            </a:r>
+          </a:p>
+          <a:p xmlns:a="http://schemas.openxmlformats.org/drawingml/2006/main">
+            <a:pPr algn="l">
+              <a:buNone/>
               <a:defRPr sz="1875" b="0">
                 <a:solidFill>
                   <a:srgbClr val="087B80"/>
@@ -12830,7 +13854,8 @@
             </a:r>
           </a:p>
           <a:p xmlns:a="http://schemas.openxmlformats.org/drawingml/2006/main">
-            <a:pPr>
+            <a:pPr algn="l">
+              <a:buNone/>
               <a:defRPr sz="1875" b="0">
                 <a:solidFill>
                   <a:srgbClr val="087B80"/>
@@ -12849,11 +13874,12 @@
                 <a:ea typeface="Consolas"/>
                 <a:cs typeface="Consolas"/>
               </a:rPr>
-              <a:t>&lt;AssetSummary assets={assets} /&gt;</a:t>
-            </a:r>
-          </a:p>
-          <a:p xmlns:a="http://schemas.openxmlformats.org/drawingml/2006/main">
-            <a:pPr>
+              <a:t>&lt;ProductSummary products={products} /&gt;</a:t>
+            </a:r>
+          </a:p>
+          <a:p xmlns:a="http://schemas.openxmlformats.org/drawingml/2006/main">
+            <a:pPr algn="l">
+              <a:buNone/>
               <a:defRPr sz="1875" b="0">
                 <a:solidFill>
                   <a:srgbClr val="087B80"/>
@@ -12872,7 +13898,7 @@
                 <a:ea typeface="Consolas"/>
                 <a:cs typeface="Consolas"/>
               </a:rPr>
-              <a:t>&lt;AssetList assets={visibleAssets} /&gt;</a:t>
+              <a:t>&lt;ProductList products={visibleProducts} /&gt;</a:t>
             </a:r>
           </a:p>
         </p:txBody>
@@ -12907,7 +13933,7 @@
         <p:txBody>
           <a:bodyPr xmlns:a="http://schemas.openxmlformats.org/drawingml/2006/main"/>
           <a:lstStyle xmlns:a="http://schemas.openxmlformats.org/drawingml/2006/main">
-            <a:defPPr>
+            <a:defPPr algn="l">
               <a:defRPr sz="1725" b="1">
                 <a:solidFill>
                   <a:srgbClr val="85551E"/>
@@ -12919,7 +13945,8 @@
             </a:defPPr>
           </a:lstStyle>
           <a:p xmlns:a="http://schemas.openxmlformats.org/drawingml/2006/main">
-            <a:pPr>
+            <a:pPr algn="l">
+              <a:buNone/>
               <a:defRPr sz="1725" b="1">
                 <a:solidFill>
                   <a:srgbClr val="85551E"/>
@@ -12973,7 +14000,7 @@
         <p:txBody>
           <a:bodyPr xmlns:a="http://schemas.openxmlformats.org/drawingml/2006/main"/>
           <a:lstStyle xmlns:a="http://schemas.openxmlformats.org/drawingml/2006/main">
-            <a:defPPr>
+            <a:defPPr algn="l">
               <a:defRPr sz="1200" b="0">
                 <a:solidFill>
                   <a:srgbClr val="6B7F8D"/>
@@ -12985,7 +14012,8 @@
             </a:defPPr>
           </a:lstStyle>
           <a:p xmlns:a="http://schemas.openxmlformats.org/drawingml/2006/main">
-            <a:pPr>
+            <a:pPr algn="l">
+              <a:buNone/>
               <a:defRPr sz="1200" b="0">
                 <a:solidFill>
                   <a:srgbClr val="6B7F8D"/>
@@ -13068,7 +14096,7 @@
         <p:txBody>
           <a:bodyPr xmlns:a="http://schemas.openxmlformats.org/drawingml/2006/main"/>
           <a:lstStyle xmlns:a="http://schemas.openxmlformats.org/drawingml/2006/main">
-            <a:defPPr>
+            <a:defPPr algn="l">
               <a:defRPr sz="1275" b="1">
                 <a:solidFill>
                   <a:srgbClr val="007D83"/>
@@ -13080,7 +14108,8 @@
             </a:defPPr>
           </a:lstStyle>
           <a:p xmlns:a="http://schemas.openxmlformats.org/drawingml/2006/main">
-            <a:pPr>
+            <a:pPr algn="l">
+              <a:buNone/>
               <a:defRPr sz="1275" b="1">
                 <a:solidFill>
                   <a:srgbClr val="007D83"/>
@@ -13134,7 +14163,7 @@
         <p:txBody>
           <a:bodyPr xmlns:a="http://schemas.openxmlformats.org/drawingml/2006/main"/>
           <a:lstStyle xmlns:a="http://schemas.openxmlformats.org/drawingml/2006/main">
-            <a:defPPr>
+            <a:defPPr algn="l">
               <a:defRPr sz="3300" b="1">
                 <a:solidFill>
                   <a:srgbClr val="203B4D"/>
@@ -13146,7 +14175,8 @@
             </a:defPPr>
           </a:lstStyle>
           <a:p xmlns:a="http://schemas.openxmlformats.org/drawingml/2006/main">
-            <a:pPr>
+            <a:pPr algn="l">
+              <a:buNone/>
               <a:defRPr sz="3300" b="1">
                 <a:solidFill>
                   <a:srgbClr val="203B4D"/>
@@ -13200,7 +14230,7 @@
         <p:txBody>
           <a:bodyPr xmlns:a="http://schemas.openxmlformats.org/drawingml/2006/main"/>
           <a:lstStyle xmlns:a="http://schemas.openxmlformats.org/drawingml/2006/main">
-            <a:defPPr>
+            <a:defPPr algn="l">
               <a:defRPr sz="2025" b="0">
                 <a:solidFill>
                   <a:srgbClr val="203B4D"/>
@@ -13212,7 +14242,8 @@
             </a:defPPr>
           </a:lstStyle>
           <a:p xmlns:a="http://schemas.openxmlformats.org/drawingml/2006/main">
-            <a:pPr>
+            <a:pPr algn="l">
+              <a:buNone/>
               <a:defRPr sz="2025" b="0">
                 <a:solidFill>
                   <a:srgbClr val="203B4D"/>
@@ -13235,7 +14266,8 @@
             </a:r>
           </a:p>
           <a:p xmlns:a="http://schemas.openxmlformats.org/drawingml/2006/main">
-            <a:pPr>
+            <a:pPr algn="l">
+              <a:buNone/>
               <a:defRPr sz="2025" b="0">
                 <a:solidFill>
                   <a:srgbClr val="203B4D"/>
@@ -13254,11 +14286,12 @@
                 <a:ea typeface="Arial"/>
                 <a:cs typeface="Arial"/>
               </a:rPr>
-              <a:t>A status expression chooses a class.</a:t>
-            </a:r>
-          </a:p>
-          <a:p xmlns:a="http://schemas.openxmlformats.org/drawingml/2006/main">
-            <a:pPr>
+              <a:t>A stock boolean chooses a class.</a:t>
+            </a:r>
+          </a:p>
+          <a:p xmlns:a="http://schemas.openxmlformats.org/drawingml/2006/main">
+            <a:pPr algn="l">
+              <a:buNone/>
               <a:defRPr sz="2025" b="0">
                 <a:solidFill>
                   <a:srgbClr val="203B4D"/>
@@ -13312,7 +14345,7 @@
         <p:txBody>
           <a:bodyPr xmlns:a="http://schemas.openxmlformats.org/drawingml/2006/main"/>
           <a:lstStyle xmlns:a="http://schemas.openxmlformats.org/drawingml/2006/main">
-            <a:defPPr>
+            <a:defPPr algn="l">
               <a:defRPr sz="1875" b="0">
                 <a:solidFill>
                   <a:srgbClr val="087B80"/>
@@ -13324,7 +14357,8 @@
             </a:defPPr>
           </a:lstStyle>
           <a:p xmlns:a="http://schemas.openxmlformats.org/drawingml/2006/main">
-            <a:pPr>
+            <a:pPr algn="l">
+              <a:buNone/>
               <a:defRPr sz="1875" b="0">
                 <a:solidFill>
                   <a:srgbClr val="087B80"/>
@@ -13343,11 +14377,12 @@
                 <a:ea typeface="Consolas"/>
                 <a:cs typeface="Consolas"/>
               </a:rPr>
-              <a:t>const statusClass = status === 'Available'</a:t>
-            </a:r>
-          </a:p>
-          <a:p xmlns:a="http://schemas.openxmlformats.org/drawingml/2006/main">
-            <a:pPr>
+              <a:t>const stockClass = inStock</a:t>
+            </a:r>
+          </a:p>
+          <a:p xmlns:a="http://schemas.openxmlformats.org/drawingml/2006/main">
+            <a:pPr algn="l">
+              <a:buNone/>
               <a:defRPr sz="1875" b="0">
                 <a:solidFill>
                   <a:srgbClr val="087B80"/>
@@ -13366,7 +14401,7 @@
                 <a:ea typeface="Consolas"/>
                 <a:cs typeface="Consolas"/>
               </a:rPr>
-              <a:t>  ? 'available' : 'assigned';</a:t>
+              <a:t>  ? 'in-stock' : 'out-of-stock';</a:t>
             </a:r>
           </a:p>
           <a:p xmlns:a="http://schemas.openxmlformats.org/drawingml/2006/main">
@@ -13375,7 +14410,8 @@
             </a:r>
           </a:p>
           <a:p xmlns:a="http://schemas.openxmlformats.org/drawingml/2006/main">
-            <a:pPr>
+            <a:pPr algn="l">
+              <a:buNone/>
               <a:defRPr sz="1875" b="0">
                 <a:solidFill>
                   <a:srgbClr val="087B80"/>
@@ -13398,7 +14434,8 @@
             </a:r>
           </a:p>
           <a:p xmlns:a="http://schemas.openxmlformats.org/drawingml/2006/main">
-            <a:pPr>
+            <a:pPr algn="l">
+              <a:buNone/>
               <a:defRPr sz="1875" b="0">
                 <a:solidFill>
                   <a:srgbClr val="087B80"/>
@@ -13417,11 +14454,12 @@
                 <a:ea typeface="Consolas"/>
                 <a:cs typeface="Consolas"/>
               </a:rPr>
-              <a:t>  `status ${statusClass}`</a:t>
-            </a:r>
-          </a:p>
-          <a:p xmlns:a="http://schemas.openxmlformats.org/drawingml/2006/main">
-            <a:pPr>
+              <a:t>  `status ${stockClass}`</a:t>
+            </a:r>
+          </a:p>
+          <a:p xmlns:a="http://schemas.openxmlformats.org/drawingml/2006/main">
+            <a:pPr algn="l">
+              <a:buNone/>
               <a:defRPr sz="1875" b="0">
                 <a:solidFill>
                   <a:srgbClr val="087B80"/>
@@ -13440,7 +14478,7 @@
                 <a:ea typeface="Consolas"/>
                 <a:cs typeface="Consolas"/>
               </a:rPr>
-              <a:t>}&gt;{status}&lt;/span&gt;</a:t>
+              <a:t>}&gt;{inStock ? 'In stock' : 'Out of stock'}&lt;/span&gt;</a:t>
             </a:r>
           </a:p>
         </p:txBody>
@@ -13475,7 +14513,7 @@
         <p:txBody>
           <a:bodyPr xmlns:a="http://schemas.openxmlformats.org/drawingml/2006/main"/>
           <a:lstStyle xmlns:a="http://schemas.openxmlformats.org/drawingml/2006/main">
-            <a:defPPr>
+            <a:defPPr algn="l">
               <a:defRPr sz="1725" b="1">
                 <a:solidFill>
                   <a:srgbClr val="85551E"/>
@@ -13487,7 +14525,8 @@
             </a:defPPr>
           </a:lstStyle>
           <a:p xmlns:a="http://schemas.openxmlformats.org/drawingml/2006/main">
-            <a:pPr>
+            <a:pPr algn="l">
+              <a:buNone/>
               <a:defRPr sz="1725" b="1">
                 <a:solidFill>
                   <a:srgbClr val="85551E"/>
@@ -13506,7 +14545,7 @@
                 <a:ea typeface="Arial"/>
                 <a:cs typeface="Arial"/>
               </a:rPr>
-              <a:t>Available and Assigned have different visual styles</a:t>
+              <a:t>In stock and Out of stock have different visual styles</a:t>
             </a:r>
           </a:p>
         </p:txBody>
@@ -13541,7 +14580,7 @@
         <p:txBody>
           <a:bodyPr xmlns:a="http://schemas.openxmlformats.org/drawingml/2006/main"/>
           <a:lstStyle xmlns:a="http://schemas.openxmlformats.org/drawingml/2006/main">
-            <a:defPPr>
+            <a:defPPr algn="l">
               <a:defRPr sz="1200" b="0">
                 <a:solidFill>
                   <a:srgbClr val="6B7F8D"/>
@@ -13553,7 +14592,8 @@
             </a:defPPr>
           </a:lstStyle>
           <a:p xmlns:a="http://schemas.openxmlformats.org/drawingml/2006/main">
-            <a:pPr>
+            <a:pPr algn="l">
+              <a:buNone/>
               <a:defRPr sz="1200" b="0">
                 <a:solidFill>
                   <a:srgbClr val="6B7F8D"/>
@@ -13636,7 +14676,7 @@
         <p:txBody>
           <a:bodyPr xmlns:a="http://schemas.openxmlformats.org/drawingml/2006/main"/>
           <a:lstStyle xmlns:a="http://schemas.openxmlformats.org/drawingml/2006/main">
-            <a:defPPr>
+            <a:defPPr algn="l">
               <a:defRPr sz="1275" b="1">
                 <a:solidFill>
                   <a:srgbClr val="92E8DF"/>
@@ -13648,7 +14688,8 @@
             </a:defPPr>
           </a:lstStyle>
           <a:p xmlns:a="http://schemas.openxmlformats.org/drawingml/2006/main">
-            <a:pPr>
+            <a:pPr algn="l">
+              <a:buNone/>
               <a:defRPr sz="1275" b="1">
                 <a:solidFill>
                   <a:srgbClr val="92E8DF"/>
@@ -13702,7 +14743,7 @@
         <p:txBody>
           <a:bodyPr xmlns:a="http://schemas.openxmlformats.org/drawingml/2006/main"/>
           <a:lstStyle xmlns:a="http://schemas.openxmlformats.org/drawingml/2006/main">
-            <a:defPPr>
+            <a:defPPr algn="l">
               <a:defRPr sz="3300" b="1">
                 <a:solidFill>
                   <a:srgbClr val="FFFFFF"/>
@@ -13714,7 +14755,8 @@
             </a:defPPr>
           </a:lstStyle>
           <a:p xmlns:a="http://schemas.openxmlformats.org/drawingml/2006/main">
-            <a:pPr>
+            <a:pPr algn="l">
+              <a:buNone/>
               <a:defRPr sz="3300" b="1">
                 <a:solidFill>
                   <a:srgbClr val="FFFFFF"/>
@@ -13733,7 +14775,7 @@
                 <a:ea typeface="Arial"/>
                 <a:cs typeface="Arial"/>
               </a:rPr>
-              <a:t>Our composed Asset Dashboard</a:t>
+              <a:t>Our composed Product Catalog</a:t>
             </a:r>
           </a:p>
         </p:txBody>
@@ -13743,7 +14785,7 @@
           <p:cNvPr id="3" name="">
             <a:extLst xmlns:a="http://schemas.openxmlformats.org/drawingml/2006/main">
               <a:ext uri="{FF2B5EF4-FFF2-40B4-BE49-F238E27FC236}">
-                <a16:creationId xmlns:a16="http://schemas.microsoft.com/office/drawing/2014/main" id="{DB116967-D489-4B8E-AFB8-EF95DE25D6E9}"/>
+                <a16:creationId xmlns:a16="http://schemas.microsoft.com/office/drawing/2014/main" id="{05910B98-6B7A-4CA6-8B6E-12E80522A722}"/>
               </a:ext>
             </a:extLst>
           </p:cNvPr>
@@ -13753,13 +14795,13 @@
           <p:nvPr/>
         </p:nvPicPr>
         <p:blipFill>
-          <a:blip xmlns:r="http://schemas.openxmlformats.org/officeDocument/2006/relationships" xmlns:a="http://schemas.openxmlformats.org/drawingml/2006/main" r:embed="R852bf3aecdcb479c"/>
+          <a:blip xmlns:r="http://schemas.openxmlformats.org/officeDocument/2006/relationships" xmlns:a="http://schemas.openxmlformats.org/drawingml/2006/main" r:embed="R9a044c7dbf7b447b"/>
           <a:stretch xmlns:a="http://schemas.openxmlformats.org/drawingml/2006/main"/>
         </p:blipFill>
         <p:spPr>
           <a:xfrm xmlns:a="http://schemas.openxmlformats.org/drawingml/2006/main">
-            <a:off x="6301012" y="2095500"/>
-            <a:ext cx="4447725" cy="4048125"/>
+            <a:off x="6453844" y="2095500"/>
+            <a:ext cx="4141966" cy="4048125"/>
           </a:xfrm>
           <a:prstGeom xmlns:a="http://schemas.openxmlformats.org/drawingml/2006/main" prst="rect">
             <a:avLst/>
@@ -13796,7 +14838,7 @@
         <p:txBody>
           <a:bodyPr xmlns:a="http://schemas.openxmlformats.org/drawingml/2006/main"/>
           <a:lstStyle xmlns:a="http://schemas.openxmlformats.org/drawingml/2006/main">
-            <a:defPPr>
+            <a:defPPr algn="l">
               <a:defRPr sz="2175" b="0">
                 <a:solidFill>
                   <a:srgbClr val="FFFFFF"/>
@@ -13808,7 +14850,8 @@
             </a:defPPr>
           </a:lstStyle>
           <a:p xmlns:a="http://schemas.openxmlformats.org/drawingml/2006/main">
-            <a:pPr>
+            <a:pPr algn="l">
+              <a:buNone/>
               <a:defRPr sz="2175" b="0">
                 <a:solidFill>
                   <a:srgbClr val="FFFFFF"/>
@@ -13827,11 +14870,12 @@
                 <a:ea typeface="Arial"/>
                 <a:cs typeface="Arial"/>
               </a:rPr>
-              <a:t>Four fictional assets use the same card component.</a:t>
-            </a:r>
-          </a:p>
-          <a:p xmlns:a="http://schemas.openxmlformats.org/drawingml/2006/main">
-            <a:pPr>
+              <a:t>Four fictional products use the same card component.</a:t>
+            </a:r>
+          </a:p>
+          <a:p xmlns:a="http://schemas.openxmlformats.org/drawingml/2006/main">
+            <a:pPr algn="l">
+              <a:buNone/>
               <a:defRPr sz="2175" b="0">
                 <a:solidFill>
                   <a:srgbClr val="FFFFFF"/>
@@ -13850,11 +14894,12 @@
                 <a:ea typeface="Arial"/>
                 <a:cs typeface="Arial"/>
               </a:rPr>
-              <a:t>The summary derives totals from all assets.</a:t>
-            </a:r>
-          </a:p>
-          <a:p xmlns:a="http://schemas.openxmlformats.org/drawingml/2006/main">
-            <a:pPr>
+              <a:t>The summary derives totals from all products.</a:t>
+            </a:r>
+          </a:p>
+          <a:p xmlns:a="http://schemas.openxmlformats.org/drawingml/2006/main">
+            <a:pPr algn="l">
+              <a:buNone/>
               <a:defRPr sz="2175" b="0">
                 <a:solidFill>
                   <a:srgbClr val="FFFFFF"/>
@@ -13877,7 +14922,8 @@
             </a:r>
           </a:p>
           <a:p xmlns:a="http://schemas.openxmlformats.org/drawingml/2006/main">
-            <a:pPr>
+            <a:pPr algn="l">
+              <a:buNone/>
               <a:defRPr sz="2175" b="0">
                 <a:solidFill>
                   <a:srgbClr val="FFFFFF"/>
@@ -13896,7 +14942,7 @@
                 <a:ea typeface="Arial"/>
                 <a:cs typeface="Arial"/>
               </a:rPr>
-              <a:t>The empty example uses the same AssetList.</a:t>
+              <a:t>The empty example uses the same ProductList.</a:t>
             </a:r>
           </a:p>
         </p:txBody>
@@ -13931,7 +14977,7 @@
         <p:txBody>
           <a:bodyPr xmlns:a="http://schemas.openxmlformats.org/drawingml/2006/main"/>
           <a:lstStyle xmlns:a="http://schemas.openxmlformats.org/drawingml/2006/main">
-            <a:defPPr>
+            <a:defPPr algn="l">
               <a:defRPr sz="1200" b="0">
                 <a:solidFill>
                   <a:srgbClr val="92B4C2"/>
@@ -13943,7 +14989,8 @@
             </a:defPPr>
           </a:lstStyle>
           <a:p xmlns:a="http://schemas.openxmlformats.org/drawingml/2006/main">
-            <a:pPr>
+            <a:pPr algn="l">
+              <a:buNone/>
               <a:defRPr sz="1200" b="0">
                 <a:solidFill>
                   <a:srgbClr val="92B4C2"/>
@@ -14026,7 +15073,7 @@
         <p:txBody>
           <a:bodyPr xmlns:a="http://schemas.openxmlformats.org/drawingml/2006/main"/>
           <a:lstStyle xmlns:a="http://schemas.openxmlformats.org/drawingml/2006/main">
-            <a:defPPr>
+            <a:defPPr algn="l">
               <a:defRPr sz="1275" b="1">
                 <a:solidFill>
                   <a:srgbClr val="007D83"/>
@@ -14038,7 +15085,8 @@
             </a:defPPr>
           </a:lstStyle>
           <a:p xmlns:a="http://schemas.openxmlformats.org/drawingml/2006/main">
-            <a:pPr>
+            <a:pPr algn="l">
+              <a:buNone/>
               <a:defRPr sz="1275" b="1">
                 <a:solidFill>
                   <a:srgbClr val="007D83"/>
@@ -14092,7 +15140,7 @@
         <p:txBody>
           <a:bodyPr xmlns:a="http://schemas.openxmlformats.org/drawingml/2006/main"/>
           <a:lstStyle xmlns:a="http://schemas.openxmlformats.org/drawingml/2006/main">
-            <a:defPPr>
+            <a:defPPr algn="l">
               <a:defRPr sz="3300" b="1">
                 <a:solidFill>
                   <a:srgbClr val="203B4D"/>
@@ -14104,7 +15152,8 @@
             </a:defPPr>
           </a:lstStyle>
           <a:p xmlns:a="http://schemas.openxmlformats.org/drawingml/2006/main">
-            <a:pPr>
+            <a:pPr algn="l">
+              <a:buNone/>
               <a:defRPr sz="3300" b="1">
                 <a:solidFill>
                   <a:srgbClr val="203B4D"/>
@@ -14158,7 +15207,7 @@
         <p:txBody>
           <a:bodyPr xmlns:a="http://schemas.openxmlformats.org/drawingml/2006/main"/>
           <a:lstStyle xmlns:a="http://schemas.openxmlformats.org/drawingml/2006/main">
-            <a:defPPr>
+            <a:defPPr algn="l">
               <a:defRPr sz="2025" b="0">
                 <a:solidFill>
                   <a:srgbClr val="203B4D"/>
@@ -14170,7 +15219,8 @@
             </a:defPPr>
           </a:lstStyle>
           <a:p xmlns:a="http://schemas.openxmlformats.org/drawingml/2006/main">
-            <a:pPr>
+            <a:pPr algn="l">
+              <a:buNone/>
               <a:defRPr sz="2025" b="0">
                 <a:solidFill>
                   <a:srgbClr val="203B4D"/>
@@ -14189,11 +15239,12 @@
                 <a:ea typeface="Arial"/>
                 <a:cs typeface="Arial"/>
               </a:rPr>
-              <a:t>App supplies assets to AssetList.</a:t>
-            </a:r>
-          </a:p>
-          <a:p xmlns:a="http://schemas.openxmlformats.org/drawingml/2006/main">
-            <a:pPr>
+              <a:t>App supplies products to ProductList.</a:t>
+            </a:r>
+          </a:p>
+          <a:p xmlns:a="http://schemas.openxmlformats.org/drawingml/2006/main">
+            <a:pPr algn="l">
+              <a:buNone/>
               <a:defRPr sz="2025" b="0">
                 <a:solidFill>
                   <a:srgbClr val="203B4D"/>
@@ -14212,11 +15263,12 @@
                 <a:ea typeface="Arial"/>
                 <a:cs typeface="Arial"/>
               </a:rPr>
-              <a:t>AssetList maps one AssetCard per item.</a:t>
-            </a:r>
-          </a:p>
-          <a:p xmlns:a="http://schemas.openxmlformats.org/drawingml/2006/main">
-            <a:pPr>
+              <a:t>ProductList maps one ProductCard per item.</a:t>
+            </a:r>
+          </a:p>
+          <a:p xmlns:a="http://schemas.openxmlformats.org/drawingml/2006/main">
+            <a:pPr algn="l">
+              <a:buNone/>
               <a:defRPr sz="2025" b="0">
                 <a:solidFill>
                   <a:srgbClr val="203B4D"/>
@@ -14235,11 +15287,12 @@
                 <a:ea typeface="Arial"/>
                 <a:cs typeface="Arial"/>
               </a:rPr>
-              <a:t>AssetCard passes status to StatusBadge.</a:t>
-            </a:r>
-          </a:p>
-          <a:p xmlns:a="http://schemas.openxmlformats.org/drawingml/2006/main">
-            <a:pPr>
+              <a:t>ProductCard passes inStock to StockBadge.</a:t>
+            </a:r>
+          </a:p>
+          <a:p xmlns:a="http://schemas.openxmlformats.org/drawingml/2006/main">
+            <a:pPr algn="l">
+              <a:buNone/>
               <a:defRPr sz="2025" b="0">
                 <a:solidFill>
                   <a:srgbClr val="203B4D"/>
@@ -14293,7 +15346,7 @@
         <p:txBody>
           <a:bodyPr xmlns:a="http://schemas.openxmlformats.org/drawingml/2006/main"/>
           <a:lstStyle xmlns:a="http://schemas.openxmlformats.org/drawingml/2006/main">
-            <a:defPPr>
+            <a:defPPr algn="l">
               <a:defRPr sz="1875" b="0">
                 <a:solidFill>
                   <a:srgbClr val="087B80"/>
@@ -14305,7 +15358,8 @@
             </a:defPPr>
           </a:lstStyle>
           <a:p xmlns:a="http://schemas.openxmlformats.org/drawingml/2006/main">
-            <a:pPr>
+            <a:pPr algn="l">
+              <a:buNone/>
               <a:defRPr sz="1875" b="0">
                 <a:solidFill>
                   <a:srgbClr val="087B80"/>
@@ -14324,7 +15378,7 @@
                 <a:ea typeface="Consolas"/>
                 <a:cs typeface="Consolas"/>
               </a:rPr>
-              <a:t>App: &lt;AssetList assets={visibleAssets} /&gt;</a:t>
+              <a:t>App: &lt;ProductList products={visibleProducts} /&gt;</a:t>
             </a:r>
           </a:p>
           <a:p xmlns:a="http://schemas.openxmlformats.org/drawingml/2006/main">
@@ -14333,7 +15387,8 @@
             </a:r>
           </a:p>
           <a:p xmlns:a="http://schemas.openxmlformats.org/drawingml/2006/main">
-            <a:pPr>
+            <a:pPr algn="l">
+              <a:buNone/>
               <a:defRPr sz="1875" b="0">
                 <a:solidFill>
                   <a:srgbClr val="087B80"/>
@@ -14352,7 +15407,7 @@
                 <a:ea typeface="Consolas"/>
                 <a:cs typeface="Consolas"/>
               </a:rPr>
-              <a:t>AssetList: &lt;AssetCard asset={asset} /&gt;</a:t>
+              <a:t>ProductList: &lt;ProductCard product={product} /&gt;</a:t>
             </a:r>
           </a:p>
           <a:p xmlns:a="http://schemas.openxmlformats.org/drawingml/2006/main">
@@ -14361,7 +15416,8 @@
             </a:r>
           </a:p>
           <a:p xmlns:a="http://schemas.openxmlformats.org/drawingml/2006/main">
-            <a:pPr>
+            <a:pPr algn="l">
+              <a:buNone/>
               <a:defRPr sz="1875" b="0">
                 <a:solidFill>
                   <a:srgbClr val="087B80"/>
@@ -14380,7 +15436,7 @@
                 <a:ea typeface="Consolas"/>
                 <a:cs typeface="Consolas"/>
               </a:rPr>
-              <a:t>AssetCard: &lt;StatusBadge status={asset.status} /&gt;</a:t>
+              <a:t>ProductCard: &lt;StockBadge inStock={product.inStock} /&gt;</a:t>
             </a:r>
           </a:p>
         </p:txBody>
@@ -14415,7 +15471,7 @@
         <p:txBody>
           <a:bodyPr xmlns:a="http://schemas.openxmlformats.org/drawingml/2006/main"/>
           <a:lstStyle xmlns:a="http://schemas.openxmlformats.org/drawingml/2006/main">
-            <a:defPPr>
+            <a:defPPr algn="l">
               <a:defRPr sz="1725" b="1">
                 <a:solidFill>
                   <a:srgbClr val="85551E"/>
@@ -14427,7 +15483,8 @@
             </a:defPPr>
           </a:lstStyle>
           <a:p xmlns:a="http://schemas.openxmlformats.org/drawingml/2006/main">
-            <a:pPr>
+            <a:pPr algn="l">
+              <a:buNone/>
               <a:defRPr sz="1725" b="1">
                 <a:solidFill>
                   <a:srgbClr val="85551E"/>
@@ -14446,7 +15503,7 @@
                 <a:ea typeface="Arial"/>
                 <a:cs typeface="Arial"/>
               </a:rPr>
-              <a:t>Follow one asset from source data to the badge</a:t>
+              <a:t>Follow one product from source data to the badge</a:t>
             </a:r>
           </a:p>
         </p:txBody>
@@ -14481,7 +15538,7 @@
         <p:txBody>
           <a:bodyPr xmlns:a="http://schemas.openxmlformats.org/drawingml/2006/main"/>
           <a:lstStyle xmlns:a="http://schemas.openxmlformats.org/drawingml/2006/main">
-            <a:defPPr>
+            <a:defPPr algn="l">
               <a:defRPr sz="1200" b="0">
                 <a:solidFill>
                   <a:srgbClr val="6B7F8D"/>
@@ -14493,7 +15550,8 @@
             </a:defPPr>
           </a:lstStyle>
           <a:p xmlns:a="http://schemas.openxmlformats.org/drawingml/2006/main">
-            <a:pPr>
+            <a:pPr algn="l">
+              <a:buNone/>
               <a:defRPr sz="1200" b="0">
                 <a:solidFill>
                   <a:srgbClr val="6B7F8D"/>
@@ -14576,7 +15634,7 @@
         <p:txBody>
           <a:bodyPr xmlns:a="http://schemas.openxmlformats.org/drawingml/2006/main"/>
           <a:lstStyle xmlns:a="http://schemas.openxmlformats.org/drawingml/2006/main">
-            <a:defPPr>
+            <a:defPPr algn="l">
               <a:defRPr sz="1275" b="1">
                 <a:solidFill>
                   <a:srgbClr val="007D83"/>
@@ -14588,7 +15646,8 @@
             </a:defPPr>
           </a:lstStyle>
           <a:p xmlns:a="http://schemas.openxmlformats.org/drawingml/2006/main">
-            <a:pPr>
+            <a:pPr algn="l">
+              <a:buNone/>
               <a:defRPr sz="1275" b="1">
                 <a:solidFill>
                   <a:srgbClr val="007D83"/>
@@ -14642,7 +15701,7 @@
         <p:txBody>
           <a:bodyPr xmlns:a="http://schemas.openxmlformats.org/drawingml/2006/main"/>
           <a:lstStyle xmlns:a="http://schemas.openxmlformats.org/drawingml/2006/main">
-            <a:defPPr>
+            <a:defPPr algn="l">
               <a:defRPr sz="3300" b="1">
                 <a:solidFill>
                   <a:srgbClr val="203B4D"/>
@@ -14654,7 +15713,8 @@
             </a:defPPr>
           </a:lstStyle>
           <a:p xmlns:a="http://schemas.openxmlformats.org/drawingml/2006/main">
-            <a:pPr>
+            <a:pPr algn="l">
+              <a:buNone/>
               <a:defRPr sz="3300" b="1">
                 <a:solidFill>
                   <a:srgbClr val="203B4D"/>
@@ -14708,7 +15768,7 @@
         <p:txBody>
           <a:bodyPr xmlns:a="http://schemas.openxmlformats.org/drawingml/2006/main"/>
           <a:lstStyle xmlns:a="http://schemas.openxmlformats.org/drawingml/2006/main">
-            <a:defPPr>
+            <a:defPPr algn="l">
               <a:defRPr sz="2025" b="0">
                 <a:solidFill>
                   <a:srgbClr val="203B4D"/>
@@ -14720,7 +15780,8 @@
             </a:defPPr>
           </a:lstStyle>
           <a:p xmlns:a="http://schemas.openxmlformats.org/drawingml/2006/main">
-            <a:pPr>
+            <a:pPr algn="l">
+              <a:buNone/>
               <a:defRPr sz="2025" b="0">
                 <a:solidFill>
                   <a:srgbClr val="203B4D"/>
@@ -14739,11 +15800,12 @@
                 <a:ea typeface="Arial"/>
                 <a:cs typeface="Arial"/>
               </a:rPr>
-              <a:t>Change selectedStatus to Available in App.</a:t>
-            </a:r>
-          </a:p>
-          <a:p xmlns:a="http://schemas.openxmlformats.org/drawingml/2006/main">
-            <a:pPr>
+              <a:t>Change selectedStock to In stock in App.</a:t>
+            </a:r>
+          </a:p>
+          <a:p xmlns:a="http://schemas.openxmlformats.org/drawingml/2006/main">
+            <a:pPr algn="l">
+              <a:buNone/>
               <a:defRPr sz="2025" b="0">
                 <a:solidFill>
                   <a:srgbClr val="203B4D"/>
@@ -14762,11 +15824,12 @@
                 <a:ea typeface="Arial"/>
                 <a:cs typeface="Arial"/>
               </a:rPr>
-              <a:t>Change showLocation to false and save.</a:t>
-            </a:r>
-          </a:p>
-          <a:p xmlns:a="http://schemas.openxmlformats.org/drawingml/2006/main">
-            <a:pPr>
+              <a:t>Change showCategory to false and save.</a:t>
+            </a:r>
+          </a:p>
+          <a:p xmlns:a="http://schemas.openxmlformats.org/drawingml/2006/main">
+            <a:pPr algn="l">
+              <a:buNone/>
               <a:defRPr sz="2025" b="0">
                 <a:solidFill>
                   <a:srgbClr val="203B4D"/>
@@ -14785,11 +15848,12 @@
                 <a:ea typeface="Arial"/>
                 <a:cs typeface="Arial"/>
               </a:rPr>
-              <a:t>Pass an empty array to the inventory AssetList.</a:t>
-            </a:r>
-          </a:p>
-          <a:p xmlns:a="http://schemas.openxmlformats.org/drawingml/2006/main">
-            <a:pPr>
+              <a:t>Pass an empty array to the inventory ProductList.</a:t>
+            </a:r>
+          </a:p>
+          <a:p xmlns:a="http://schemas.openxmlformats.org/drawingml/2006/main">
+            <a:pPr algn="l">
+              <a:buNone/>
               <a:defRPr sz="2025" b="0">
                 <a:solidFill>
                   <a:srgbClr val="203B4D"/>
@@ -14843,7 +15907,7 @@
         <p:txBody>
           <a:bodyPr xmlns:a="http://schemas.openxmlformats.org/drawingml/2006/main"/>
           <a:lstStyle xmlns:a="http://schemas.openxmlformats.org/drawingml/2006/main">
-            <a:defPPr>
+            <a:defPPr algn="l">
               <a:defRPr sz="1875" b="0">
                 <a:solidFill>
                   <a:srgbClr val="087B80"/>
@@ -14855,7 +15919,8 @@
             </a:defPPr>
           </a:lstStyle>
           <a:p xmlns:a="http://schemas.openxmlformats.org/drawingml/2006/main">
-            <a:pPr>
+            <a:pPr algn="l">
+              <a:buNone/>
               <a:defRPr sz="1875" b="0">
                 <a:solidFill>
                   <a:srgbClr val="087B80"/>
@@ -14874,11 +15939,12 @@
                 <a:ea typeface="Consolas"/>
                 <a:cs typeface="Consolas"/>
               </a:rPr>
-              <a:t>const selectedStatus = 'Available';</a:t>
-            </a:r>
-          </a:p>
-          <a:p xmlns:a="http://schemas.openxmlformats.org/drawingml/2006/main">
-            <a:pPr>
+              <a:t>const selectedStock = 'In stock';</a:t>
+            </a:r>
+          </a:p>
+          <a:p xmlns:a="http://schemas.openxmlformats.org/drawingml/2006/main">
+            <a:pPr algn="l">
+              <a:buNone/>
               <a:defRPr sz="1875" b="0">
                 <a:solidFill>
                   <a:srgbClr val="087B80"/>
@@ -14897,7 +15963,7 @@
                 <a:ea typeface="Consolas"/>
                 <a:cs typeface="Consolas"/>
               </a:rPr>
-              <a:t>const showLocation = false;</a:t>
+              <a:t>const showCategory = false;</a:t>
             </a:r>
           </a:p>
           <a:p xmlns:a="http://schemas.openxmlformats.org/drawingml/2006/main">
@@ -14906,7 +15972,8 @@
             </a:r>
           </a:p>
           <a:p xmlns:a="http://schemas.openxmlformats.org/drawingml/2006/main">
-            <a:pPr>
+            <a:pPr algn="l">
+              <a:buNone/>
               <a:defRPr sz="1875" b="0">
                 <a:solidFill>
                   <a:srgbClr val="087B80"/>
@@ -14929,7 +15996,8 @@
             </a:r>
           </a:p>
           <a:p xmlns:a="http://schemas.openxmlformats.org/drawingml/2006/main">
-            <a:pPr>
+            <a:pPr algn="l">
+              <a:buNone/>
               <a:defRPr sz="1875" b="0">
                 <a:solidFill>
                   <a:srgbClr val="087B80"/>
@@ -14948,7 +16016,7 @@
                 <a:ea typeface="Consolas"/>
                 <a:cs typeface="Consolas"/>
               </a:rPr>
-              <a:t>&lt;AssetList assets={[]} /&gt;</a:t>
+              <a:t>&lt;ProductList products={[]} /&gt;</a:t>
             </a:r>
           </a:p>
         </p:txBody>
@@ -14983,7 +16051,7 @@
         <p:txBody>
           <a:bodyPr xmlns:a="http://schemas.openxmlformats.org/drawingml/2006/main"/>
           <a:lstStyle xmlns:a="http://schemas.openxmlformats.org/drawingml/2006/main">
-            <a:defPPr>
+            <a:defPPr algn="l">
               <a:defRPr sz="1725" b="1">
                 <a:solidFill>
                   <a:srgbClr val="85551E"/>
@@ -14995,7 +16063,8 @@
             </a:defPPr>
           </a:lstStyle>
           <a:p xmlns:a="http://schemas.openxmlformats.org/drawingml/2006/main">
-            <a:pPr>
+            <a:pPr algn="l">
+              <a:buNone/>
               <a:defRPr sz="1725" b="1">
                 <a:solidFill>
                   <a:srgbClr val="85551E"/>
@@ -15014,7 +16083,7 @@
                 <a:ea typeface="Arial"/>
                 <a:cs typeface="Arial"/>
               </a:rPr>
-              <a:t>Available: two cards. Empty array: fallback message.</a:t>
+              <a:t>In stock: two cards. Empty array: fallback message.</a:t>
             </a:r>
           </a:p>
         </p:txBody>
@@ -15049,7 +16118,7 @@
         <p:txBody>
           <a:bodyPr xmlns:a="http://schemas.openxmlformats.org/drawingml/2006/main"/>
           <a:lstStyle xmlns:a="http://schemas.openxmlformats.org/drawingml/2006/main">
-            <a:defPPr>
+            <a:defPPr algn="l">
               <a:defRPr sz="1200" b="0">
                 <a:solidFill>
                   <a:srgbClr val="6B7F8D"/>
@@ -15061,7 +16130,8 @@
             </a:defPPr>
           </a:lstStyle>
           <a:p xmlns:a="http://schemas.openxmlformats.org/drawingml/2006/main">
-            <a:pPr>
+            <a:pPr algn="l">
+              <a:buNone/>
               <a:defRPr sz="1200" b="0">
                 <a:solidFill>
                   <a:srgbClr val="6B7F8D"/>
@@ -15144,7 +16214,7 @@
         <p:txBody>
           <a:bodyPr xmlns:a="http://schemas.openxmlformats.org/drawingml/2006/main"/>
           <a:lstStyle xmlns:a="http://schemas.openxmlformats.org/drawingml/2006/main">
-            <a:defPPr>
+            <a:defPPr algn="l">
               <a:defRPr sz="1275" b="1">
                 <a:solidFill>
                   <a:srgbClr val="007D83"/>
@@ -15156,7 +16226,8 @@
             </a:defPPr>
           </a:lstStyle>
           <a:p xmlns:a="http://schemas.openxmlformats.org/drawingml/2006/main">
-            <a:pPr>
+            <a:pPr algn="l">
+              <a:buNone/>
               <a:defRPr sz="1275" b="1">
                 <a:solidFill>
                   <a:srgbClr val="007D83"/>
@@ -15210,7 +16281,7 @@
         <p:txBody>
           <a:bodyPr xmlns:a="http://schemas.openxmlformats.org/drawingml/2006/main"/>
           <a:lstStyle xmlns:a="http://schemas.openxmlformats.org/drawingml/2006/main">
-            <a:defPPr>
+            <a:defPPr algn="l">
               <a:defRPr sz="3300" b="1">
                 <a:solidFill>
                   <a:srgbClr val="203B4D"/>
@@ -15222,7 +16293,8 @@
             </a:defPPr>
           </a:lstStyle>
           <a:p xmlns:a="http://schemas.openxmlformats.org/drawingml/2006/main">
-            <a:pPr>
+            <a:pPr algn="l">
+              <a:buNone/>
               <a:defRPr sz="3300" b="1">
                 <a:solidFill>
                   <a:srgbClr val="203B4D"/>
@@ -15241,7 +16313,7 @@
                 <a:ea typeface="Arial"/>
                 <a:cs typeface="Arial"/>
               </a:rPr>
-              <a:t>A serial number on every card</a:t>
+              <a:t>A brand on every card</a:t>
             </a:r>
           </a:p>
         </p:txBody>
@@ -15276,7 +16348,7 @@
         <p:txBody>
           <a:bodyPr xmlns:a="http://schemas.openxmlformats.org/drawingml/2006/main"/>
           <a:lstStyle xmlns:a="http://schemas.openxmlformats.org/drawingml/2006/main">
-            <a:defPPr>
+            <a:defPPr algn="l">
               <a:defRPr sz="2025" b="0">
                 <a:solidFill>
                   <a:srgbClr val="203B4D"/>
@@ -15288,7 +16360,8 @@
             </a:defPPr>
           </a:lstStyle>
           <a:p xmlns:a="http://schemas.openxmlformats.org/drawingml/2006/main">
-            <a:pPr>
+            <a:pPr algn="l">
+              <a:buNone/>
               <a:defRPr sz="2025" b="0">
                 <a:solidFill>
                   <a:srgbClr val="203B4D"/>
@@ -15307,11 +16380,12 @@
                 <a:ea typeface="Arial"/>
                 <a:cs typeface="Arial"/>
               </a:rPr>
-              <a:t>Add serialNumber to each asset object.</a:t>
-            </a:r>
-          </a:p>
-          <a:p xmlns:a="http://schemas.openxmlformats.org/drawingml/2006/main">
-            <a:pPr>
+              <a:t>Add brand to each product object.</a:t>
+            </a:r>
+          </a:p>
+          <a:p xmlns:a="http://schemas.openxmlformats.org/drawingml/2006/main">
+            <a:pPr algn="l">
+              <a:buNone/>
               <a:defRPr sz="2025" b="0">
                 <a:solidFill>
                   <a:srgbClr val="203B4D"/>
@@ -15330,11 +16404,12 @@
                 <a:ea typeface="Arial"/>
                 <a:cs typeface="Arial"/>
               </a:rPr>
-              <a:t>Display it in AssetCard.</a:t>
-            </a:r>
-          </a:p>
-          <a:p xmlns:a="http://schemas.openxmlformats.org/drawingml/2006/main">
-            <a:pPr>
+              <a:t>Display it in ProductCard.</a:t>
+            </a:r>
+          </a:p>
+          <a:p xmlns:a="http://schemas.openxmlformats.org/drawingml/2006/main">
+            <a:pPr algn="l">
+              <a:buNone/>
               <a:defRPr sz="2025" b="0">
                 <a:solidFill>
                   <a:srgbClr val="203B4D"/>
@@ -15353,11 +16428,12 @@
                 <a:ea typeface="Arial"/>
                 <a:cs typeface="Arial"/>
               </a:rPr>
-              <a:t>Pass showSerialNumber through the parent and list.</a:t>
-            </a:r>
-          </a:p>
-          <a:p xmlns:a="http://schemas.openxmlformats.org/drawingml/2006/main">
-            <a:pPr>
+              <a:t>Pass showBrand through the parent and list.</a:t>
+            </a:r>
+          </a:p>
+          <a:p xmlns:a="http://schemas.openxmlformats.org/drawingml/2006/main">
+            <a:pPr algn="l">
+              <a:buNone/>
               <a:defRPr sz="2025" b="0">
                 <a:solidFill>
                   <a:srgbClr val="203B4D"/>
@@ -15411,7 +16487,7 @@
         <p:txBody>
           <a:bodyPr xmlns:a="http://schemas.openxmlformats.org/drawingml/2006/main"/>
           <a:lstStyle xmlns:a="http://schemas.openxmlformats.org/drawingml/2006/main">
-            <a:defPPr>
+            <a:defPPr algn="l">
               <a:defRPr sz="1875" b="0">
                 <a:solidFill>
                   <a:srgbClr val="087B80"/>
@@ -15423,7 +16499,8 @@
             </a:defPPr>
           </a:lstStyle>
           <a:p xmlns:a="http://schemas.openxmlformats.org/drawingml/2006/main">
-            <a:pPr>
+            <a:pPr algn="l">
+              <a:buNone/>
               <a:defRPr sz="1875" b="0">
                 <a:solidFill>
                   <a:srgbClr val="087B80"/>
@@ -15442,11 +16519,12 @@
                 <a:ea typeface="Consolas"/>
                 <a:cs typeface="Consolas"/>
               </a:rPr>
-              <a:t>// AssetCard JSX excerpt:</a:t>
-            </a:r>
-          </a:p>
-          <a:p xmlns:a="http://schemas.openxmlformats.org/drawingml/2006/main">
-            <a:pPr>
+              <a:t>// ProductCard JSX excerpt:</a:t>
+            </a:r>
+          </a:p>
+          <a:p xmlns:a="http://schemas.openxmlformats.org/drawingml/2006/main">
+            <a:pPr algn="l">
+              <a:buNone/>
               <a:defRPr sz="1875" b="0">
                 <a:solidFill>
                   <a:srgbClr val="087B80"/>
@@ -15465,11 +16543,12 @@
                 <a:ea typeface="Consolas"/>
                 <a:cs typeface="Consolas"/>
               </a:rPr>
-              <a:t>{showSerialNumber &amp;&amp; (</a:t>
-            </a:r>
-          </a:p>
-          <a:p xmlns:a="http://schemas.openxmlformats.org/drawingml/2006/main">
-            <a:pPr>
+              <a:t>{showBrand &amp;&amp; (</a:t>
+            </a:r>
+          </a:p>
+          <a:p xmlns:a="http://schemas.openxmlformats.org/drawingml/2006/main">
+            <a:pPr algn="l">
+              <a:buNone/>
               <a:defRPr sz="1875" b="0">
                 <a:solidFill>
                   <a:srgbClr val="087B80"/>
@@ -15488,11 +16567,12 @@
                 <a:ea typeface="Consolas"/>
                 <a:cs typeface="Consolas"/>
               </a:rPr>
-              <a:t>  &lt;p&gt;Serial: {asset.serialNumber}&lt;/p&gt;</a:t>
-            </a:r>
-          </a:p>
-          <a:p xmlns:a="http://schemas.openxmlformats.org/drawingml/2006/main">
-            <a:pPr>
+              <a:t>  &lt;p&gt;Brand: {product.brand}&lt;/p&gt;</a:t>
+            </a:r>
+          </a:p>
+          <a:p xmlns:a="http://schemas.openxmlformats.org/drawingml/2006/main">
+            <a:pPr algn="l">
+              <a:buNone/>
               <a:defRPr sz="1875" b="0">
                 <a:solidFill>
                   <a:srgbClr val="087B80"/>
@@ -15546,7 +16626,7 @@
         <p:txBody>
           <a:bodyPr xmlns:a="http://schemas.openxmlformats.org/drawingml/2006/main"/>
           <a:lstStyle xmlns:a="http://schemas.openxmlformats.org/drawingml/2006/main">
-            <a:defPPr>
+            <a:defPPr algn="l">
               <a:defRPr sz="1725" b="1">
                 <a:solidFill>
                   <a:srgbClr val="85551E"/>
@@ -15558,7 +16638,8 @@
             </a:defPPr>
           </a:lstStyle>
           <a:p xmlns:a="http://schemas.openxmlformats.org/drawingml/2006/main">
-            <a:pPr>
+            <a:pPr algn="l">
+              <a:buNone/>
               <a:defRPr sz="1725" b="1">
                 <a:solidFill>
                   <a:srgbClr val="85551E"/>
@@ -15577,7 +16658,7 @@
                 <a:ea typeface="Arial"/>
                 <a:cs typeface="Arial"/>
               </a:rPr>
-              <a:t>A boolean prop controls the serial-number paragraph</a:t>
+              <a:t>A boolean prop controls the brand paragraph</a:t>
             </a:r>
           </a:p>
         </p:txBody>
@@ -15612,7 +16693,7 @@
         <p:txBody>
           <a:bodyPr xmlns:a="http://schemas.openxmlformats.org/drawingml/2006/main"/>
           <a:lstStyle xmlns:a="http://schemas.openxmlformats.org/drawingml/2006/main">
-            <a:defPPr>
+            <a:defPPr algn="l">
               <a:defRPr sz="1200" b="0">
                 <a:solidFill>
                   <a:srgbClr val="6B7F8D"/>
@@ -15624,7 +16705,8 @@
             </a:defPPr>
           </a:lstStyle>
           <a:p xmlns:a="http://schemas.openxmlformats.org/drawingml/2006/main">
-            <a:pPr>
+            <a:pPr algn="l">
+              <a:buNone/>
               <a:defRPr sz="1200" b="0">
                 <a:solidFill>
                   <a:srgbClr val="6B7F8D"/>
@@ -15707,7 +16789,7 @@
         <p:txBody>
           <a:bodyPr xmlns:a="http://schemas.openxmlformats.org/drawingml/2006/main"/>
           <a:lstStyle xmlns:a="http://schemas.openxmlformats.org/drawingml/2006/main">
-            <a:defPPr>
+            <a:defPPr algn="l">
               <a:defRPr sz="1275" b="1">
                 <a:solidFill>
                   <a:srgbClr val="007D83"/>
@@ -15719,7 +16801,8 @@
             </a:defPPr>
           </a:lstStyle>
           <a:p xmlns:a="http://schemas.openxmlformats.org/drawingml/2006/main">
-            <a:pPr>
+            <a:pPr algn="l">
+              <a:buNone/>
               <a:defRPr sz="1275" b="1">
                 <a:solidFill>
                   <a:srgbClr val="007D83"/>
@@ -15773,7 +16856,7 @@
         <p:txBody>
           <a:bodyPr xmlns:a="http://schemas.openxmlformats.org/drawingml/2006/main"/>
           <a:lstStyle xmlns:a="http://schemas.openxmlformats.org/drawingml/2006/main">
-            <a:defPPr>
+            <a:defPPr algn="l">
               <a:defRPr sz="3300" b="1">
                 <a:solidFill>
                   <a:srgbClr val="203B4D"/>
@@ -15785,7 +16868,8 @@
             </a:defPPr>
           </a:lstStyle>
           <a:p xmlns:a="http://schemas.openxmlformats.org/drawingml/2006/main">
-            <a:pPr>
+            <a:pPr algn="l">
+              <a:buNone/>
               <a:defRPr sz="3300" b="1">
                 <a:solidFill>
                   <a:srgbClr val="203B4D"/>
@@ -15839,7 +16923,7 @@
         <p:txBody>
           <a:bodyPr xmlns:a="http://schemas.openxmlformats.org/drawingml/2006/main"/>
           <a:lstStyle xmlns:a="http://schemas.openxmlformats.org/drawingml/2006/main">
-            <a:defPPr>
+            <a:defPPr algn="l">
               <a:defRPr sz="2325" b="0">
                 <a:solidFill>
                   <a:srgbClr val="203B4D"/>
@@ -15851,7 +16935,8 @@
             </a:defPPr>
           </a:lstStyle>
           <a:p xmlns:a="http://schemas.openxmlformats.org/drawingml/2006/main">
-            <a:pPr>
+            <a:pPr algn="l">
+              <a:buNone/>
               <a:defRPr sz="2325" b="0">
                 <a:solidFill>
                   <a:srgbClr val="203B4D"/>
@@ -15874,7 +16959,8 @@
             </a:r>
           </a:p>
           <a:p xmlns:a="http://schemas.openxmlformats.org/drawingml/2006/main">
-            <a:pPr>
+            <a:pPr algn="l">
+              <a:buNone/>
               <a:defRPr sz="2325" b="0">
                 <a:solidFill>
                   <a:srgbClr val="203B4D"/>
@@ -15897,7 +16983,8 @@
             </a:r>
           </a:p>
           <a:p xmlns:a="http://schemas.openxmlformats.org/drawingml/2006/main">
-            <a:pPr>
+            <a:pPr algn="l">
+              <a:buNone/>
               <a:defRPr sz="2325" b="0">
                 <a:solidFill>
                   <a:srgbClr val="203B4D"/>
@@ -15920,7 +17007,8 @@
             </a:r>
           </a:p>
           <a:p xmlns:a="http://schemas.openxmlformats.org/drawingml/2006/main">
-            <a:pPr>
+            <a:pPr algn="l">
+              <a:buNone/>
               <a:defRPr sz="2325" b="0">
                 <a:solidFill>
                   <a:srgbClr val="203B4D"/>
@@ -15943,7 +17031,8 @@
             </a:r>
           </a:p>
           <a:p xmlns:a="http://schemas.openxmlformats.org/drawingml/2006/main">
-            <a:pPr>
+            <a:pPr algn="l">
+              <a:buNone/>
               <a:defRPr sz="2325" b="0">
                 <a:solidFill>
                   <a:srgbClr val="203B4D"/>
@@ -15966,7 +17055,8 @@
             </a:r>
           </a:p>
           <a:p xmlns:a="http://schemas.openxmlformats.org/drawingml/2006/main">
-            <a:pPr>
+            <a:pPr algn="l">
+              <a:buNone/>
               <a:defRPr sz="2325" b="0">
                 <a:solidFill>
                   <a:srgbClr val="203B4D"/>
@@ -16020,7 +17110,7 @@
         <p:txBody>
           <a:bodyPr xmlns:a="http://schemas.openxmlformats.org/drawingml/2006/main"/>
           <a:lstStyle xmlns:a="http://schemas.openxmlformats.org/drawingml/2006/main">
-            <a:defPPr>
+            <a:defPPr algn="l">
               <a:defRPr sz="1200" b="0">
                 <a:solidFill>
                   <a:srgbClr val="6B7F8D"/>
@@ -16032,7 +17122,8 @@
             </a:defPPr>
           </a:lstStyle>
           <a:p xmlns:a="http://schemas.openxmlformats.org/drawingml/2006/main">
-            <a:pPr>
+            <a:pPr algn="l">
+              <a:buNone/>
               <a:defRPr sz="1200" b="0">
                 <a:solidFill>
                   <a:srgbClr val="6B7F8D"/>
@@ -16115,7 +17206,7 @@
         <p:txBody>
           <a:bodyPr xmlns:a="http://schemas.openxmlformats.org/drawingml/2006/main"/>
           <a:lstStyle xmlns:a="http://schemas.openxmlformats.org/drawingml/2006/main">
-            <a:defPPr>
+            <a:defPPr algn="l">
               <a:defRPr sz="1275" b="1">
                 <a:solidFill>
                   <a:srgbClr val="92E8DF"/>
@@ -16127,7 +17218,8 @@
             </a:defPPr>
           </a:lstStyle>
           <a:p xmlns:a="http://schemas.openxmlformats.org/drawingml/2006/main">
-            <a:pPr>
+            <a:pPr algn="l">
+              <a:buNone/>
               <a:defRPr sz="1275" b="1">
                 <a:solidFill>
                   <a:srgbClr val="92E8DF"/>
@@ -16181,7 +17273,7 @@
         <p:txBody>
           <a:bodyPr xmlns:a="http://schemas.openxmlformats.org/drawingml/2006/main"/>
           <a:lstStyle xmlns:a="http://schemas.openxmlformats.org/drawingml/2006/main">
-            <a:defPPr>
+            <a:defPPr algn="l">
               <a:defRPr sz="3300" b="1">
                 <a:solidFill>
                   <a:srgbClr val="FFFFFF"/>
@@ -16193,7 +17285,8 @@
             </a:defPPr>
           </a:lstStyle>
           <a:p xmlns:a="http://schemas.openxmlformats.org/drawingml/2006/main">
-            <a:pPr>
+            <a:pPr algn="l">
+              <a:buNone/>
               <a:defRPr sz="3300" b="1">
                 <a:solidFill>
                   <a:srgbClr val="FFFFFF"/>
@@ -16247,7 +17340,7 @@
         <p:txBody>
           <a:bodyPr xmlns:a="http://schemas.openxmlformats.org/drawingml/2006/main"/>
           <a:lstStyle xmlns:a="http://schemas.openxmlformats.org/drawingml/2006/main">
-            <a:defPPr>
+            <a:defPPr algn="l">
               <a:defRPr sz="2325" b="0">
                 <a:solidFill>
                   <a:srgbClr val="FFFFFF"/>
@@ -16259,7 +17352,8 @@
             </a:defPPr>
           </a:lstStyle>
           <a:p xmlns:a="http://schemas.openxmlformats.org/drawingml/2006/main">
-            <a:pPr>
+            <a:pPr algn="l">
+              <a:buNone/>
               <a:defRPr sz="2325" b="0">
                 <a:solidFill>
                   <a:srgbClr val="FFFFFF"/>
@@ -16282,7 +17376,8 @@
             </a:r>
           </a:p>
           <a:p xmlns:a="http://schemas.openxmlformats.org/drawingml/2006/main">
-            <a:pPr>
+            <a:pPr algn="l">
+              <a:buNone/>
               <a:defRPr sz="2325" b="0">
                 <a:solidFill>
                   <a:srgbClr val="FFFFFF"/>
@@ -16305,7 +17400,8 @@
             </a:r>
           </a:p>
           <a:p xmlns:a="http://schemas.openxmlformats.org/drawingml/2006/main">
-            <a:pPr>
+            <a:pPr algn="l">
+              <a:buNone/>
               <a:defRPr sz="2325" b="0">
                 <a:solidFill>
                   <a:srgbClr val="FFFFFF"/>
@@ -16328,7 +17424,8 @@
             </a:r>
           </a:p>
           <a:p xmlns:a="http://schemas.openxmlformats.org/drawingml/2006/main">
-            <a:pPr>
+            <a:pPr algn="l">
+              <a:buNone/>
               <a:defRPr sz="2325" b="0">
                 <a:solidFill>
                   <a:srgbClr val="FFFFFF"/>
@@ -16382,7 +17479,7 @@
         <p:txBody>
           <a:bodyPr xmlns:a="http://schemas.openxmlformats.org/drawingml/2006/main"/>
           <a:lstStyle xmlns:a="http://schemas.openxmlformats.org/drawingml/2006/main">
-            <a:defPPr>
+            <a:defPPr algn="l">
               <a:defRPr sz="1200" b="0">
                 <a:solidFill>
                   <a:srgbClr val="92B4C2"/>
@@ -16394,7 +17491,8 @@
             </a:defPPr>
           </a:lstStyle>
           <a:p xmlns:a="http://schemas.openxmlformats.org/drawingml/2006/main">
-            <a:pPr>
+            <a:pPr algn="l">
+              <a:buNone/>
               <a:defRPr sz="1200" b="0">
                 <a:solidFill>
                   <a:srgbClr val="92B4C2"/>
@@ -16477,7 +17575,7 @@
         <p:txBody>
           <a:bodyPr xmlns:a="http://schemas.openxmlformats.org/drawingml/2006/main"/>
           <a:lstStyle xmlns:a="http://schemas.openxmlformats.org/drawingml/2006/main">
-            <a:defPPr>
+            <a:defPPr algn="l">
               <a:defRPr sz="1275" b="1">
                 <a:solidFill>
                   <a:srgbClr val="007D83"/>
@@ -16489,7 +17587,8 @@
             </a:defPPr>
           </a:lstStyle>
           <a:p xmlns:a="http://schemas.openxmlformats.org/drawingml/2006/main">
-            <a:pPr>
+            <a:pPr algn="l">
+              <a:buNone/>
               <a:defRPr sz="1275" b="1">
                 <a:solidFill>
                   <a:srgbClr val="007D83"/>
@@ -16543,7 +17642,7 @@
         <p:txBody>
           <a:bodyPr xmlns:a="http://schemas.openxmlformats.org/drawingml/2006/main"/>
           <a:lstStyle xmlns:a="http://schemas.openxmlformats.org/drawingml/2006/main">
-            <a:defPPr>
+            <a:defPPr algn="l">
               <a:defRPr sz="3300" b="1">
                 <a:solidFill>
                   <a:srgbClr val="203B4D"/>
@@ -16555,7 +17654,8 @@
             </a:defPPr>
           </a:lstStyle>
           <a:p xmlns:a="http://schemas.openxmlformats.org/drawingml/2006/main">
-            <a:pPr>
+            <a:pPr algn="l">
+              <a:buNone/>
               <a:defRPr sz="3300" b="1">
                 <a:solidFill>
                   <a:srgbClr val="203B4D"/>
@@ -16609,7 +17709,7 @@
         <p:txBody>
           <a:bodyPr xmlns:a="http://schemas.openxmlformats.org/drawingml/2006/main"/>
           <a:lstStyle xmlns:a="http://schemas.openxmlformats.org/drawingml/2006/main">
-            <a:defPPr>
+            <a:defPPr algn="l">
               <a:defRPr sz="2325" b="0">
                 <a:solidFill>
                   <a:srgbClr val="203B4D"/>
@@ -16621,7 +17721,8 @@
             </a:defPPr>
           </a:lstStyle>
           <a:p xmlns:a="http://schemas.openxmlformats.org/drawingml/2006/main">
-            <a:pPr>
+            <a:pPr algn="l">
+              <a:buNone/>
               <a:defRPr sz="2325" b="0">
                 <a:solidFill>
                   <a:srgbClr val="203B4D"/>
@@ -16644,7 +17745,8 @@
             </a:r>
           </a:p>
           <a:p xmlns:a="http://schemas.openxmlformats.org/drawingml/2006/main">
-            <a:pPr>
+            <a:pPr algn="l">
+              <a:buNone/>
               <a:defRPr sz="2325" b="0">
                 <a:solidFill>
                   <a:srgbClr val="203B4D"/>
@@ -16667,7 +17769,8 @@
             </a:r>
           </a:p>
           <a:p xmlns:a="http://schemas.openxmlformats.org/drawingml/2006/main">
-            <a:pPr>
+            <a:pPr algn="l">
+              <a:buNone/>
               <a:defRPr sz="2325" b="0">
                 <a:solidFill>
                   <a:srgbClr val="203B4D"/>
@@ -16690,7 +17793,8 @@
             </a:r>
           </a:p>
           <a:p xmlns:a="http://schemas.openxmlformats.org/drawingml/2006/main">
-            <a:pPr>
+            <a:pPr algn="l">
+              <a:buNone/>
               <a:defRPr sz="2325" b="0">
                 <a:solidFill>
                   <a:srgbClr val="203B4D"/>
@@ -16713,7 +17817,8 @@
             </a:r>
           </a:p>
           <a:p xmlns:a="http://schemas.openxmlformats.org/drawingml/2006/main">
-            <a:pPr>
+            <a:pPr algn="l">
+              <a:buNone/>
               <a:defRPr sz="2325" b="0">
                 <a:solidFill>
                   <a:srgbClr val="203B4D"/>
@@ -16736,7 +17841,8 @@
             </a:r>
           </a:p>
           <a:p xmlns:a="http://schemas.openxmlformats.org/drawingml/2006/main">
-            <a:pPr>
+            <a:pPr algn="l">
+              <a:buNone/>
               <a:defRPr sz="2325" b="0">
                 <a:solidFill>
                   <a:srgbClr val="203B4D"/>
@@ -16755,11 +17861,12 @@
                 <a:ea typeface="Arial"/>
                 <a:cs typeface="Arial"/>
               </a:rPr>
-              <a:t>06  Asset Dashboard hands-on</a:t>
-            </a:r>
-          </a:p>
-          <a:p xmlns:a="http://schemas.openxmlformats.org/drawingml/2006/main">
-            <a:pPr>
+              <a:t>06  Product Catalog hands-on</a:t>
+            </a:r>
+          </a:p>
+          <a:p xmlns:a="http://schemas.openxmlformats.org/drawingml/2006/main">
+            <a:pPr algn="l">
+              <a:buNone/>
               <a:defRPr sz="2325" b="0">
                 <a:solidFill>
                   <a:srgbClr val="203B4D"/>
@@ -16813,7 +17920,7 @@
         <p:txBody>
           <a:bodyPr xmlns:a="http://schemas.openxmlformats.org/drawingml/2006/main"/>
           <a:lstStyle xmlns:a="http://schemas.openxmlformats.org/drawingml/2006/main">
-            <a:defPPr>
+            <a:defPPr algn="l">
               <a:defRPr sz="1200" b="0">
                 <a:solidFill>
                   <a:srgbClr val="6B7F8D"/>
@@ -16825,7 +17932,8 @@
             </a:defPPr>
           </a:lstStyle>
           <a:p xmlns:a="http://schemas.openxmlformats.org/drawingml/2006/main">
-            <a:pPr>
+            <a:pPr algn="l">
+              <a:buNone/>
               <a:defRPr sz="1200" b="0">
                 <a:solidFill>
                   <a:srgbClr val="6B7F8D"/>
@@ -16908,7 +18016,7 @@
         <p:txBody>
           <a:bodyPr xmlns:a="http://schemas.openxmlformats.org/drawingml/2006/main"/>
           <a:lstStyle xmlns:a="http://schemas.openxmlformats.org/drawingml/2006/main">
-            <a:defPPr>
+            <a:defPPr algn="l">
               <a:defRPr sz="1275" b="1">
                 <a:solidFill>
                   <a:srgbClr val="007D83"/>
@@ -16920,7 +18028,8 @@
             </a:defPPr>
           </a:lstStyle>
           <a:p xmlns:a="http://schemas.openxmlformats.org/drawingml/2006/main">
-            <a:pPr>
+            <a:pPr algn="l">
+              <a:buNone/>
               <a:defRPr sz="1275" b="1">
                 <a:solidFill>
                   <a:srgbClr val="007D83"/>
@@ -16974,7 +18083,7 @@
         <p:txBody>
           <a:bodyPr xmlns:a="http://schemas.openxmlformats.org/drawingml/2006/main"/>
           <a:lstStyle xmlns:a="http://schemas.openxmlformats.org/drawingml/2006/main">
-            <a:defPPr>
+            <a:defPPr algn="l">
               <a:defRPr sz="3300" b="1">
                 <a:solidFill>
                   <a:srgbClr val="203B4D"/>
@@ -16986,7 +18095,8 @@
             </a:defPPr>
           </a:lstStyle>
           <a:p xmlns:a="http://schemas.openxmlformats.org/drawingml/2006/main">
-            <a:pPr>
+            <a:pPr algn="l">
+              <a:buNone/>
               <a:defRPr sz="3300" b="1">
                 <a:solidFill>
                   <a:srgbClr val="203B4D"/>
@@ -17040,7 +18150,7 @@
         <p:txBody>
           <a:bodyPr xmlns:a="http://schemas.openxmlformats.org/drawingml/2006/main"/>
           <a:lstStyle xmlns:a="http://schemas.openxmlformats.org/drawingml/2006/main">
-            <a:defPPr>
+            <a:defPPr algn="l">
               <a:defRPr sz="2325" b="0">
                 <a:solidFill>
                   <a:srgbClr val="203B4D"/>
@@ -17052,7 +18162,8 @@
             </a:defPPr>
           </a:lstStyle>
           <a:p xmlns:a="http://schemas.openxmlformats.org/drawingml/2006/main">
-            <a:pPr>
+            <a:pPr algn="l">
+              <a:buNone/>
               <a:defRPr sz="2325" b="0">
                 <a:solidFill>
                   <a:srgbClr val="203B4D"/>
@@ -17071,11 +18182,12 @@
                 <a:ea typeface="Arial"/>
                 <a:cs typeface="Arial"/>
               </a:rPr>
-              <a:t>Extract an AssetDetails component.</a:t>
-            </a:r>
-          </a:p>
-          <a:p xmlns:a="http://schemas.openxmlformats.org/drawingml/2006/main">
-            <a:pPr>
+              <a:t>Extract a ProductDetails component.</a:t>
+            </a:r>
+          </a:p>
+          <a:p xmlns:a="http://schemas.openxmlformats.org/drawingml/2006/main">
+            <a:pPr algn="l">
+              <a:buNone/>
               <a:defRPr sz="2325" b="0">
                 <a:solidFill>
                   <a:srgbClr val="203B4D"/>
@@ -17098,7 +18210,8 @@
             </a:r>
           </a:p>
           <a:p xmlns:a="http://schemas.openxmlformats.org/drawingml/2006/main">
-            <a:pPr>
+            <a:pPr algn="l">
+              <a:buNone/>
               <a:defRPr sz="2325" b="0">
                 <a:solidFill>
                   <a:srgbClr val="203B4D"/>
@@ -17117,7 +18230,7 @@
                 <a:ea typeface="Arial"/>
                 <a:cs typeface="Arial"/>
               </a:rPr>
-              <a:t>Repeat the serial-number exercise.</a:t>
+              <a:t>Repeat the brand exercise.</a:t>
             </a:r>
           </a:p>
           <a:p xmlns:a="http://schemas.openxmlformats.org/drawingml/2006/main">
@@ -17126,7 +18239,8 @@
             </a:r>
           </a:p>
           <a:p xmlns:a="http://schemas.openxmlformats.org/drawingml/2006/main">
-            <a:pPr>
+            <a:pPr algn="l">
+              <a:buNone/>
               <a:defRPr sz="2325" b="0">
                 <a:solidFill>
                   <a:srgbClr val="203B4D"/>
@@ -17149,7 +18263,8 @@
             </a:r>
           </a:p>
           <a:p xmlns:a="http://schemas.openxmlformats.org/drawingml/2006/main">
-            <a:pPr>
+            <a:pPr algn="l">
+              <a:buNone/>
               <a:defRPr sz="2325" b="0">
                 <a:solidFill>
                   <a:srgbClr val="203B4D"/>
@@ -17203,7 +18318,7 @@
         <p:txBody>
           <a:bodyPr xmlns:a="http://schemas.openxmlformats.org/drawingml/2006/main"/>
           <a:lstStyle xmlns:a="http://schemas.openxmlformats.org/drawingml/2006/main">
-            <a:defPPr>
+            <a:defPPr algn="l">
               <a:defRPr sz="1200" b="0">
                 <a:solidFill>
                   <a:srgbClr val="6B7F8D"/>
@@ -17215,7 +18330,8 @@
             </a:defPPr>
           </a:lstStyle>
           <a:p xmlns:a="http://schemas.openxmlformats.org/drawingml/2006/main">
-            <a:pPr>
+            <a:pPr algn="l">
+              <a:buNone/>
               <a:defRPr sz="1200" b="0">
                 <a:solidFill>
                   <a:srgbClr val="6B7F8D"/>
@@ -17298,7 +18414,7 @@
         <p:txBody>
           <a:bodyPr xmlns:a="http://schemas.openxmlformats.org/drawingml/2006/main"/>
           <a:lstStyle xmlns:a="http://schemas.openxmlformats.org/drawingml/2006/main">
-            <a:defPPr>
+            <a:defPPr algn="l">
               <a:defRPr sz="1275" b="1">
                 <a:solidFill>
                   <a:srgbClr val="007D83"/>
@@ -17310,7 +18426,8 @@
             </a:defPPr>
           </a:lstStyle>
           <a:p xmlns:a="http://schemas.openxmlformats.org/drawingml/2006/main">
-            <a:pPr>
+            <a:pPr algn="l">
+              <a:buNone/>
               <a:defRPr sz="1275" b="1">
                 <a:solidFill>
                   <a:srgbClr val="007D83"/>
@@ -17364,7 +18481,7 @@
         <p:txBody>
           <a:bodyPr xmlns:a="http://schemas.openxmlformats.org/drawingml/2006/main"/>
           <a:lstStyle xmlns:a="http://schemas.openxmlformats.org/drawingml/2006/main">
-            <a:defPPr>
+            <a:defPPr algn="l">
               <a:defRPr sz="3300" b="1">
                 <a:solidFill>
                   <a:srgbClr val="203B4D"/>
@@ -17376,7 +18493,8 @@
             </a:defPPr>
           </a:lstStyle>
           <a:p xmlns:a="http://schemas.openxmlformats.org/drawingml/2006/main">
-            <a:pPr>
+            <a:pPr algn="l">
+              <a:buNone/>
               <a:defRPr sz="3300" b="1">
                 <a:solidFill>
                   <a:srgbClr val="203B4D"/>
@@ -17430,7 +18548,7 @@
         <p:txBody>
           <a:bodyPr xmlns:a="http://schemas.openxmlformats.org/drawingml/2006/main"/>
           <a:lstStyle xmlns:a="http://schemas.openxmlformats.org/drawingml/2006/main">
-            <a:defPPr>
+            <a:defPPr algn="l">
               <a:defRPr sz="2025" b="0">
                 <a:solidFill>
                   <a:srgbClr val="203B4D"/>
@@ -17442,7 +18560,8 @@
             </a:defPPr>
           </a:lstStyle>
           <a:p xmlns:a="http://schemas.openxmlformats.org/drawingml/2006/main">
-            <a:pPr>
+            <a:pPr algn="l">
+              <a:buNone/>
               <a:defRPr sz="2025" b="0">
                 <a:solidFill>
                   <a:srgbClr val="203B4D"/>
@@ -17461,11 +18580,12 @@
                 <a:ea typeface="Arial"/>
                 <a:cs typeface="Arial"/>
               </a:rPr>
-              <a:t>An object groups facts about an asset.</a:t>
-            </a:r>
-          </a:p>
-          <a:p xmlns:a="http://schemas.openxmlformats.org/drawingml/2006/main">
-            <a:pPr>
+              <a:t>An object groups facts about a product.</a:t>
+            </a:r>
+          </a:p>
+          <a:p xmlns:a="http://schemas.openxmlformats.org/drawingml/2006/main">
+            <a:pPr algn="l">
+              <a:buNone/>
               <a:defRPr sz="2025" b="0">
                 <a:solidFill>
                   <a:srgbClr val="203B4D"/>
@@ -17488,7 +18608,8 @@
             </a:r>
           </a:p>
           <a:p xmlns:a="http://schemas.openxmlformats.org/drawingml/2006/main">
-            <a:pPr>
+            <a:pPr algn="l">
+              <a:buNone/>
               <a:defRPr sz="2025" b="0">
                 <a:solidFill>
                   <a:srgbClr val="203B4D"/>
@@ -17542,7 +18663,7 @@
         <p:txBody>
           <a:bodyPr xmlns:a="http://schemas.openxmlformats.org/drawingml/2006/main"/>
           <a:lstStyle xmlns:a="http://schemas.openxmlformats.org/drawingml/2006/main">
-            <a:defPPr>
+            <a:defPPr algn="l">
               <a:defRPr sz="1875" b="0">
                 <a:solidFill>
                   <a:srgbClr val="087B80"/>
@@ -17554,7 +18675,8 @@
             </a:defPPr>
           </a:lstStyle>
           <a:p xmlns:a="http://schemas.openxmlformats.org/drawingml/2006/main">
-            <a:pPr>
+            <a:pPr algn="l">
+              <a:buNone/>
               <a:defRPr sz="1875" b="0">
                 <a:solidFill>
                   <a:srgbClr val="087B80"/>
@@ -17573,11 +18695,12 @@
                 <a:ea typeface="Consolas"/>
                 <a:cs typeface="Consolas"/>
               </a:rPr>
-              <a:t>const asset = { name: 'Laptop' };</a:t>
-            </a:r>
-          </a:p>
-          <a:p xmlns:a="http://schemas.openxmlformats.org/drawingml/2006/main">
-            <a:pPr>
+              <a:t>const product = { name: 'Notebook' };</a:t>
+            </a:r>
+          </a:p>
+          <a:p xmlns:a="http://schemas.openxmlformats.org/drawingml/2006/main">
+            <a:pPr algn="l">
+              <a:buNone/>
               <a:defRPr sz="1875" b="0">
                 <a:solidFill>
                   <a:srgbClr val="087B80"/>
@@ -17596,11 +18719,12 @@
                 <a:ea typeface="Consolas"/>
                 <a:cs typeface="Consolas"/>
               </a:rPr>
-              <a:t>function AssetCard({ asset }) {</a:t>
-            </a:r>
-          </a:p>
-          <a:p xmlns:a="http://schemas.openxmlformats.org/drawingml/2006/main">
-            <a:pPr>
+              <a:t>function ProductCard({ product }) {</a:t>
+            </a:r>
+          </a:p>
+          <a:p xmlns:a="http://schemas.openxmlformats.org/drawingml/2006/main">
+            <a:pPr algn="l">
+              <a:buNone/>
               <a:defRPr sz="1875" b="0">
                 <a:solidFill>
                   <a:srgbClr val="087B80"/>
@@ -17619,11 +18743,12 @@
                 <a:ea typeface="Consolas"/>
                 <a:cs typeface="Consolas"/>
               </a:rPr>
-              <a:t>  return &lt;h3&gt;{asset.name}&lt;/h3&gt;;</a:t>
-            </a:r>
-          </a:p>
-          <a:p xmlns:a="http://schemas.openxmlformats.org/drawingml/2006/main">
-            <a:pPr>
+              <a:t>  return &lt;h3&gt;{product.name}&lt;/h3&gt;;</a:t>
+            </a:r>
+          </a:p>
+          <a:p xmlns:a="http://schemas.openxmlformats.org/drawingml/2006/main">
+            <a:pPr algn="l">
+              <a:buNone/>
               <a:defRPr sz="1875" b="0">
                 <a:solidFill>
                   <a:srgbClr val="087B80"/>
@@ -17646,7 +18771,8 @@
             </a:r>
           </a:p>
           <a:p xmlns:a="http://schemas.openxmlformats.org/drawingml/2006/main">
-            <a:pPr>
+            <a:pPr algn="l">
+              <a:buNone/>
               <a:defRPr sz="1875" b="0">
                 <a:solidFill>
                   <a:srgbClr val="087B80"/>
@@ -17665,7 +18791,7 @@
                 <a:ea typeface="Consolas"/>
                 <a:cs typeface="Consolas"/>
               </a:rPr>
-              <a:t>&lt;AssetCard asset={asset} /&gt;</a:t>
+              <a:t>&lt;ProductCard product={product} /&gt;</a:t>
             </a:r>
           </a:p>
         </p:txBody>
@@ -17700,7 +18826,7 @@
         <p:txBody>
           <a:bodyPr xmlns:a="http://schemas.openxmlformats.org/drawingml/2006/main"/>
           <a:lstStyle xmlns:a="http://schemas.openxmlformats.org/drawingml/2006/main">
-            <a:defPPr>
+            <a:defPPr algn="l">
               <a:defRPr sz="1725" b="1">
                 <a:solidFill>
                   <a:srgbClr val="85551E"/>
@@ -17712,7 +18838,8 @@
             </a:defPPr>
           </a:lstStyle>
           <a:p xmlns:a="http://schemas.openxmlformats.org/drawingml/2006/main">
-            <a:pPr>
+            <a:pPr algn="l">
+              <a:buNone/>
               <a:defRPr sz="1725" b="1">
                 <a:solidFill>
                   <a:srgbClr val="85551E"/>
@@ -17731,7 +18858,7 @@
                 <a:ea typeface="Arial"/>
                 <a:cs typeface="Arial"/>
               </a:rPr>
-              <a:t>The component displays Laptop</a:t>
+              <a:t>The component displays Notebook</a:t>
             </a:r>
           </a:p>
         </p:txBody>
@@ -17766,7 +18893,7 @@
         <p:txBody>
           <a:bodyPr xmlns:a="http://schemas.openxmlformats.org/drawingml/2006/main"/>
           <a:lstStyle xmlns:a="http://schemas.openxmlformats.org/drawingml/2006/main">
-            <a:defPPr>
+            <a:defPPr algn="l">
               <a:defRPr sz="1200" b="0">
                 <a:solidFill>
                   <a:srgbClr val="6B7F8D"/>
@@ -17778,7 +18905,8 @@
             </a:defPPr>
           </a:lstStyle>
           <a:p xmlns:a="http://schemas.openxmlformats.org/drawingml/2006/main">
-            <a:pPr>
+            <a:pPr algn="l">
+              <a:buNone/>
               <a:defRPr sz="1200" b="0">
                 <a:solidFill>
                   <a:srgbClr val="6B7F8D"/>
@@ -17861,7 +18989,7 @@
         <p:txBody>
           <a:bodyPr xmlns:a="http://schemas.openxmlformats.org/drawingml/2006/main"/>
           <a:lstStyle xmlns:a="http://schemas.openxmlformats.org/drawingml/2006/main">
-            <a:defPPr>
+            <a:defPPr algn="l">
               <a:defRPr sz="1275" b="1">
                 <a:solidFill>
                   <a:srgbClr val="007D83"/>
@@ -17873,7 +19001,8 @@
             </a:defPPr>
           </a:lstStyle>
           <a:p xmlns:a="http://schemas.openxmlformats.org/drawingml/2006/main">
-            <a:pPr>
+            <a:pPr algn="l">
+              <a:buNone/>
               <a:defRPr sz="1275" b="1">
                 <a:solidFill>
                   <a:srgbClr val="007D83"/>
@@ -17927,7 +19056,7 @@
         <p:txBody>
           <a:bodyPr xmlns:a="http://schemas.openxmlformats.org/drawingml/2006/main"/>
           <a:lstStyle xmlns:a="http://schemas.openxmlformats.org/drawingml/2006/main">
-            <a:defPPr>
+            <a:defPPr algn="l">
               <a:defRPr sz="3300" b="1">
                 <a:solidFill>
                   <a:srgbClr val="203B4D"/>
@@ -17939,7 +19068,8 @@
             </a:defPPr>
           </a:lstStyle>
           <a:p xmlns:a="http://schemas.openxmlformats.org/drawingml/2006/main">
-            <a:pPr>
+            <a:pPr algn="l">
+              <a:buNone/>
               <a:defRPr sz="3300" b="1">
                 <a:solidFill>
                   <a:srgbClr val="203B4D"/>
@@ -17993,7 +19123,7 @@
         <p:txBody>
           <a:bodyPr xmlns:a="http://schemas.openxmlformats.org/drawingml/2006/main"/>
           <a:lstStyle xmlns:a="http://schemas.openxmlformats.org/drawingml/2006/main">
-            <a:defPPr>
+            <a:defPPr algn="l">
               <a:defRPr sz="2025" b="0">
                 <a:solidFill>
                   <a:srgbClr val="203B4D"/>
@@ -18005,7 +19135,8 @@
             </a:defPPr>
           </a:lstStyle>
           <a:p xmlns:a="http://schemas.openxmlformats.org/drawingml/2006/main">
-            <a:pPr>
+            <a:pPr algn="l">
+              <a:buNone/>
               <a:defRPr sz="2025" b="0">
                 <a:solidFill>
                   <a:srgbClr val="203B4D"/>
@@ -18028,7 +19159,8 @@
             </a:r>
           </a:p>
           <a:p xmlns:a="http://schemas.openxmlformats.org/drawingml/2006/main">
-            <a:pPr>
+            <a:pPr algn="l">
+              <a:buNone/>
               <a:defRPr sz="2025" b="0">
                 <a:solidFill>
                   <a:srgbClr val="203B4D"/>
@@ -18047,11 +19179,12 @@
                 <a:ea typeface="Arial"/>
                 <a:cs typeface="Arial"/>
               </a:rPr>
-              <a:t>A list manages several assets.</a:t>
-            </a:r>
-          </a:p>
-          <a:p xmlns:a="http://schemas.openxmlformats.org/drawingml/2006/main">
-            <a:pPr>
+              <a:t>A list manages several products.</a:t>
+            </a:r>
+          </a:p>
+          <a:p xmlns:a="http://schemas.openxmlformats.org/drawingml/2006/main">
+            <a:pPr algn="l">
+              <a:buNone/>
               <a:defRPr sz="2025" b="0">
                 <a:solidFill>
                   <a:srgbClr val="203B4D"/>
@@ -18070,11 +19203,12 @@
                 <a:ea typeface="Arial"/>
                 <a:cs typeface="Arial"/>
               </a:rPr>
-              <a:t>A card displays one asset.</a:t>
-            </a:r>
-          </a:p>
-          <a:p xmlns:a="http://schemas.openxmlformats.org/drawingml/2006/main">
-            <a:pPr>
+              <a:t>A card shows a product name, price and category.</a:t>
+            </a:r>
+          </a:p>
+          <a:p xmlns:a="http://schemas.openxmlformats.org/drawingml/2006/main">
+            <a:pPr algn="l">
+              <a:buNone/>
               <a:defRPr sz="2025" b="0">
                 <a:solidFill>
                   <a:srgbClr val="203B4D"/>
@@ -18093,7 +19227,7 @@
                 <a:ea typeface="Arial"/>
                 <a:cs typeface="Arial"/>
               </a:rPr>
-              <a:t>A badge displays an asset’s status.</a:t>
+              <a:t>A badge shows whether it is in stock.</a:t>
             </a:r>
           </a:p>
         </p:txBody>
@@ -18128,7 +19262,7 @@
         <p:txBody>
           <a:bodyPr xmlns:a="http://schemas.openxmlformats.org/drawingml/2006/main"/>
           <a:lstStyle xmlns:a="http://schemas.openxmlformats.org/drawingml/2006/main">
-            <a:defPPr>
+            <a:defPPr algn="l">
               <a:defRPr sz="1875" b="0">
                 <a:solidFill>
                   <a:srgbClr val="087B80"/>
@@ -18140,7 +19274,8 @@
             </a:defPPr>
           </a:lstStyle>
           <a:p xmlns:a="http://schemas.openxmlformats.org/drawingml/2006/main">
-            <a:pPr>
+            <a:pPr algn="l">
+              <a:buNone/>
               <a:defRPr sz="1875" b="0">
                 <a:solidFill>
                   <a:srgbClr val="087B80"/>
@@ -18163,7 +19298,8 @@
             </a:r>
           </a:p>
           <a:p xmlns:a="http://schemas.openxmlformats.org/drawingml/2006/main">
-            <a:pPr>
+            <a:pPr algn="l">
+              <a:buNone/>
               <a:defRPr sz="1875" b="0">
                 <a:solidFill>
                   <a:srgbClr val="087B80"/>
@@ -18186,7 +19322,8 @@
             </a:r>
           </a:p>
           <a:p xmlns:a="http://schemas.openxmlformats.org/drawingml/2006/main">
-            <a:pPr>
+            <a:pPr algn="l">
+              <a:buNone/>
               <a:defRPr sz="1875" b="0">
                 <a:solidFill>
                   <a:srgbClr val="087B80"/>
@@ -18205,11 +19342,12 @@
                 <a:ea typeface="Consolas"/>
                 <a:cs typeface="Consolas"/>
               </a:rPr>
-              <a:t>  AssetSummary</a:t>
-            </a:r>
-          </a:p>
-          <a:p xmlns:a="http://schemas.openxmlformats.org/drawingml/2006/main">
-            <a:pPr>
+              <a:t>  ProductSummary</a:t>
+            </a:r>
+          </a:p>
+          <a:p xmlns:a="http://schemas.openxmlformats.org/drawingml/2006/main">
+            <a:pPr algn="l">
+              <a:buNone/>
               <a:defRPr sz="1875" b="0">
                 <a:solidFill>
                   <a:srgbClr val="087B80"/>
@@ -18232,7 +19370,8 @@
             </a:r>
           </a:p>
           <a:p xmlns:a="http://schemas.openxmlformats.org/drawingml/2006/main">
-            <a:pPr>
+            <a:pPr algn="l">
+              <a:buNone/>
               <a:defRPr sz="1875" b="0">
                 <a:solidFill>
                   <a:srgbClr val="087B80"/>
@@ -18251,11 +19390,12 @@
                 <a:ea typeface="Consolas"/>
                 <a:cs typeface="Consolas"/>
               </a:rPr>
-              <a:t>    AssetList</a:t>
-            </a:r>
-          </a:p>
-          <a:p xmlns:a="http://schemas.openxmlformats.org/drawingml/2006/main">
-            <a:pPr>
+              <a:t>    ProductList</a:t>
+            </a:r>
+          </a:p>
+          <a:p xmlns:a="http://schemas.openxmlformats.org/drawingml/2006/main">
+            <a:pPr algn="l">
+              <a:buNone/>
               <a:defRPr sz="1875" b="0">
                 <a:solidFill>
                   <a:srgbClr val="087B80"/>
@@ -18274,11 +19414,12 @@
                 <a:ea typeface="Consolas"/>
                 <a:cs typeface="Consolas"/>
               </a:rPr>
-              <a:t>      AssetCard</a:t>
-            </a:r>
-          </a:p>
-          <a:p xmlns:a="http://schemas.openxmlformats.org/drawingml/2006/main">
-            <a:pPr>
+              <a:t>      ProductCard</a:t>
+            </a:r>
+          </a:p>
+          <a:p xmlns:a="http://schemas.openxmlformats.org/drawingml/2006/main">
+            <a:pPr algn="l">
+              <a:buNone/>
               <a:defRPr sz="1875" b="0">
                 <a:solidFill>
                   <a:srgbClr val="087B80"/>
@@ -18297,7 +19438,7 @@
                 <a:ea typeface="Consolas"/>
                 <a:cs typeface="Consolas"/>
               </a:rPr>
-              <a:t>        StatusBadge</a:t>
+              <a:t>        StockBadge</a:t>
             </a:r>
           </a:p>
         </p:txBody>
@@ -18332,7 +19473,7 @@
         <p:txBody>
           <a:bodyPr xmlns:a="http://schemas.openxmlformats.org/drawingml/2006/main"/>
           <a:lstStyle xmlns:a="http://schemas.openxmlformats.org/drawingml/2006/main">
-            <a:defPPr>
+            <a:defPPr algn="l">
               <a:defRPr sz="1725" b="1">
                 <a:solidFill>
                   <a:srgbClr val="85551E"/>
@@ -18344,7 +19485,8 @@
             </a:defPPr>
           </a:lstStyle>
           <a:p xmlns:a="http://schemas.openxmlformats.org/drawingml/2006/main">
-            <a:pPr>
+            <a:pPr algn="l">
+              <a:buNone/>
               <a:defRPr sz="1725" b="1">
                 <a:solidFill>
                   <a:srgbClr val="85551E"/>
@@ -18398,7 +19540,7 @@
         <p:txBody>
           <a:bodyPr xmlns:a="http://schemas.openxmlformats.org/drawingml/2006/main"/>
           <a:lstStyle xmlns:a="http://schemas.openxmlformats.org/drawingml/2006/main">
-            <a:defPPr>
+            <a:defPPr algn="l">
               <a:defRPr sz="1200" b="0">
                 <a:solidFill>
                   <a:srgbClr val="6B7F8D"/>
@@ -18410,7 +19552,8 @@
             </a:defPPr>
           </a:lstStyle>
           <a:p xmlns:a="http://schemas.openxmlformats.org/drawingml/2006/main">
-            <a:pPr>
+            <a:pPr algn="l">
+              <a:buNone/>
               <a:defRPr sz="1200" b="0">
                 <a:solidFill>
                   <a:srgbClr val="6B7F8D"/>
@@ -18493,7 +19636,7 @@
         <p:txBody>
           <a:bodyPr xmlns:a="http://schemas.openxmlformats.org/drawingml/2006/main"/>
           <a:lstStyle xmlns:a="http://schemas.openxmlformats.org/drawingml/2006/main">
-            <a:defPPr>
+            <a:defPPr algn="l">
               <a:defRPr sz="1275" b="1">
                 <a:solidFill>
                   <a:srgbClr val="007D83"/>
@@ -18505,7 +19648,8 @@
             </a:defPPr>
           </a:lstStyle>
           <a:p xmlns:a="http://schemas.openxmlformats.org/drawingml/2006/main">
-            <a:pPr>
+            <a:pPr algn="l">
+              <a:buNone/>
               <a:defRPr sz="1275" b="1">
                 <a:solidFill>
                   <a:srgbClr val="007D83"/>
@@ -18559,7 +19703,7 @@
         <p:txBody>
           <a:bodyPr xmlns:a="http://schemas.openxmlformats.org/drawingml/2006/main"/>
           <a:lstStyle xmlns:a="http://schemas.openxmlformats.org/drawingml/2006/main">
-            <a:defPPr>
+            <a:defPPr algn="l">
               <a:defRPr sz="3300" b="1">
                 <a:solidFill>
                   <a:srgbClr val="203B4D"/>
@@ -18571,7 +19715,8 @@
             </a:defPPr>
           </a:lstStyle>
           <a:p xmlns:a="http://schemas.openxmlformats.org/drawingml/2006/main">
-            <a:pPr>
+            <a:pPr algn="l">
+              <a:buNone/>
               <a:defRPr sz="3300" b="1">
                 <a:solidFill>
                   <a:srgbClr val="203B4D"/>
@@ -18625,7 +19770,7 @@
         <p:txBody>
           <a:bodyPr xmlns:a="http://schemas.openxmlformats.org/drawingml/2006/main"/>
           <a:lstStyle xmlns:a="http://schemas.openxmlformats.org/drawingml/2006/main">
-            <a:defPPr>
+            <a:defPPr algn="l">
               <a:defRPr sz="2025" b="0">
                 <a:solidFill>
                   <a:srgbClr val="203B4D"/>
@@ -18637,7 +19782,8 @@
             </a:defPPr>
           </a:lstStyle>
           <a:p xmlns:a="http://schemas.openxmlformats.org/drawingml/2006/main">
-            <a:pPr>
+            <a:pPr algn="l">
+              <a:buNone/>
               <a:defRPr sz="2025" b="0">
                 <a:solidFill>
                   <a:srgbClr val="203B4D"/>
@@ -18660,7 +19806,8 @@
             </a:r>
           </a:p>
           <a:p xmlns:a="http://schemas.openxmlformats.org/drawingml/2006/main">
-            <a:pPr>
+            <a:pPr algn="l">
+              <a:buNone/>
               <a:defRPr sz="2025" b="0">
                 <a:solidFill>
                   <a:srgbClr val="203B4D"/>
@@ -18683,7 +19830,8 @@
             </a:r>
           </a:p>
           <a:p xmlns:a="http://schemas.openxmlformats.org/drawingml/2006/main">
-            <a:pPr>
+            <a:pPr algn="l">
+              <a:buNone/>
               <a:defRPr sz="2025" b="0">
                 <a:solidFill>
                   <a:srgbClr val="203B4D"/>
@@ -18737,7 +19885,7 @@
         <p:txBody>
           <a:bodyPr xmlns:a="http://schemas.openxmlformats.org/drawingml/2006/main"/>
           <a:lstStyle xmlns:a="http://schemas.openxmlformats.org/drawingml/2006/main">
-            <a:defPPr>
+            <a:defPPr algn="l">
               <a:defRPr sz="1875" b="0">
                 <a:solidFill>
                   <a:srgbClr val="087B80"/>
@@ -18749,7 +19897,8 @@
             </a:defPPr>
           </a:lstStyle>
           <a:p xmlns:a="http://schemas.openxmlformats.org/drawingml/2006/main">
-            <a:pPr>
+            <a:pPr algn="l">
+              <a:buNone/>
               <a:defRPr sz="1875" b="0">
                 <a:solidFill>
                   <a:srgbClr val="087B80"/>
@@ -18768,11 +19917,12 @@
                 <a:ea typeface="Consolas"/>
                 <a:cs typeface="Consolas"/>
               </a:rPr>
-              <a:t>function AssetTitle() {</a:t>
-            </a:r>
-          </a:p>
-          <a:p xmlns:a="http://schemas.openxmlformats.org/drawingml/2006/main">
-            <a:pPr>
+              <a:t>function ProductTitle() {</a:t>
+            </a:r>
+          </a:p>
+          <a:p xmlns:a="http://schemas.openxmlformats.org/drawingml/2006/main">
+            <a:pPr algn="l">
+              <a:buNone/>
               <a:defRPr sz="1875" b="0">
                 <a:solidFill>
                   <a:srgbClr val="087B80"/>
@@ -18791,11 +19941,12 @@
                 <a:ea typeface="Consolas"/>
                 <a:cs typeface="Consolas"/>
               </a:rPr>
-              <a:t>  return &lt;h3&gt;Laptop&lt;/h3&gt;;</a:t>
-            </a:r>
-          </a:p>
-          <a:p xmlns:a="http://schemas.openxmlformats.org/drawingml/2006/main">
-            <a:pPr>
+              <a:t>  return &lt;h3&gt;Notebook&lt;/h3&gt;;</a:t>
+            </a:r>
+          </a:p>
+          <a:p xmlns:a="http://schemas.openxmlformats.org/drawingml/2006/main">
+            <a:pPr algn="l">
+              <a:buNone/>
               <a:defRPr sz="1875" b="0">
                 <a:solidFill>
                   <a:srgbClr val="087B80"/>
@@ -18818,7 +19969,8 @@
             </a:r>
           </a:p>
           <a:p xmlns:a="http://schemas.openxmlformats.org/drawingml/2006/main">
-            <a:pPr>
+            <a:pPr algn="l">
+              <a:buNone/>
               <a:defRPr sz="1875" b="0">
                 <a:solidFill>
                   <a:srgbClr val="087B80"/>
@@ -18841,7 +19993,8 @@
             </a:r>
           </a:p>
           <a:p xmlns:a="http://schemas.openxmlformats.org/drawingml/2006/main">
-            <a:pPr>
+            <a:pPr algn="l">
+              <a:buNone/>
               <a:defRPr sz="1875" b="0">
                 <a:solidFill>
                   <a:srgbClr val="087B80"/>
@@ -18860,11 +20013,12 @@
                 <a:ea typeface="Consolas"/>
                 <a:cs typeface="Consolas"/>
               </a:rPr>
-              <a:t>  return &lt;AssetTitle /&gt;;</a:t>
-            </a:r>
-          </a:p>
-          <a:p xmlns:a="http://schemas.openxmlformats.org/drawingml/2006/main">
-            <a:pPr>
+              <a:t>  return &lt;ProductTitle /&gt;;</a:t>
+            </a:r>
+          </a:p>
+          <a:p xmlns:a="http://schemas.openxmlformats.org/drawingml/2006/main">
+            <a:pPr algn="l">
+              <a:buNone/>
               <a:defRPr sz="1875" b="0">
                 <a:solidFill>
                   <a:srgbClr val="087B80"/>
@@ -18918,7 +20072,7 @@
         <p:txBody>
           <a:bodyPr xmlns:a="http://schemas.openxmlformats.org/drawingml/2006/main"/>
           <a:lstStyle xmlns:a="http://schemas.openxmlformats.org/drawingml/2006/main">
-            <a:defPPr>
+            <a:defPPr algn="l">
               <a:defRPr sz="1725" b="1">
                 <a:solidFill>
                   <a:srgbClr val="85551E"/>
@@ -18930,7 +20084,8 @@
             </a:defPPr>
           </a:lstStyle>
           <a:p xmlns:a="http://schemas.openxmlformats.org/drawingml/2006/main">
-            <a:pPr>
+            <a:pPr algn="l">
+              <a:buNone/>
               <a:defRPr sz="1725" b="1">
                 <a:solidFill>
                   <a:srgbClr val="85551E"/>
@@ -18984,7 +20139,7 @@
         <p:txBody>
           <a:bodyPr xmlns:a="http://schemas.openxmlformats.org/drawingml/2006/main"/>
           <a:lstStyle xmlns:a="http://schemas.openxmlformats.org/drawingml/2006/main">
-            <a:defPPr>
+            <a:defPPr algn="l">
               <a:defRPr sz="1200" b="0">
                 <a:solidFill>
                   <a:srgbClr val="6B7F8D"/>
@@ -18996,7 +20151,8 @@
             </a:defPPr>
           </a:lstStyle>
           <a:p xmlns:a="http://schemas.openxmlformats.org/drawingml/2006/main">
-            <a:pPr>
+            <a:pPr algn="l">
+              <a:buNone/>
               <a:defRPr sz="1200" b="0">
                 <a:solidFill>
                   <a:srgbClr val="6B7F8D"/>
@@ -19079,7 +20235,7 @@
         <p:txBody>
           <a:bodyPr xmlns:a="http://schemas.openxmlformats.org/drawingml/2006/main"/>
           <a:lstStyle xmlns:a="http://schemas.openxmlformats.org/drawingml/2006/main">
-            <a:defPPr>
+            <a:defPPr algn="l">
               <a:defRPr sz="1275" b="1">
                 <a:solidFill>
                   <a:srgbClr val="007D83"/>
@@ -19091,7 +20247,8 @@
             </a:defPPr>
           </a:lstStyle>
           <a:p xmlns:a="http://schemas.openxmlformats.org/drawingml/2006/main">
-            <a:pPr>
+            <a:pPr algn="l">
+              <a:buNone/>
               <a:defRPr sz="1275" b="1">
                 <a:solidFill>
                   <a:srgbClr val="007D83"/>
@@ -19145,7 +20302,7 @@
         <p:txBody>
           <a:bodyPr xmlns:a="http://schemas.openxmlformats.org/drawingml/2006/main"/>
           <a:lstStyle xmlns:a="http://schemas.openxmlformats.org/drawingml/2006/main">
-            <a:defPPr>
+            <a:defPPr algn="l">
               <a:defRPr sz="3300" b="1">
                 <a:solidFill>
                   <a:srgbClr val="203B4D"/>
@@ -19157,7 +20314,8 @@
             </a:defPPr>
           </a:lstStyle>
           <a:p xmlns:a="http://schemas.openxmlformats.org/drawingml/2006/main">
-            <a:pPr>
+            <a:pPr algn="l">
+              <a:buNone/>
               <a:defRPr sz="3300" b="1">
                 <a:solidFill>
                   <a:srgbClr val="203B4D"/>
@@ -19211,7 +20369,7 @@
         <p:txBody>
           <a:bodyPr xmlns:a="http://schemas.openxmlformats.org/drawingml/2006/main"/>
           <a:lstStyle xmlns:a="http://schemas.openxmlformats.org/drawingml/2006/main">
-            <a:defPPr>
+            <a:defPPr algn="l">
               <a:defRPr sz="2025" b="0">
                 <a:solidFill>
                   <a:srgbClr val="203B4D"/>
@@ -19223,7 +20381,8 @@
             </a:defPPr>
           </a:lstStyle>
           <a:p xmlns:a="http://schemas.openxmlformats.org/drawingml/2006/main">
-            <a:pPr>
+            <a:pPr algn="l">
+              <a:buNone/>
               <a:defRPr sz="2025" b="0">
                 <a:solidFill>
                   <a:srgbClr val="203B4D"/>
@@ -19246,7 +20405,8 @@
             </a:r>
           </a:p>
           <a:p xmlns:a="http://schemas.openxmlformats.org/drawingml/2006/main">
-            <a:pPr>
+            <a:pPr algn="l">
+              <a:buNone/>
               <a:defRPr sz="2025" b="0">
                 <a:solidFill>
                   <a:srgbClr val="203B4D"/>
@@ -19269,7 +20429,8 @@
             </a:r>
           </a:p>
           <a:p xmlns:a="http://schemas.openxmlformats.org/drawingml/2006/main">
-            <a:pPr>
+            <a:pPr algn="l">
+              <a:buNone/>
               <a:defRPr sz="2025" b="0">
                 <a:solidFill>
                   <a:srgbClr val="203B4D"/>
@@ -19323,7 +20484,7 @@
         <p:txBody>
           <a:bodyPr xmlns:a="http://schemas.openxmlformats.org/drawingml/2006/main"/>
           <a:lstStyle xmlns:a="http://schemas.openxmlformats.org/drawingml/2006/main">
-            <a:defPPr>
+            <a:defPPr algn="l">
               <a:defRPr sz="1875" b="0">
                 <a:solidFill>
                   <a:srgbClr val="087B80"/>
@@ -19335,7 +20496,8 @@
             </a:defPPr>
           </a:lstStyle>
           <a:p xmlns:a="http://schemas.openxmlformats.org/drawingml/2006/main">
-            <a:pPr>
+            <a:pPr algn="l">
+              <a:buNone/>
               <a:defRPr sz="1875" b="0">
                 <a:solidFill>
                   <a:srgbClr val="087B80"/>
@@ -19354,11 +20516,12 @@
                 <a:ea typeface="Consolas"/>
                 <a:cs typeface="Consolas"/>
               </a:rPr>
-              <a:t>// AssetCard.jsx</a:t>
-            </a:r>
-          </a:p>
-          <a:p xmlns:a="http://schemas.openxmlformats.org/drawingml/2006/main">
-            <a:pPr>
+              <a:t>// ProductCard.jsx</a:t>
+            </a:r>
+          </a:p>
+          <a:p xmlns:a="http://schemas.openxmlformats.org/drawingml/2006/main">
+            <a:pPr algn="l">
+              <a:buNone/>
               <a:defRPr sz="1875" b="0">
                 <a:solidFill>
                   <a:srgbClr val="087B80"/>
@@ -19377,7 +20540,7 @@
                 <a:ea typeface="Consolas"/>
                 <a:cs typeface="Consolas"/>
               </a:rPr>
-              <a:t>export default function AssetCard() { /* ... */ }</a:t>
+              <a:t>export default function ProductCard() { /* ... */ }</a:t>
             </a:r>
           </a:p>
           <a:p xmlns:a="http://schemas.openxmlformats.org/drawingml/2006/main">
@@ -19386,7 +20549,8 @@
             </a:r>
           </a:p>
           <a:p xmlns:a="http://schemas.openxmlformats.org/drawingml/2006/main">
-            <a:pPr>
+            <a:pPr algn="l">
+              <a:buNone/>
               <a:defRPr sz="1875" b="0">
                 <a:solidFill>
                   <a:srgbClr val="087B80"/>
@@ -19405,11 +20569,12 @@
                 <a:ea typeface="Consolas"/>
                 <a:cs typeface="Consolas"/>
               </a:rPr>
-              <a:t>// assets.js</a:t>
-            </a:r>
-          </a:p>
-          <a:p xmlns:a="http://schemas.openxmlformats.org/drawingml/2006/main">
-            <a:pPr>
+              <a:t>// products.js</a:t>
+            </a:r>
+          </a:p>
+          <a:p xmlns:a="http://schemas.openxmlformats.org/drawingml/2006/main">
+            <a:pPr algn="l">
+              <a:buNone/>
               <a:defRPr sz="1875" b="0">
                 <a:solidFill>
                   <a:srgbClr val="087B80"/>
@@ -19428,7 +20593,7 @@
                 <a:ea typeface="Consolas"/>
                 <a:cs typeface="Consolas"/>
               </a:rPr>
-              <a:t>export const assets = [];</a:t>
+              <a:t>export const products = [];</a:t>
             </a:r>
           </a:p>
           <a:p xmlns:a="http://schemas.openxmlformats.org/drawingml/2006/main">
@@ -19437,7 +20602,8 @@
             </a:r>
           </a:p>
           <a:p xmlns:a="http://schemas.openxmlformats.org/drawingml/2006/main">
-            <a:pPr>
+            <a:pPr algn="l">
+              <a:buNone/>
               <a:defRPr sz="1875" b="0">
                 <a:solidFill>
                   <a:srgbClr val="087B80"/>
@@ -19460,7 +20626,8 @@
             </a:r>
           </a:p>
           <a:p xmlns:a="http://schemas.openxmlformats.org/drawingml/2006/main">
-            <a:pPr>
+            <a:pPr algn="l">
+              <a:buNone/>
               <a:defRPr sz="1875" b="0">
                 <a:solidFill>
                   <a:srgbClr val="087B80"/>
@@ -19479,11 +20646,12 @@
                 <a:ea typeface="Consolas"/>
                 <a:cs typeface="Consolas"/>
               </a:rPr>
-              <a:t>import AssetCard from './components/AssetCard.jsx';</a:t>
-            </a:r>
-          </a:p>
-          <a:p xmlns:a="http://schemas.openxmlformats.org/drawingml/2006/main">
-            <a:pPr>
+              <a:t>import ProductCard from './components/ProductCard.jsx';</a:t>
+            </a:r>
+          </a:p>
+          <a:p xmlns:a="http://schemas.openxmlformats.org/drawingml/2006/main">
+            <a:pPr algn="l">
+              <a:buNone/>
               <a:defRPr sz="1875" b="0">
                 <a:solidFill>
                   <a:srgbClr val="087B80"/>
@@ -19502,7 +20670,7 @@
                 <a:ea typeface="Consolas"/>
                 <a:cs typeface="Consolas"/>
               </a:rPr>
-              <a:t>import { assets } from './data/assets.js';</a:t>
+              <a:t>import { products } from './data/products.js';</a:t>
             </a:r>
           </a:p>
         </p:txBody>
@@ -19537,7 +20705,7 @@
         <p:txBody>
           <a:bodyPr xmlns:a="http://schemas.openxmlformats.org/drawingml/2006/main"/>
           <a:lstStyle xmlns:a="http://schemas.openxmlformats.org/drawingml/2006/main">
-            <a:defPPr>
+            <a:defPPr algn="l">
               <a:defRPr sz="1725" b="1">
                 <a:solidFill>
                   <a:srgbClr val="85551E"/>
@@ -19549,7 +20717,8 @@
             </a:defPPr>
           </a:lstStyle>
           <a:p xmlns:a="http://schemas.openxmlformats.org/drawingml/2006/main">
-            <a:pPr>
+            <a:pPr algn="l">
+              <a:buNone/>
               <a:defRPr sz="1725" b="1">
                 <a:solidFill>
                   <a:srgbClr val="85551E"/>
@@ -19603,7 +20772,7 @@
         <p:txBody>
           <a:bodyPr xmlns:a="http://schemas.openxmlformats.org/drawingml/2006/main"/>
           <a:lstStyle xmlns:a="http://schemas.openxmlformats.org/drawingml/2006/main">
-            <a:defPPr>
+            <a:defPPr algn="l">
               <a:defRPr sz="1200" b="0">
                 <a:solidFill>
                   <a:srgbClr val="6B7F8D"/>
@@ -19615,7 +20784,8 @@
             </a:defPPr>
           </a:lstStyle>
           <a:p xmlns:a="http://schemas.openxmlformats.org/drawingml/2006/main">
-            <a:pPr>
+            <a:pPr algn="l">
+              <a:buNone/>
               <a:defRPr sz="1200" b="0">
                 <a:solidFill>
                   <a:srgbClr val="6B7F8D"/>
@@ -19698,7 +20868,7 @@
         <p:txBody>
           <a:bodyPr xmlns:a="http://schemas.openxmlformats.org/drawingml/2006/main"/>
           <a:lstStyle xmlns:a="http://schemas.openxmlformats.org/drawingml/2006/main">
-            <a:defPPr>
+            <a:defPPr algn="l">
               <a:defRPr sz="1275" b="1">
                 <a:solidFill>
                   <a:srgbClr val="007D83"/>
@@ -19710,7 +20880,8 @@
             </a:defPPr>
           </a:lstStyle>
           <a:p xmlns:a="http://schemas.openxmlformats.org/drawingml/2006/main">
-            <a:pPr>
+            <a:pPr algn="l">
+              <a:buNone/>
               <a:defRPr sz="1275" b="1">
                 <a:solidFill>
                   <a:srgbClr val="007D83"/>
@@ -19764,7 +20935,7 @@
         <p:txBody>
           <a:bodyPr xmlns:a="http://schemas.openxmlformats.org/drawingml/2006/main"/>
           <a:lstStyle xmlns:a="http://schemas.openxmlformats.org/drawingml/2006/main">
-            <a:defPPr>
+            <a:defPPr algn="l">
               <a:defRPr sz="3300" b="1">
                 <a:solidFill>
                   <a:srgbClr val="203B4D"/>
@@ -19776,7 +20947,8 @@
             </a:defPPr>
           </a:lstStyle>
           <a:p xmlns:a="http://schemas.openxmlformats.org/drawingml/2006/main">
-            <a:pPr>
+            <a:pPr algn="l">
+              <a:buNone/>
               <a:defRPr sz="3300" b="1">
                 <a:solidFill>
                   <a:srgbClr val="203B4D"/>
@@ -19830,7 +21002,7 @@
         <p:txBody>
           <a:bodyPr xmlns:a="http://schemas.openxmlformats.org/drawingml/2006/main"/>
           <a:lstStyle xmlns:a="http://schemas.openxmlformats.org/drawingml/2006/main">
-            <a:defPPr>
+            <a:defPPr algn="l">
               <a:defRPr sz="2025" b="0">
                 <a:solidFill>
                   <a:srgbClr val="203B4D"/>
@@ -19842,7 +21014,8 @@
             </a:defPPr>
           </a:lstStyle>
           <a:p xmlns:a="http://schemas.openxmlformats.org/drawingml/2006/main">
-            <a:pPr>
+            <a:pPr algn="l">
+              <a:buNone/>
               <a:defRPr sz="2025" b="0">
                 <a:solidFill>
                   <a:srgbClr val="203B4D"/>
@@ -19865,7 +21038,8 @@
             </a:r>
           </a:p>
           <a:p xmlns:a="http://schemas.openxmlformats.org/drawingml/2006/main">
-            <a:pPr>
+            <a:pPr algn="l">
+              <a:buNone/>
               <a:defRPr sz="2025" b="0">
                 <a:solidFill>
                   <a:srgbClr val="203B4D"/>
@@ -19888,7 +21062,8 @@
             </a:r>
           </a:p>
           <a:p xmlns:a="http://schemas.openxmlformats.org/drawingml/2006/main">
-            <a:pPr>
+            <a:pPr algn="l">
+              <a:buNone/>
               <a:defRPr sz="2025" b="0">
                 <a:solidFill>
                   <a:srgbClr val="203B4D"/>
@@ -19942,7 +21117,7 @@
         <p:txBody>
           <a:bodyPr xmlns:a="http://schemas.openxmlformats.org/drawingml/2006/main"/>
           <a:lstStyle xmlns:a="http://schemas.openxmlformats.org/drawingml/2006/main">
-            <a:defPPr>
+            <a:defPPr algn="l">
               <a:defRPr sz="1875" b="0">
                 <a:solidFill>
                   <a:srgbClr val="087B80"/>
@@ -19954,7 +21129,8 @@
             </a:defPPr>
           </a:lstStyle>
           <a:p xmlns:a="http://schemas.openxmlformats.org/drawingml/2006/main">
-            <a:pPr>
+            <a:pPr algn="l">
+              <a:buNone/>
               <a:defRPr sz="1875" b="0">
                 <a:solidFill>
                   <a:srgbClr val="087B80"/>
@@ -19973,11 +21149,12 @@
                 <a:ea typeface="Consolas"/>
                 <a:cs typeface="Consolas"/>
               </a:rPr>
-              <a:t>function AssetTitle(props) {</a:t>
-            </a:r>
-          </a:p>
-          <a:p xmlns:a="http://schemas.openxmlformats.org/drawingml/2006/main">
-            <a:pPr>
+              <a:t>function ProductTitle(props) {</a:t>
+            </a:r>
+          </a:p>
+          <a:p xmlns:a="http://schemas.openxmlformats.org/drawingml/2006/main">
+            <a:pPr algn="l">
+              <a:buNone/>
               <a:defRPr sz="1875" b="0">
                 <a:solidFill>
                   <a:srgbClr val="087B80"/>
@@ -20000,7 +21177,8 @@
             </a:r>
           </a:p>
           <a:p xmlns:a="http://schemas.openxmlformats.org/drawingml/2006/main">
-            <a:pPr>
+            <a:pPr algn="l">
+              <a:buNone/>
               <a:defRPr sz="1875" b="0">
                 <a:solidFill>
                   <a:srgbClr val="087B80"/>
@@ -20023,7 +21201,8 @@
             </a:r>
           </a:p>
           <a:p xmlns:a="http://schemas.openxmlformats.org/drawingml/2006/main">
-            <a:pPr>
+            <a:pPr algn="l">
+              <a:buNone/>
               <a:defRPr sz="1875" b="0">
                 <a:solidFill>
                   <a:srgbClr val="087B80"/>
@@ -20042,11 +21221,12 @@
                 <a:ea typeface="Consolas"/>
                 <a:cs typeface="Consolas"/>
               </a:rPr>
-              <a:t>&lt;AssetTitle name="Laptop" /&gt;</a:t>
-            </a:r>
-          </a:p>
-          <a:p xmlns:a="http://schemas.openxmlformats.org/drawingml/2006/main">
-            <a:pPr>
+              <a:t>&lt;ProductTitle name="Notebook" /&gt;</a:t>
+            </a:r>
+          </a:p>
+          <a:p xmlns:a="http://schemas.openxmlformats.org/drawingml/2006/main">
+            <a:pPr algn="l">
+              <a:buNone/>
               <a:defRPr sz="1875" b="0">
                 <a:solidFill>
                   <a:srgbClr val="087B80"/>
@@ -20065,7 +21245,7 @@
                 <a:ea typeface="Consolas"/>
                 <a:cs typeface="Consolas"/>
               </a:rPr>
-              <a:t>&lt;AssetTitle name="Monitor" /&gt;</a:t>
+              <a:t>&lt;ProductTitle name="Pen" /&gt;</a:t>
             </a:r>
           </a:p>
         </p:txBody>
@@ -20100,7 +21280,7 @@
         <p:txBody>
           <a:bodyPr xmlns:a="http://schemas.openxmlformats.org/drawingml/2006/main"/>
           <a:lstStyle xmlns:a="http://schemas.openxmlformats.org/drawingml/2006/main">
-            <a:defPPr>
+            <a:defPPr algn="l">
               <a:defRPr sz="1725" b="1">
                 <a:solidFill>
                   <a:srgbClr val="85551E"/>
@@ -20112,7 +21292,8 @@
             </a:defPPr>
           </a:lstStyle>
           <a:p xmlns:a="http://schemas.openxmlformats.org/drawingml/2006/main">
-            <a:pPr>
+            <a:pPr algn="l">
+              <a:buNone/>
               <a:defRPr sz="1725" b="1">
                 <a:solidFill>
                   <a:srgbClr val="85551E"/>
@@ -20166,7 +21347,7 @@
         <p:txBody>
           <a:bodyPr xmlns:a="http://schemas.openxmlformats.org/drawingml/2006/main"/>
           <a:lstStyle xmlns:a="http://schemas.openxmlformats.org/drawingml/2006/main">
-            <a:defPPr>
+            <a:defPPr algn="l">
               <a:defRPr sz="1200" b="0">
                 <a:solidFill>
                   <a:srgbClr val="6B7F8D"/>
@@ -20178,7 +21359,8 @@
             </a:defPPr>
           </a:lstStyle>
           <a:p xmlns:a="http://schemas.openxmlformats.org/drawingml/2006/main">
-            <a:pPr>
+            <a:pPr algn="l">
+              <a:buNone/>
               <a:defRPr sz="1200" b="0">
                 <a:solidFill>
                   <a:srgbClr val="6B7F8D"/>
@@ -20261,7 +21443,7 @@
         <p:txBody>
           <a:bodyPr xmlns:a="http://schemas.openxmlformats.org/drawingml/2006/main"/>
           <a:lstStyle xmlns:a="http://schemas.openxmlformats.org/drawingml/2006/main">
-            <a:defPPr>
+            <a:defPPr algn="l">
               <a:defRPr sz="1275" b="1">
                 <a:solidFill>
                   <a:srgbClr val="007D83"/>
@@ -20273,7 +21455,8 @@
             </a:defPPr>
           </a:lstStyle>
           <a:p xmlns:a="http://schemas.openxmlformats.org/drawingml/2006/main">
-            <a:pPr>
+            <a:pPr algn="l">
+              <a:buNone/>
               <a:defRPr sz="1275" b="1">
                 <a:solidFill>
                   <a:srgbClr val="007D83"/>
@@ -20327,7 +21510,7 @@
         <p:txBody>
           <a:bodyPr xmlns:a="http://schemas.openxmlformats.org/drawingml/2006/main"/>
           <a:lstStyle xmlns:a="http://schemas.openxmlformats.org/drawingml/2006/main">
-            <a:defPPr>
+            <a:defPPr algn="l">
               <a:defRPr sz="3300" b="1">
                 <a:solidFill>
                   <a:srgbClr val="203B4D"/>
@@ -20339,7 +21522,8 @@
             </a:defPPr>
           </a:lstStyle>
           <a:p xmlns:a="http://schemas.openxmlformats.org/drawingml/2006/main">
-            <a:pPr>
+            <a:pPr algn="l">
+              <a:buNone/>
               <a:defRPr sz="3300" b="1">
                 <a:solidFill>
                   <a:srgbClr val="203B4D"/>
@@ -20393,7 +21577,7 @@
         <p:txBody>
           <a:bodyPr xmlns:a="http://schemas.openxmlformats.org/drawingml/2006/main"/>
           <a:lstStyle xmlns:a="http://schemas.openxmlformats.org/drawingml/2006/main">
-            <a:defPPr>
+            <a:defPPr algn="l">
               <a:defRPr sz="2025" b="0">
                 <a:solidFill>
                   <a:srgbClr val="203B4D"/>
@@ -20405,7 +21589,8 @@
             </a:defPPr>
           </a:lstStyle>
           <a:p xmlns:a="http://schemas.openxmlformats.org/drawingml/2006/main">
-            <a:pPr>
+            <a:pPr algn="l">
+              <a:buNone/>
               <a:defRPr sz="2025" b="0">
                 <a:solidFill>
                   <a:srgbClr val="203B4D"/>
@@ -20428,7 +21613,8 @@
             </a:r>
           </a:p>
           <a:p xmlns:a="http://schemas.openxmlformats.org/drawingml/2006/main">
-            <a:pPr>
+            <a:pPr algn="l">
+              <a:buNone/>
               <a:defRPr sz="2025" b="0">
                 <a:solidFill>
                   <a:srgbClr val="203B4D"/>
@@ -20451,7 +21637,8 @@
             </a:r>
           </a:p>
           <a:p xmlns:a="http://schemas.openxmlformats.org/drawingml/2006/main">
-            <a:pPr>
+            <a:pPr algn="l">
+              <a:buNone/>
               <a:defRPr sz="2025" b="0">
                 <a:solidFill>
                   <a:srgbClr val="203B4D"/>
@@ -20505,7 +21692,7 @@
         <p:txBody>
           <a:bodyPr xmlns:a="http://schemas.openxmlformats.org/drawingml/2006/main"/>
           <a:lstStyle xmlns:a="http://schemas.openxmlformats.org/drawingml/2006/main">
-            <a:defPPr>
+            <a:defPPr algn="l">
               <a:defRPr sz="1875" b="0">
                 <a:solidFill>
                   <a:srgbClr val="087B80"/>
@@ -20517,7 +21704,8 @@
             </a:defPPr>
           </a:lstStyle>
           <a:p xmlns:a="http://schemas.openxmlformats.org/drawingml/2006/main">
-            <a:pPr>
+            <a:pPr algn="l">
+              <a:buNone/>
               <a:defRPr sz="1875" b="0">
                 <a:solidFill>
                   <a:srgbClr val="087B80"/>
@@ -20536,11 +21724,12 @@
                 <a:ea typeface="Consolas"/>
                 <a:cs typeface="Consolas"/>
               </a:rPr>
-              <a:t>function AssetTitle({ name }) {</a:t>
-            </a:r>
-          </a:p>
-          <a:p xmlns:a="http://schemas.openxmlformats.org/drawingml/2006/main">
-            <a:pPr>
+              <a:t>function ProductTitle({ name }) {</a:t>
+            </a:r>
+          </a:p>
+          <a:p xmlns:a="http://schemas.openxmlformats.org/drawingml/2006/main">
+            <a:pPr algn="l">
+              <a:buNone/>
               <a:defRPr sz="1875" b="0">
                 <a:solidFill>
                   <a:srgbClr val="087B80"/>
@@ -20563,7 +21752,8 @@
             </a:r>
           </a:p>
           <a:p xmlns:a="http://schemas.openxmlformats.org/drawingml/2006/main">
-            <a:pPr>
+            <a:pPr algn="l">
+              <a:buNone/>
               <a:defRPr sz="1875" b="0">
                 <a:solidFill>
                   <a:srgbClr val="087B80"/>
@@ -20586,7 +21776,8 @@
             </a:r>
           </a:p>
           <a:p xmlns:a="http://schemas.openxmlformats.org/drawingml/2006/main">
-            <a:pPr>
+            <a:pPr algn="l">
+              <a:buNone/>
               <a:defRPr sz="1875" b="0">
                 <a:solidFill>
                   <a:srgbClr val="087B80"/>
@@ -20640,7 +21831,7 @@
         <p:txBody>
           <a:bodyPr xmlns:a="http://schemas.openxmlformats.org/drawingml/2006/main"/>
           <a:lstStyle xmlns:a="http://schemas.openxmlformats.org/drawingml/2006/main">
-            <a:defPPr>
+            <a:defPPr algn="l">
               <a:defRPr sz="1725" b="1">
                 <a:solidFill>
                   <a:srgbClr val="85551E"/>
@@ -20652,7 +21843,8 @@
             </a:defPPr>
           </a:lstStyle>
           <a:p xmlns:a="http://schemas.openxmlformats.org/drawingml/2006/main">
-            <a:pPr>
+            <a:pPr algn="l">
+              <a:buNone/>
               <a:defRPr sz="1725" b="1">
                 <a:solidFill>
                   <a:srgbClr val="85551E"/>
@@ -20706,7 +21898,7 @@
         <p:txBody>
           <a:bodyPr xmlns:a="http://schemas.openxmlformats.org/drawingml/2006/main"/>
           <a:lstStyle xmlns:a="http://schemas.openxmlformats.org/drawingml/2006/main">
-            <a:defPPr>
+            <a:defPPr algn="l">
               <a:defRPr sz="1200" b="0">
                 <a:solidFill>
                   <a:srgbClr val="6B7F8D"/>
@@ -20718,7 +21910,8 @@
             </a:defPPr>
           </a:lstStyle>
           <a:p xmlns:a="http://schemas.openxmlformats.org/drawingml/2006/main">
-            <a:pPr>
+            <a:pPr algn="l">
+              <a:buNone/>
               <a:defRPr sz="1200" b="0">
                 <a:solidFill>
                   <a:srgbClr val="6B7F8D"/>
